--- a/QC inspections suppliers/Nahunta_Thoracics_DeepDive.pptx
+++ b/QC inspections suppliers/Nahunta_Thoracics_DeepDive.pptx
@@ -183,10 +183,10 @@
                     <c:v>8/19</c:v>
                   </c:pt>
                   <c:pt idx="4">
-                    <c:v>8/26 ①②</c:v>
+                    <c:v>8/26 · Francisco + two-stage</c:v>
                   </c:pt>
                   <c:pt idx="5">
-                    <c:v>9/9 ③</c:v>
+                    <c:v>9/9 · trachea conflict</c:v>
                   </c:pt>
                 </c:lvl>
               </c:multiLvlStrCache>
@@ -275,7 +275,7 @@
           <a:lstStyle/>
           <a:p>
             <a:pPr>
-              <a:defRPr sz="900" b="0" i="0" u="none" strike="noStrike">
+              <a:defRPr sz="800" b="0" i="0" u="none" strike="noStrike">
                 <a:solidFill>
                   <a:srgbClr val="1F2937"/>
                 </a:solidFill>
@@ -1245,7 +1245,7 @@
                 <a:ea typeface="Calibri" pitchFamily="34" charset="-122"/>
                 <a:cs typeface="Calibri" pitchFamily="34" charset="-120"/>
               </a:rPr>
-              <a:t>Harvest yield by visit — usable ÷ blocks at harvest (the comparable series)</a:t>
+              <a:t>Harvest yield by visit — usable ÷ blocks at harvest</a:t>
             </a:r>
             <a:endParaRPr lang="en-US" sz="1000" dirty="0"/>
           </a:p>
@@ -1259,7 +1259,7 @@
         </p:nvGraphicFramePr>
         <p:xfrm>
           <a:off x="411480" y="1261872"/>
-          <a:ext cx="5577840" cy="1691640"/>
+          <a:ext cx="5577840" cy="1874520"/>
         </p:xfrm>
         <a:graphic xmlns:a="http://schemas.openxmlformats.org/drawingml/2006/main">
           <a:graphicData uri="http://schemas.openxmlformats.org/drawingml/2006/chart">
@@ -1270,45 +1270,6 @@
       <p:sp>
         <p:nvSpPr>
           <p:cNvPr id="6" name="Text 3"/>
-          <p:cNvSpPr/>
-          <p:nvPr/>
-        </p:nvSpPr>
-        <p:spPr>
-          <a:xfrm>
-            <a:off x="411480" y="2999232"/>
-            <a:ext cx="5577840" cy="274320"/>
-          </a:xfrm>
-          <a:prstGeom prst="rect">
-            <a:avLst/>
-          </a:prstGeom>
-          <a:noFill/>
-          <a:ln/>
-        </p:spPr>
-        <p:txBody>
-          <a:bodyPr wrap="square" lIns="0" tIns="0" rIns="0" bIns="0" rtlCol="0" anchor="ctr"/>
-          <a:lstStyle/>
-          <a:p>
-            <a:pPr indent="0" marL="0">
-              <a:buNone/>
-            </a:pPr>
-            <a:r>
-              <a:rPr lang="en-US" sz="760" i="1" dirty="0">
-                <a:solidFill>
-                  <a:srgbClr val="6B7280"/>
-                </a:solidFill>
-                <a:latin typeface="Calibri" pitchFamily="34" charset="0"/>
-                <a:ea typeface="Calibri" pitchFamily="34" charset="-122"/>
-                <a:cs typeface="Calibri" pitchFamily="34" charset="-120"/>
-              </a:rPr>
-              <a:t>① Francisco's team engaged   ② two-inspection process starts (Jordan screens at harvest, our QC inspects what he passes)   ③ trachea conflict hits</a:t>
-            </a:r>
-            <a:endParaRPr lang="en-US" sz="760" dirty="0"/>
-          </a:p>
-        </p:txBody>
-      </p:sp>
-      <p:sp>
-        <p:nvSpPr>
-          <p:cNvPr id="7" name="Text 4"/>
           <p:cNvSpPr/>
           <p:nvPr/>
         </p:nvSpPr>
@@ -5539,52 +5500,13 @@
       </p:graphicFrame>
       <p:sp>
         <p:nvSpPr>
-          <p:cNvPr id="9" name="Text 5"/>
+          <p:cNvPr id="8" name="Text 4"/>
           <p:cNvSpPr/>
           <p:nvPr/>
         </p:nvSpPr>
         <p:spPr>
           <a:xfrm>
-            <a:off x="6172200" y="3054096"/>
-            <a:ext cx="5577840" cy="237744"/>
-          </a:xfrm>
-          <a:prstGeom prst="rect">
-            <a:avLst/>
-          </a:prstGeom>
-          <a:noFill/>
-          <a:ln/>
-        </p:spPr>
-        <p:txBody>
-          <a:bodyPr wrap="square" lIns="0" tIns="0" rIns="0" bIns="0" rtlCol="0" anchor="ctr"/>
-          <a:lstStyle/>
-          <a:p>
-            <a:pPr indent="0" marL="0">
-              <a:buNone/>
-            </a:pPr>
-            <a:r>
-              <a:rPr lang="en-US" sz="760" i="1" dirty="0">
-                <a:solidFill>
-                  <a:srgbClr val="6B7280"/>
-                </a:solidFill>
-                <a:latin typeface="Calibri" pitchFamily="34" charset="0"/>
-                <a:ea typeface="Calibri" pitchFamily="34" charset="-122"/>
-                <a:cs typeface="Calibri" pitchFamily="34" charset="-120"/>
-              </a:rPr>
-              <a:t>Single-stage = our tech inspected the whole harvest. Two-stage = QC accept is of what Jordan passed. 8/12: sheet lists 12 reasons vs 11 fails (±1).</a:t>
-            </a:r>
-            <a:endParaRPr lang="en-US" sz="760" dirty="0"/>
-          </a:p>
-        </p:txBody>
-      </p:sp>
-      <p:sp>
-        <p:nvSpPr>
-          <p:cNvPr id="10" name="Text 6"/>
-          <p:cNvSpPr/>
-          <p:nvPr/>
-        </p:nvSpPr>
-        <p:spPr>
-          <a:xfrm>
-            <a:off x="411480" y="3401568"/>
+            <a:off x="411480" y="3456432"/>
             <a:ext cx="5577840" cy="219456"/>
           </a:xfrm>
           <a:prstGeom prst="rect">
@@ -5609,7 +5531,7 @@
                 <a:ea typeface="Calibri" pitchFamily="34" charset="-122"/>
                 <a:cs typeface="Calibri" pitchFamily="34" charset="-120"/>
               </a:rPr>
-              <a:t>What's failing — one damage mode</a:t>
+              <a:t>What's failing — reasons</a:t>
             </a:r>
             <a:endParaRPr lang="en-US" sz="1000" dirty="0"/>
           </a:p>
@@ -5617,14 +5539,14 @@
       </p:sp>
       <p:sp>
         <p:nvSpPr>
-          <p:cNvPr id="11" name="Shape 7"/>
+          <p:cNvPr id="9" name="Shape 5"/>
           <p:cNvSpPr/>
           <p:nvPr/>
         </p:nvSpPr>
         <p:spPr>
           <a:xfrm>
-            <a:off x="411480" y="3721608"/>
-            <a:ext cx="2834640" cy="146304"/>
+            <a:off x="411480" y="3794760"/>
+            <a:ext cx="2743200" cy="146304"/>
           </a:xfrm>
           <a:prstGeom prst="rect">
             <a:avLst/>
@@ -5637,14 +5559,14 @@
       </p:sp>
       <p:sp>
         <p:nvSpPr>
-          <p:cNvPr id="12" name="Text 8"/>
+          <p:cNvPr id="10" name="Text 6"/>
           <p:cNvSpPr/>
           <p:nvPr/>
         </p:nvSpPr>
         <p:spPr>
           <a:xfrm>
-            <a:off x="3337560" y="3657600"/>
-            <a:ext cx="8321040" cy="274320"/>
+            <a:off x="3246120" y="3730752"/>
+            <a:ext cx="8412480" cy="274320"/>
           </a:xfrm>
           <a:prstGeom prst="rect">
             <a:avLst/>
@@ -5660,7 +5582,7 @@
               <a:buNone/>
             </a:pPr>
             <a:r>
-              <a:rPr lang="en-US" sz="860" b="1" dirty="0">
+              <a:rPr lang="en-US" sz="900" b="1" dirty="0">
                 <a:solidFill>
                   <a:srgbClr val="1F2937"/>
                 </a:solidFill>
@@ -5668,13 +5590,13 @@
                 <a:ea typeface="Calibri" pitchFamily="34" charset="-122"/>
                 <a:cs typeface="Calibri" pitchFamily="34" charset="-120"/>
               </a:rPr>
-              <a:t>Lung laceration (right-lung perimeter)  </a:t>
+              <a:t>Lung laceration (right-lung perimeter)</a:t>
             </a:r>
             <a:pPr indent="0" marL="0">
               <a:buNone/>
             </a:pPr>
             <a:r>
-              <a:rPr lang="en-US" sz="860" dirty="0">
+              <a:rPr lang="en-US" sz="900" dirty="0">
                 <a:solidFill>
                   <a:srgbClr val="6B7280"/>
                 </a:solidFill>
@@ -5682,9 +5604,110 @@
                 <a:ea typeface="Calibri" pitchFamily="34" charset="-122"/>
                 <a:cs typeface="Calibri" pitchFamily="34" charset="-120"/>
               </a:rPr>
-              <a:t>· 42 QC-tagged + 8 at harvest (9/9)</a:t>
+              <a:t>  —  </a:t>
             </a:r>
-            <a:endParaRPr lang="en-US" sz="860" dirty="0"/>
+            <a:pPr indent="0" marL="0">
+              <a:buNone/>
+            </a:pPr>
+            <a:r>
+              <a:rPr lang="en-US" sz="900" b="1" dirty="0">
+                <a:solidFill>
+                  <a:srgbClr val="1F2937"/>
+                </a:solidFill>
+                <a:latin typeface="Calibri" pitchFamily="34" charset="0"/>
+                <a:ea typeface="Calibri" pitchFamily="34" charset="-122"/>
+                <a:cs typeface="Calibri" pitchFamily="34" charset="-120"/>
+              </a:rPr>
+              <a:t>50</a:t>
+            </a:r>
+            <a:endParaRPr lang="en-US" sz="900" dirty="0"/>
+          </a:p>
+        </p:txBody>
+      </p:sp>
+      <p:sp>
+        <p:nvSpPr>
+          <p:cNvPr id="11" name="Shape 7"/>
+          <p:cNvSpPr/>
+          <p:nvPr/>
+        </p:nvSpPr>
+        <p:spPr>
+          <a:xfrm>
+            <a:off x="411480" y="4114800"/>
+            <a:ext cx="1152144" cy="146304"/>
+          </a:xfrm>
+          <a:prstGeom prst="rect">
+            <a:avLst/>
+          </a:prstGeom>
+          <a:solidFill>
+            <a:srgbClr val="0E7490"/>
+          </a:solidFill>
+          <a:ln/>
+        </p:spPr>
+      </p:sp>
+      <p:sp>
+        <p:nvSpPr>
+          <p:cNvPr id="12" name="Text 8"/>
+          <p:cNvSpPr/>
+          <p:nvPr/>
+        </p:nvSpPr>
+        <p:spPr>
+          <a:xfrm>
+            <a:off x="3246120" y="4050792"/>
+            <a:ext cx="8412480" cy="274320"/>
+          </a:xfrm>
+          <a:prstGeom prst="rect">
+            <a:avLst/>
+          </a:prstGeom>
+          <a:noFill/>
+          <a:ln/>
+        </p:spPr>
+        <p:txBody>
+          <a:bodyPr wrap="square" lIns="0" tIns="0" rIns="0" bIns="0" rtlCol="0" anchor="ctr"/>
+          <a:lstStyle/>
+          <a:p>
+            <a:pPr indent="0" marL="0">
+              <a:buNone/>
+            </a:pPr>
+            <a:r>
+              <a:rPr lang="en-US" sz="900" dirty="0">
+                <a:solidFill>
+                  <a:srgbClr val="1F2937"/>
+                </a:solidFill>
+                <a:latin typeface="Calibri" pitchFamily="34" charset="0"/>
+                <a:ea typeface="Calibri" pitchFamily="34" charset="-122"/>
+                <a:cs typeface="Calibri" pitchFamily="34" charset="-120"/>
+              </a:rPr>
+              <a:t>Heart damage / laceration</a:t>
+            </a:r>
+            <a:pPr indent="0" marL="0">
+              <a:buNone/>
+            </a:pPr>
+            <a:r>
+              <a:rPr lang="en-US" sz="900" dirty="0">
+                <a:solidFill>
+                  <a:srgbClr val="6B7280"/>
+                </a:solidFill>
+                <a:latin typeface="Calibri" pitchFamily="34" charset="0"/>
+                <a:ea typeface="Calibri" pitchFamily="34" charset="-122"/>
+                <a:cs typeface="Calibri" pitchFamily="34" charset="-120"/>
+              </a:rPr>
+              <a:t>  —  </a:t>
+            </a:r>
+            <a:pPr indent="0" marL="0">
+              <a:buNone/>
+            </a:pPr>
+            <a:r>
+              <a:rPr lang="en-US" sz="900" b="1" dirty="0">
+                <a:solidFill>
+                  <a:srgbClr val="1F2937"/>
+                </a:solidFill>
+                <a:latin typeface="Calibri" pitchFamily="34" charset="0"/>
+                <a:ea typeface="Calibri" pitchFamily="34" charset="-122"/>
+                <a:cs typeface="Calibri" pitchFamily="34" charset="-120"/>
+              </a:rPr>
+              <a:t>21</a:t>
+            </a:r>
+            <a:endParaRPr lang="en-US" sz="900" dirty="0"/>
           </a:p>
         </p:txBody>
       </p:sp>
@@ -5696,8 +5719,8 @@
         </p:nvSpPr>
         <p:spPr>
           <a:xfrm>
-            <a:off x="411480" y="4032504"/>
-            <a:ext cx="1190549" cy="146304"/>
+            <a:off x="411480" y="4434840"/>
+            <a:ext cx="493776" cy="146304"/>
           </a:xfrm>
           <a:prstGeom prst="rect">
             <a:avLst/>
@@ -5716,8 +5739,8 @@
         </p:nvSpPr>
         <p:spPr>
           <a:xfrm>
-            <a:off x="3337560" y="3968496"/>
-            <a:ext cx="8321040" cy="274320"/>
+            <a:off x="3246120" y="4370832"/>
+            <a:ext cx="8412480" cy="274320"/>
           </a:xfrm>
           <a:prstGeom prst="rect">
             <a:avLst/>
@@ -5733,7 +5756,7 @@
               <a:buNone/>
             </a:pPr>
             <a:r>
-              <a:rPr lang="en-US" sz="860" dirty="0">
+              <a:rPr lang="en-US" sz="900" dirty="0">
                 <a:solidFill>
                   <a:srgbClr val="1F2937"/>
                 </a:solidFill>
@@ -5741,13 +5764,13 @@
                 <a:ea typeface="Calibri" pitchFamily="34" charset="-122"/>
                 <a:cs typeface="Calibri" pitchFamily="34" charset="-120"/>
               </a:rPr>
-              <a:t>Heart damage / laceration  </a:t>
+              <a:t>Missing trachea — harvested for another buyer</a:t>
             </a:r>
             <a:pPr indent="0" marL="0">
               <a:buNone/>
             </a:pPr>
             <a:r>
-              <a:rPr lang="en-US" sz="860" dirty="0">
+              <a:rPr lang="en-US" sz="900" dirty="0">
                 <a:solidFill>
                   <a:srgbClr val="6B7280"/>
                 </a:solidFill>
@@ -5755,9 +5778,23 @@
                 <a:ea typeface="Calibri" pitchFamily="34" charset="-122"/>
                 <a:cs typeface="Calibri" pitchFamily="34" charset="-120"/>
               </a:rPr>
-              <a:t>· 21 QC-tagged</a:t>
+              <a:t>  —  </a:t>
             </a:r>
-            <a:endParaRPr lang="en-US" sz="860" dirty="0"/>
+            <a:pPr indent="0" marL="0">
+              <a:buNone/>
+            </a:pPr>
+            <a:r>
+              <a:rPr lang="en-US" sz="900" b="1" dirty="0">
+                <a:solidFill>
+                  <a:srgbClr val="1F2937"/>
+                </a:solidFill>
+                <a:latin typeface="Calibri" pitchFamily="34" charset="0"/>
+                <a:ea typeface="Calibri" pitchFamily="34" charset="-122"/>
+                <a:cs typeface="Calibri" pitchFamily="34" charset="-120"/>
+              </a:rPr>
+              <a:t>9</a:t>
+            </a:r>
+            <a:endParaRPr lang="en-US" sz="900" dirty="0"/>
           </a:p>
         </p:txBody>
       </p:sp>
@@ -5769,8 +5806,8 @@
         </p:nvSpPr>
         <p:spPr>
           <a:xfrm>
-            <a:off x="411480" y="4343400"/>
-            <a:ext cx="510235" cy="146304"/>
+            <a:off x="411480" y="4754880"/>
+            <a:ext cx="109728" cy="146304"/>
           </a:xfrm>
           <a:prstGeom prst="rect">
             <a:avLst/>
@@ -5789,8 +5826,8 @@
         </p:nvSpPr>
         <p:spPr>
           <a:xfrm>
-            <a:off x="3337560" y="4279392"/>
-            <a:ext cx="8321040" cy="274320"/>
+            <a:off x="3246120" y="4690872"/>
+            <a:ext cx="8412480" cy="274320"/>
           </a:xfrm>
           <a:prstGeom prst="rect">
             <a:avLst/>
@@ -5806,7 +5843,7 @@
               <a:buNone/>
             </a:pPr>
             <a:r>
-              <a:rPr lang="en-US" sz="860" dirty="0">
+              <a:rPr lang="en-US" sz="900" dirty="0">
                 <a:solidFill>
                   <a:srgbClr val="1F2937"/>
                 </a:solidFill>
@@ -5814,13 +5851,13 @@
                 <a:ea typeface="Calibri" pitchFamily="34" charset="-122"/>
                 <a:cs typeface="Calibri" pitchFamily="34" charset="-120"/>
               </a:rPr>
-              <a:t>Missing trachea — harvested for another buyer  </a:t>
+              <a:t>Undocumented</a:t>
             </a:r>
             <a:pPr indent="0" marL="0">
               <a:buNone/>
             </a:pPr>
             <a:r>
-              <a:rPr lang="en-US" sz="860" dirty="0">
+              <a:rPr lang="en-US" sz="900" dirty="0">
                 <a:solidFill>
                   <a:srgbClr val="6B7280"/>
                 </a:solidFill>
@@ -5828,58 +5865,13 @@
                 <a:ea typeface="Calibri" pitchFamily="34" charset="-122"/>
                 <a:cs typeface="Calibri" pitchFamily="34" charset="-120"/>
               </a:rPr>
-              <a:t>· 9 at harvest (9/9)</a:t>
+              <a:t>  —  </a:t>
             </a:r>
-            <a:endParaRPr lang="en-US" sz="860" dirty="0"/>
-          </a:p>
-        </p:txBody>
-      </p:sp>
-      <p:sp>
-        <p:nvSpPr>
-          <p:cNvPr id="17" name="Shape 13"/>
-          <p:cNvSpPr/>
-          <p:nvPr/>
-        </p:nvSpPr>
-        <p:spPr>
-          <a:xfrm>
-            <a:off x="411480" y="4654296"/>
-            <a:ext cx="109728" cy="146304"/>
-          </a:xfrm>
-          <a:prstGeom prst="rect">
-            <a:avLst/>
-          </a:prstGeom>
-          <a:solidFill>
-            <a:srgbClr val="0E7490"/>
-          </a:solidFill>
-          <a:ln/>
-        </p:spPr>
-      </p:sp>
-      <p:sp>
-        <p:nvSpPr>
-          <p:cNvPr id="18" name="Text 14"/>
-          <p:cNvSpPr/>
-          <p:nvPr/>
-        </p:nvSpPr>
-        <p:spPr>
-          <a:xfrm>
-            <a:off x="3337560" y="4590288"/>
-            <a:ext cx="8321040" cy="274320"/>
-          </a:xfrm>
-          <a:prstGeom prst="rect">
-            <a:avLst/>
-          </a:prstGeom>
-          <a:noFill/>
-          <a:ln/>
-        </p:spPr>
-        <p:txBody>
-          <a:bodyPr wrap="square" lIns="0" tIns="0" rIns="0" bIns="0" rtlCol="0" anchor="ctr"/>
-          <a:lstStyle/>
-          <a:p>
             <a:pPr indent="0" marL="0">
               <a:buNone/>
             </a:pPr>
             <a:r>
-              <a:rPr lang="en-US" sz="860" dirty="0">
+              <a:rPr lang="en-US" sz="900" b="1" dirty="0">
                 <a:solidFill>
                   <a:srgbClr val="1F2937"/>
                 </a:solidFill>
@@ -5887,74 +5879,21 @@
                 <a:ea typeface="Calibri" pitchFamily="34" charset="-122"/>
                 <a:cs typeface="Calibri" pitchFamily="34" charset="-120"/>
               </a:rPr>
-              <a:t>Undocumented (8/26 QC fail — stage split pending)  </a:t>
+              <a:t>1</a:t>
             </a:r>
-            <a:pPr indent="0" marL="0">
-              <a:buNone/>
-            </a:pPr>
-            <a:r>
-              <a:rPr lang="en-US" sz="860" dirty="0">
-                <a:solidFill>
-                  <a:srgbClr val="6B7280"/>
-                </a:solidFill>
-                <a:latin typeface="Calibri" pitchFamily="34" charset="0"/>
-                <a:ea typeface="Calibri" pitchFamily="34" charset="-122"/>
-                <a:cs typeface="Calibri" pitchFamily="34" charset="-120"/>
-              </a:rPr>
-              <a:t>· 1</a:t>
-            </a:r>
-            <a:endParaRPr lang="en-US" sz="860" dirty="0"/>
+            <a:endParaRPr lang="en-US" sz="900" dirty="0"/>
           </a:p>
         </p:txBody>
       </p:sp>
       <p:sp>
         <p:nvSpPr>
-          <p:cNvPr id="19" name="Text 15"/>
+          <p:cNvPr id="17" name="Text 13"/>
           <p:cNvSpPr/>
           <p:nvPr/>
         </p:nvSpPr>
         <p:spPr>
           <a:xfrm>
-            <a:off x="411480" y="4937760"/>
-            <a:ext cx="5669280" cy="219456"/>
-          </a:xfrm>
-          <a:prstGeom prst="rect">
-            <a:avLst/>
-          </a:prstGeom>
-          <a:noFill/>
-          <a:ln/>
-        </p:spPr>
-        <p:txBody>
-          <a:bodyPr wrap="square" lIns="0" tIns="0" rIns="0" bIns="0" rtlCol="0" anchor="ctr"/>
-          <a:lstStyle/>
-          <a:p>
-            <a:pPr indent="0" marL="0">
-              <a:buNone/>
-            </a:pPr>
-            <a:r>
-              <a:rPr lang="en-US" sz="760" i="1" dirty="0">
-                <a:solidFill>
-                  <a:srgbClr val="6B7280"/>
-                </a:solidFill>
-                <a:latin typeface="Calibri" pitchFamily="34" charset="0"/>
-                <a:ea typeface="Calibri" pitchFamily="34" charset="-122"/>
-                <a:cs typeface="Calibri" pitchFamily="34" charset="-120"/>
-              </a:rPr>
-              <a:t>Harvest-stage reject reasons for 8/26 (Jordan's 9) not itemized — requested from Kris/Jordan.</a:t>
-            </a:r>
-            <a:endParaRPr lang="en-US" sz="760" dirty="0"/>
-          </a:p>
-        </p:txBody>
-      </p:sp>
-      <p:sp>
-        <p:nvSpPr>
-          <p:cNvPr id="20" name="Text 16"/>
-          <p:cNvSpPr/>
-          <p:nvPr/>
-        </p:nvSpPr>
-        <p:spPr>
-          <a:xfrm>
-            <a:off x="6172200" y="3401568"/>
+            <a:off x="6172200" y="3456432"/>
             <a:ext cx="5577840" cy="219456"/>
           </a:xfrm>
           <a:prstGeom prst="rect">
@@ -5979,7 +5918,7 @@
                 <a:ea typeface="Calibri" pitchFamily="34" charset="-122"/>
                 <a:cs typeface="Calibri" pitchFamily="34" charset="-120"/>
               </a:rPr>
-              <a:t>ATM receipt confirms it — every scrap unit on these batches is 9972 Laceration/Cut</a:t>
+              <a:t>ATM receipt — every scrap unit on these batches: 9972 Laceration/Cut</a:t>
             </a:r>
             <a:endParaRPr lang="en-US" sz="1000" dirty="0"/>
           </a:p>
@@ -6000,7 +5939,7 @@
           </p:nvPr>
         </p:nvGraphicFramePr>
         <p:xfrm>
-          <a:off x="6172200" y="3657600"/>
+          <a:off x="6172200" y="3749040"/>
           <a:ext cx="5577840" cy="914400"/>
         </p:xfrm>
         <a:graphic>
@@ -6013,7 +5952,7 @@
                 <a:gridCol w="1417320"/>
                 <a:gridCol w="1417320"/>
               </a:tblGrid>
-              <a:tr h="219456">
+              <a:tr h="237744">
                 <a:tc>
                   <a:txBody>
                     <a:bodyPr/>
@@ -6287,7 +6226,7 @@
                   </a:tcPr>
                 </a:tc>
               </a:tr>
-              <a:tr h="219456">
+              <a:tr h="237744">
                 <a:tc>
                   <a:txBody>
                     <a:bodyPr/>
@@ -6549,7 +6488,7 @@
                   </a:tcPr>
                 </a:tc>
               </a:tr>
-              <a:tr h="219456">
+              <a:tr h="237744">
                 <a:tc>
                   <a:txBody>
                     <a:bodyPr/>
@@ -6811,7 +6750,7 @@
                   </a:tcPr>
                 </a:tc>
               </a:tr>
-              <a:tr h="219456">
+              <a:tr h="237744">
                 <a:tc>
                   <a:txBody>
                     <a:bodyPr/>
@@ -7073,7 +7012,7 @@
                   </a:tcPr>
                 </a:tc>
               </a:tr>
-              <a:tr h="219456">
+              <a:tr h="237744">
                 <a:tc>
                   <a:txBody>
                     <a:bodyPr/>
@@ -7341,57 +7280,18 @@
       </p:graphicFrame>
       <p:sp>
         <p:nvSpPr>
-          <p:cNvPr id="22" name="Text 17"/>
+          <p:cNvPr id="19" name="Shape 14"/>
           <p:cNvSpPr/>
           <p:nvPr/>
         </p:nvSpPr>
         <p:spPr>
           <a:xfrm>
-            <a:off x="6172200" y="4828032"/>
-            <a:ext cx="5577840" cy="329184"/>
-          </a:xfrm>
-          <a:prstGeom prst="rect">
-            <a:avLst/>
-          </a:prstGeom>
-          <a:noFill/>
-          <a:ln/>
-        </p:spPr>
-        <p:txBody>
-          <a:bodyPr wrap="square" lIns="0" tIns="0" rIns="0" bIns="0" rtlCol="0" anchor="ctr"/>
-          <a:lstStyle/>
-          <a:p>
-            <a:pPr indent="0" marL="0">
-              <a:buNone/>
-            </a:pPr>
-            <a:r>
-              <a:rPr lang="en-US" sz="800" i="1" dirty="0">
-                <a:solidFill>
-                  <a:srgbClr val="6B7280"/>
-                </a:solidFill>
-                <a:latin typeface="Calibri" pitchFamily="34" charset="0"/>
-                <a:ea typeface="Calibri" pitchFamily="34" charset="-122"/>
-                <a:cs typeface="Calibri" pitchFamily="34" charset="-120"/>
-              </a:rPr>
-              <a:t>SH-passed survivors keep failing on the same lacerations after freeze/thaw — harvesting-side damage confirmed at both stages, ~2–4 weeks apart.</a:t>
-            </a:r>
-            <a:endParaRPr lang="en-US" sz="800" dirty="0"/>
-          </a:p>
-        </p:txBody>
-      </p:sp>
-      <p:sp>
-        <p:nvSpPr>
-          <p:cNvPr id="23" name="Shape 18"/>
-          <p:cNvSpPr/>
-          <p:nvPr/>
-        </p:nvSpPr>
-        <p:spPr>
-          <a:xfrm>
-            <a:off x="411480" y="5230368"/>
-            <a:ext cx="5806440" cy="1371600"/>
+            <a:off x="411480" y="5166360"/>
+            <a:ext cx="5806440" cy="1463040"/>
           </a:xfrm>
           <a:prstGeom prst="roundRect">
             <a:avLst>
-              <a:gd name="adj" fmla="val 3333"/>
+              <a:gd name="adj" fmla="val 3125"/>
             </a:avLst>
           </a:prstGeom>
           <a:solidFill>
@@ -7402,13 +7302,13 @@
       </p:sp>
       <p:sp>
         <p:nvSpPr>
-          <p:cNvPr id="24" name="Text 19"/>
+          <p:cNvPr id="20" name="Text 15"/>
           <p:cNvSpPr/>
           <p:nvPr/>
         </p:nvSpPr>
         <p:spPr>
           <a:xfrm>
-            <a:off x="576072" y="5303520"/>
+            <a:off x="576072" y="5248656"/>
             <a:ext cx="2743200" cy="201168"/>
           </a:xfrm>
           <a:prstGeom prst="rect">
@@ -7441,14 +7341,14 @@
       </p:sp>
       <p:sp>
         <p:nvSpPr>
-          <p:cNvPr id="25" name="Text 20"/>
+          <p:cNvPr id="21" name="Text 16"/>
           <p:cNvSpPr/>
           <p:nvPr/>
         </p:nvSpPr>
         <p:spPr>
           <a:xfrm>
-            <a:off x="603504" y="5522976"/>
-            <a:ext cx="5486400" cy="1005840"/>
+            <a:off x="603504" y="5468112"/>
+            <a:ext cx="5486400" cy="1097280"/>
           </a:xfrm>
           <a:prstGeom prst="rect">
             <a:avLst/>
@@ -7468,7 +7368,7 @@
               <a:buChar char="➢"/>
             </a:pPr>
             <a:r>
-              <a:rPr lang="en-US" sz="820" dirty="0">
+              <a:rPr lang="en-US" sz="840" dirty="0">
                 <a:solidFill>
                   <a:srgbClr val="1F2937"/>
                 </a:solidFill>
@@ -7476,9 +7376,9 @@
                 <a:ea typeface="Calibri" pitchFamily="34" charset="-122"/>
                 <a:cs typeface="Calibri" pitchFamily="34" charset="-120"/>
               </a:rPr>
-              <a:t>Net: 24 usable thoracics from 113 at harvest (21.2%) over six visits — a harvesting problem, not a screening one: our QC accepted 88.9–100% of what Jordan passed.</a:t>
+              <a:t>24 usable thoracics from 113 at harvest (21.2%) over six visits — a harvesting problem, not a screening one: our QC accepted 88.9–100% of what Jordan passed.</a:t>
             </a:r>
-            <a:endParaRPr lang="en-US" sz="820" dirty="0"/>
+            <a:endParaRPr lang="en-US" sz="840" dirty="0"/>
           </a:p>
           <a:p>
             <a:pPr marL="342900" indent="-342900">
@@ -7489,7 +7389,7 @@
               <a:buChar char="➢"/>
             </a:pPr>
             <a:r>
-              <a:rPr lang="en-US" sz="820" dirty="0">
+              <a:rPr lang="en-US" sz="840" dirty="0">
                 <a:solidFill>
                   <a:srgbClr val="1F2937"/>
                 </a:solidFill>
@@ -7499,7 +7399,7 @@
               </a:rPr>
               <a:t>Two levers proved real: Francisco's team engagement preceded the 8/26 rebound to 44.4%, and Jordan's harvest screen aligns with our spec.</a:t>
             </a:r>
-            <a:endParaRPr lang="en-US" sz="820" dirty="0"/>
+            <a:endParaRPr lang="en-US" sz="840" dirty="0"/>
           </a:p>
           <a:p>
             <a:pPr marL="342900" indent="-342900">
@@ -7510,7 +7410,7 @@
               <a:buChar char="➢"/>
             </a:pPr>
             <a:r>
-              <a:rPr lang="en-US" sz="820" dirty="0">
+              <a:rPr lang="en-US" sz="840" dirty="0">
                 <a:solidFill>
                   <a:srgbClr val="1F2937"/>
                 </a:solidFill>
@@ -7520,24 +7420,24 @@
               </a:rPr>
               <a:t>9/9 collapse (10.5%) is mostly commercial, not technique: 9 of 17 rejects were missing trachea — tracheas go to another buyer.</a:t>
             </a:r>
-            <a:endParaRPr lang="en-US" sz="820" dirty="0"/>
+            <a:endParaRPr lang="en-US" sz="840" dirty="0"/>
           </a:p>
         </p:txBody>
       </p:sp>
       <p:sp>
         <p:nvSpPr>
-          <p:cNvPr id="26" name="Shape 21"/>
+          <p:cNvPr id="22" name="Shape 17"/>
           <p:cNvSpPr/>
           <p:nvPr/>
         </p:nvSpPr>
         <p:spPr>
           <a:xfrm>
-            <a:off x="6382512" y="5230368"/>
-            <a:ext cx="5394960" cy="1371600"/>
+            <a:off x="6382512" y="5166360"/>
+            <a:ext cx="5394960" cy="1463040"/>
           </a:xfrm>
           <a:prstGeom prst="roundRect">
             <a:avLst>
-              <a:gd name="adj" fmla="val 3333"/>
+              <a:gd name="adj" fmla="val 3125"/>
             </a:avLst>
           </a:prstGeom>
           <a:solidFill>
@@ -7553,13 +7453,13 @@
       </p:sp>
       <p:sp>
         <p:nvSpPr>
-          <p:cNvPr id="27" name="Text 22"/>
+          <p:cNvPr id="23" name="Text 18"/>
           <p:cNvSpPr/>
           <p:nvPr/>
         </p:nvSpPr>
         <p:spPr>
           <a:xfrm>
-            <a:off x="6547104" y="5303520"/>
+            <a:off x="6547104" y="5248656"/>
             <a:ext cx="2743200" cy="201168"/>
           </a:xfrm>
           <a:prstGeom prst="rect">
@@ -7592,14 +7492,14 @@
       </p:sp>
       <p:sp>
         <p:nvSpPr>
-          <p:cNvPr id="28" name="Text 23"/>
+          <p:cNvPr id="24" name="Text 19"/>
           <p:cNvSpPr/>
           <p:nvPr/>
         </p:nvSpPr>
         <p:spPr>
           <a:xfrm>
-            <a:off x="6574536" y="5522976"/>
-            <a:ext cx="5074920" cy="1005840"/>
+            <a:off x="6574536" y="5468112"/>
+            <a:ext cx="5074920" cy="1097280"/>
           </a:xfrm>
           <a:prstGeom prst="rect">
             <a:avLst/>
@@ -7619,7 +7519,7 @@
               <a:buChar char="➢"/>
             </a:pPr>
             <a:r>
-              <a:rPr lang="en-US" sz="820" dirty="0">
+              <a:rPr lang="en-US" sz="840" dirty="0">
                 <a:solidFill>
                   <a:srgbClr val="1F2937"/>
                 </a:solidFill>
@@ -7629,7 +7529,7 @@
               </a:rPr>
               <a:t>Settle the trachea arrangement — it decides thoracic viability at Nahunta.</a:t>
             </a:r>
-            <a:endParaRPr lang="en-US" sz="820" dirty="0"/>
+            <a:endParaRPr lang="en-US" sz="840" dirty="0"/>
           </a:p>
           <a:p>
             <a:pPr marL="342900" indent="-342900">
@@ -7640,7 +7540,7 @@
               <a:buChar char="➢"/>
             </a:pPr>
             <a:r>
-              <a:rPr lang="en-US" sz="820" dirty="0">
+              <a:rPr lang="en-US" sz="840" dirty="0">
                 <a:solidFill>
                   <a:srgbClr val="1F2937"/>
                 </a:solidFill>
@@ -7650,7 +7550,7 @@
               </a:rPr>
               <a:t>Harvest-technique corrective with Francisco's team on lung-perimeter cuts; track Jordan's reject rate as the leading indicator.</a:t>
             </a:r>
-            <a:endParaRPr lang="en-US" sz="820" dirty="0"/>
+            <a:endParaRPr lang="en-US" sz="840" dirty="0"/>
           </a:p>
           <a:p>
             <a:pPr marL="342900" indent="-342900">
@@ -7661,7 +7561,7 @@
               <a:buChar char="➢"/>
             </a:pPr>
             <a:r>
-              <a:rPr lang="en-US" sz="820" dirty="0">
+              <a:rPr lang="en-US" sz="840" dirty="0">
                 <a:solidFill>
                   <a:srgbClr val="1F2937"/>
                 </a:solidFill>
@@ -7669,48 +7569,9 @@
                 <a:ea typeface="Calibri" pitchFamily="34" charset="-122"/>
                 <a:cs typeface="Calibri" pitchFamily="34" charset="-120"/>
               </a:rPr>
-              <a:t>Standard five-number tally every visit; pending data: 8/26 stage split of reasons, ATM review of 5502550281 (50 recv).</a:t>
+              <a:t>Standard five-number tally every visit; ATM review of 5502550281 pending (50 received).</a:t>
             </a:r>
-            <a:endParaRPr lang="en-US" sz="820" dirty="0"/>
-          </a:p>
-        </p:txBody>
-      </p:sp>
-      <p:sp>
-        <p:nvSpPr>
-          <p:cNvPr id="29" name="Text 24"/>
-          <p:cNvSpPr/>
-          <p:nvPr/>
-        </p:nvSpPr>
-        <p:spPr>
-          <a:xfrm>
-            <a:off x="411480" y="6620256"/>
-            <a:ext cx="9144000" cy="201168"/>
-          </a:xfrm>
-          <a:prstGeom prst="rect">
-            <a:avLst/>
-          </a:prstGeom>
-          <a:noFill/>
-          <a:ln/>
-        </p:spPr>
-        <p:txBody>
-          <a:bodyPr wrap="square" lIns="0" tIns="0" rIns="0" bIns="0" rtlCol="0" anchor="ctr"/>
-          <a:lstStyle/>
-          <a:p>
-            <a:pPr indent="0" marL="0">
-              <a:buNone/>
-            </a:pPr>
-            <a:r>
-              <a:rPr lang="en-US" sz="800" i="1" dirty="0">
-                <a:solidFill>
-                  <a:srgbClr val="6B7280"/>
-                </a:solidFill>
-                <a:latin typeface="Calibri" pitchFamily="34" charset="0"/>
-                <a:ea typeface="Calibri" pitchFamily="34" charset="-122"/>
-                <a:cs typeface="Calibri" pitchFamily="34" charset="-120"/>
-              </a:rPr>
-              <a:t>Source: SH_IQC_Inspections.xlsx — 'Nahunta Standard' tab; ATM (SAP) extract 09/16/2026, SH-inspected batches only</a:t>
-            </a:r>
-            <a:endParaRPr lang="en-US" sz="800" dirty="0"/>
+            <a:endParaRPr lang="en-US" sz="840" dirty="0"/>
           </a:p>
         </p:txBody>
       </p:sp>

--- a/QC inspections suppliers/Nahunta_Thoracics_DeepDive.pptx
+++ b/QC inspections suppliers/Nahunta_Thoracics_DeepDive.pptx
@@ -333,6 +333,242 @@
                   <a:srgbClr val="6B7280"/>
                 </a:solidFill>
                 <a:latin typeface="Calibri"/>
+              </a:defRPr>
+            </a:pPr>
+            <a:endParaRPr lang="en-US"/>
+          </a:p>
+        </c:txPr>
+        <c:crossAx val="2094734554"/>
+        <c:crosses val="autoZero"/>
+        <c:crossBetween val="between"/>
+      </c:valAx>
+      <c:spPr>
+        <a:noFill/>
+        <a:ln>
+          <a:noFill/>
+        </a:ln>
+        <a:effectLst/>
+      </c:spPr>
+    </c:plotArea>
+    <c:plotVisOnly val="1"/>
+    <c:dispBlanksAs val="span"/>
+  </c:chart>
+  <c:spPr>
+    <a:noFill/>
+    <a:ln>
+      <a:noFill/>
+    </a:ln>
+    <a:effectLst/>
+  </c:spPr>
+  <c:externalData r:id="rId1">
+    <c:autoUpdate val="0"/>
+  </c:externalData>
+</c:chartSpace>
+</file>
+
+<file path=ppt/charts/chart2.xml><?xml version="1.0" encoding="utf-8"?>
+<c:chartSpace xmlns:c="http://schemas.openxmlformats.org/drawingml/2006/chart" xmlns:a="http://schemas.openxmlformats.org/drawingml/2006/main" xmlns:r="http://schemas.openxmlformats.org/officeDocument/2006/relationships">
+  <c:date1904 val="0"/>
+  <c:roundedCorners val="1"/>
+  <c:chart>
+    <c:autoTitleDeleted val="1"/>
+    <c:plotArea>
+      <c:layout/>
+      <c:barChart>
+        <c:barDir val="bar"/>
+        <c:grouping val="clustered"/>
+        <c:varyColors val="0"/>
+        <c:ser>
+          <c:idx val="0"/>
+          <c:order val="0"/>
+          <c:tx>
+            <c:strRef>
+              <c:f>Sheet1!$B$1</c:f>
+              <c:strCache>
+                <c:ptCount val="1"/>
+                <c:pt idx="0">
+                  <c:v>Rejects</c:v>
+                </c:pt>
+              </c:strCache>
+            </c:strRef>
+          </c:tx>
+          <c:spPr>
+            <a:solidFill>
+              <a:srgbClr val="0E7490"/>
+            </a:solidFill>
+            <a:effectLst/>
+          </c:spPr>
+          <c:invertIfNegative val="0"/>
+          <c:dLbls>
+            <c:numFmt formatCode="0" sourceLinked="0"/>
+            <c:txPr>
+              <a:bodyPr/>
+              <a:lstStyle/>
+              <a:p>
+                <a:pPr>
+                  <a:defRPr b="0" i="0" strike="noStrike" sz="1000" u="none">
+                    <a:solidFill>
+                      <a:srgbClr val="1F2937"/>
+                    </a:solidFill>
+                    <a:latin typeface="Calibri"/>
+                  </a:defRPr>
+                </a:pPr>
+              </a:p>
+            </c:txPr>
+            <c:showLegendKey val="0"/>
+            <c:showVal val="1"/>
+            <c:showCatName val="0"/>
+            <c:showSerName val="0"/>
+            <c:showPercent val="0"/>
+            <c:showBubbleSize val="0"/>
+            <c:showLeaderLines val="0"/>
+          </c:dLbls>
+          <c:cat>
+            <c:multiLvlStrRef>
+              <c:f>Sheet1!$A$2:$A$5</c:f>
+              <c:multiLvlStrCache>
+                <c:ptCount val="4"/>
+                <c:lvl>
+                  <c:pt idx="0">
+                    <c:v>Not itemized (8/26 harvest 9 + QC 1)</c:v>
+                  </c:pt>
+                  <c:pt idx="1">
+                    <c:v>Missing trachea — other buyer</c:v>
+                  </c:pt>
+                  <c:pt idx="2">
+                    <c:v>Heart damage / laceration</c:v>
+                  </c:pt>
+                  <c:pt idx="3">
+                    <c:v>Lung laceration (right-lung perimeter)</c:v>
+                  </c:pt>
+                </c:lvl>
+              </c:multiLvlStrCache>
+            </c:multiLvlStrRef>
+          </c:cat>
+          <c:val>
+            <c:numRef>
+              <c:f>Sheet1!$B$2:$B$5</c:f>
+              <c:numCache>
+                <c:formatCode>General</c:formatCode>
+                <c:ptCount val="4"/>
+                <c:pt idx="0">
+                  <c:v>10</c:v>
+                </c:pt>
+                <c:pt idx="1">
+                  <c:v>9</c:v>
+                </c:pt>
+                <c:pt idx="2">
+                  <c:v>21</c:v>
+                </c:pt>
+                <c:pt idx="3">
+                  <c:v>50</c:v>
+                </c:pt>
+              </c:numCache>
+            </c:numRef>
+          </c:val>
+        </c:ser>
+        <c:dLbls>
+          <c:numFmt formatCode="0" sourceLinked="0"/>
+          <c:txPr>
+            <a:bodyPr/>
+            <a:lstStyle/>
+            <a:p>
+              <a:pPr>
+                <a:defRPr b="0" i="0" strike="noStrike" sz="1000" u="none">
+                  <a:solidFill>
+                    <a:srgbClr val="1F2937"/>
+                  </a:solidFill>
+                  <a:latin typeface="Calibri"/>
+                </a:defRPr>
+              </a:pPr>
+            </a:p>
+          </c:txPr>
+          <c:showLegendKey val="0"/>
+          <c:showVal val="1"/>
+          <c:showCatName val="0"/>
+          <c:showSerName val="0"/>
+          <c:showPercent val="0"/>
+          <c:showBubbleSize val="0"/>
+          <c:showLeaderLines val="0"/>
+        </c:dLbls>
+        <c:gapWidth val="40"/>
+        <c:overlap val="0"/>
+        <c:axId val="2094734554"/>
+        <c:axId val="2094734552"/>
+        <c:axId val="2094734556"/>
+      </c:barChart>
+      <c:catAx>
+        <c:axId val="2094734554"/>
+        <c:scaling>
+          <c:orientation val="minMax"/>
+        </c:scaling>
+        <c:delete val="0"/>
+        <c:axPos val="l"/>
+        <c:numFmt formatCode="General" sourceLinked="1"/>
+        <c:majorTickMark val="out"/>
+        <c:minorTickMark val="none"/>
+        <c:tickLblPos val="nextTo"/>
+        <c:spPr>
+          <a:ln w="12700" cap="flat">
+            <a:solidFill>
+              <a:srgbClr val="888888"/>
+            </a:solidFill>
+            <a:prstDash val="solid"/>
+            <a:round/>
+          </a:ln>
+        </c:spPr>
+        <c:txPr>
+          <a:bodyPr/>
+          <a:lstStyle/>
+          <a:p>
+            <a:pPr>
+              <a:defRPr sz="850" b="0" i="0" u="none" strike="noStrike">
+                <a:solidFill>
+                  <a:srgbClr val="1F2937"/>
+                </a:solidFill>
+                <a:latin typeface="Calibri"/>
+              </a:defRPr>
+            </a:pPr>
+            <a:endParaRPr lang="en-US"/>
+          </a:p>
+        </c:txPr>
+        <c:crossAx val="2094734552"/>
+        <c:crosses val="autoZero"/>
+        <c:auto val="1"/>
+        <c:lblAlgn val="ctr"/>
+        <c:noMultiLvlLbl val="1"/>
+      </c:catAx>
+      <c:valAx>
+        <c:axId val="2094734552"/>
+        <c:scaling>
+          <c:orientation val="minMax"/>
+          <c:max val="55"/>
+        </c:scaling>
+        <c:delete val="1"/>
+        <c:axPos val="b"/>
+        <c:numFmt formatCode="General" sourceLinked="0"/>
+        <c:majorTickMark val="out"/>
+        <c:minorTickMark val="none"/>
+        <c:tickLblPos val="low"/>
+        <c:spPr>
+          <a:ln w="12700" cap="flat">
+            <a:solidFill>
+              <a:srgbClr val="888888"/>
+            </a:solidFill>
+            <a:prstDash val="solid"/>
+            <a:round/>
+          </a:ln>
+        </c:spPr>
+        <c:txPr>
+          <a:bodyPr/>
+          <a:lstStyle/>
+          <a:p>
+            <a:pPr>
+              <a:defRPr sz="1200" b="0" i="0" u="none" strike="noStrike">
+                <a:solidFill>
+                  <a:srgbClr val="000000"/>
+                </a:solidFill>
+                <a:latin typeface="Arial"/>
               </a:defRPr>
             </a:pPr>
             <a:endParaRPr lang="en-US"/>
@@ -5531,363 +5767,31 @@
                 <a:ea typeface="Calibri" pitchFamily="34" charset="-122"/>
                 <a:cs typeface="Calibri" pitchFamily="34" charset="-120"/>
               </a:rPr>
-              <a:t>What's failing — reasons</a:t>
+              <a:t>What's failing — reasons, all stages (tagged rejects)</a:t>
             </a:r>
             <a:endParaRPr lang="en-US" sz="1000" dirty="0"/>
           </a:p>
         </p:txBody>
       </p:sp>
+      <p:graphicFrame>
+        <p:nvGraphicFramePr>
+          <p:cNvPr id="9" name="Chart 1" descr=""/>
+          <p:cNvGraphicFramePr/>
+          <p:nvPr/>
+        </p:nvGraphicFramePr>
+        <p:xfrm>
+          <a:off x="411480" y="3675888"/>
+          <a:ext cx="5577840" cy="1371600"/>
+        </p:xfrm>
+        <a:graphic xmlns:a="http://schemas.openxmlformats.org/drawingml/2006/main">
+          <a:graphicData uri="http://schemas.openxmlformats.org/drawingml/2006/chart">
+            <c:chart xmlns:c="http://schemas.openxmlformats.org/drawingml/2006/chart" r:id="rId2"/>
+          </a:graphicData>
+        </a:graphic>
+      </p:graphicFrame>
       <p:sp>
         <p:nvSpPr>
-          <p:cNvPr id="9" name="Shape 5"/>
-          <p:cNvSpPr/>
-          <p:nvPr/>
-        </p:nvSpPr>
-        <p:spPr>
-          <a:xfrm>
-            <a:off x="411480" y="3794760"/>
-            <a:ext cx="2743200" cy="146304"/>
-          </a:xfrm>
-          <a:prstGeom prst="rect">
-            <a:avLst/>
-          </a:prstGeom>
-          <a:solidFill>
-            <a:srgbClr val="DC2626"/>
-          </a:solidFill>
-          <a:ln/>
-        </p:spPr>
-      </p:sp>
-      <p:sp>
-        <p:nvSpPr>
-          <p:cNvPr id="10" name="Text 6"/>
-          <p:cNvSpPr/>
-          <p:nvPr/>
-        </p:nvSpPr>
-        <p:spPr>
-          <a:xfrm>
-            <a:off x="3246120" y="3730752"/>
-            <a:ext cx="8412480" cy="274320"/>
-          </a:xfrm>
-          <a:prstGeom prst="rect">
-            <a:avLst/>
-          </a:prstGeom>
-          <a:noFill/>
-          <a:ln/>
-        </p:spPr>
-        <p:txBody>
-          <a:bodyPr wrap="square" lIns="0" tIns="0" rIns="0" bIns="0" rtlCol="0" anchor="ctr"/>
-          <a:lstStyle/>
-          <a:p>
-            <a:pPr indent="0" marL="0">
-              <a:buNone/>
-            </a:pPr>
-            <a:r>
-              <a:rPr lang="en-US" sz="900" b="1" dirty="0">
-                <a:solidFill>
-                  <a:srgbClr val="1F2937"/>
-                </a:solidFill>
-                <a:latin typeface="Calibri" pitchFamily="34" charset="0"/>
-                <a:ea typeface="Calibri" pitchFamily="34" charset="-122"/>
-                <a:cs typeface="Calibri" pitchFamily="34" charset="-120"/>
-              </a:rPr>
-              <a:t>Lung laceration (right-lung perimeter)</a:t>
-            </a:r>
-            <a:pPr indent="0" marL="0">
-              <a:buNone/>
-            </a:pPr>
-            <a:r>
-              <a:rPr lang="en-US" sz="900" dirty="0">
-                <a:solidFill>
-                  <a:srgbClr val="6B7280"/>
-                </a:solidFill>
-                <a:latin typeface="Calibri" pitchFamily="34" charset="0"/>
-                <a:ea typeface="Calibri" pitchFamily="34" charset="-122"/>
-                <a:cs typeface="Calibri" pitchFamily="34" charset="-120"/>
-              </a:rPr>
-              <a:t>  —  </a:t>
-            </a:r>
-            <a:pPr indent="0" marL="0">
-              <a:buNone/>
-            </a:pPr>
-            <a:r>
-              <a:rPr lang="en-US" sz="900" b="1" dirty="0">
-                <a:solidFill>
-                  <a:srgbClr val="1F2937"/>
-                </a:solidFill>
-                <a:latin typeface="Calibri" pitchFamily="34" charset="0"/>
-                <a:ea typeface="Calibri" pitchFamily="34" charset="-122"/>
-                <a:cs typeface="Calibri" pitchFamily="34" charset="-120"/>
-              </a:rPr>
-              <a:t>50</a:t>
-            </a:r>
-            <a:endParaRPr lang="en-US" sz="900" dirty="0"/>
-          </a:p>
-        </p:txBody>
-      </p:sp>
-      <p:sp>
-        <p:nvSpPr>
-          <p:cNvPr id="11" name="Shape 7"/>
-          <p:cNvSpPr/>
-          <p:nvPr/>
-        </p:nvSpPr>
-        <p:spPr>
-          <a:xfrm>
-            <a:off x="411480" y="4114800"/>
-            <a:ext cx="1152144" cy="146304"/>
-          </a:xfrm>
-          <a:prstGeom prst="rect">
-            <a:avLst/>
-          </a:prstGeom>
-          <a:solidFill>
-            <a:srgbClr val="0E7490"/>
-          </a:solidFill>
-          <a:ln/>
-        </p:spPr>
-      </p:sp>
-      <p:sp>
-        <p:nvSpPr>
-          <p:cNvPr id="12" name="Text 8"/>
-          <p:cNvSpPr/>
-          <p:nvPr/>
-        </p:nvSpPr>
-        <p:spPr>
-          <a:xfrm>
-            <a:off x="3246120" y="4050792"/>
-            <a:ext cx="8412480" cy="274320"/>
-          </a:xfrm>
-          <a:prstGeom prst="rect">
-            <a:avLst/>
-          </a:prstGeom>
-          <a:noFill/>
-          <a:ln/>
-        </p:spPr>
-        <p:txBody>
-          <a:bodyPr wrap="square" lIns="0" tIns="0" rIns="0" bIns="0" rtlCol="0" anchor="ctr"/>
-          <a:lstStyle/>
-          <a:p>
-            <a:pPr indent="0" marL="0">
-              <a:buNone/>
-            </a:pPr>
-            <a:r>
-              <a:rPr lang="en-US" sz="900" dirty="0">
-                <a:solidFill>
-                  <a:srgbClr val="1F2937"/>
-                </a:solidFill>
-                <a:latin typeface="Calibri" pitchFamily="34" charset="0"/>
-                <a:ea typeface="Calibri" pitchFamily="34" charset="-122"/>
-                <a:cs typeface="Calibri" pitchFamily="34" charset="-120"/>
-              </a:rPr>
-              <a:t>Heart damage / laceration</a:t>
-            </a:r>
-            <a:pPr indent="0" marL="0">
-              <a:buNone/>
-            </a:pPr>
-            <a:r>
-              <a:rPr lang="en-US" sz="900" dirty="0">
-                <a:solidFill>
-                  <a:srgbClr val="6B7280"/>
-                </a:solidFill>
-                <a:latin typeface="Calibri" pitchFamily="34" charset="0"/>
-                <a:ea typeface="Calibri" pitchFamily="34" charset="-122"/>
-                <a:cs typeface="Calibri" pitchFamily="34" charset="-120"/>
-              </a:rPr>
-              <a:t>  —  </a:t>
-            </a:r>
-            <a:pPr indent="0" marL="0">
-              <a:buNone/>
-            </a:pPr>
-            <a:r>
-              <a:rPr lang="en-US" sz="900" b="1" dirty="0">
-                <a:solidFill>
-                  <a:srgbClr val="1F2937"/>
-                </a:solidFill>
-                <a:latin typeface="Calibri" pitchFamily="34" charset="0"/>
-                <a:ea typeface="Calibri" pitchFamily="34" charset="-122"/>
-                <a:cs typeface="Calibri" pitchFamily="34" charset="-120"/>
-              </a:rPr>
-              <a:t>21</a:t>
-            </a:r>
-            <a:endParaRPr lang="en-US" sz="900" dirty="0"/>
-          </a:p>
-        </p:txBody>
-      </p:sp>
-      <p:sp>
-        <p:nvSpPr>
-          <p:cNvPr id="13" name="Shape 9"/>
-          <p:cNvSpPr/>
-          <p:nvPr/>
-        </p:nvSpPr>
-        <p:spPr>
-          <a:xfrm>
-            <a:off x="411480" y="4434840"/>
-            <a:ext cx="493776" cy="146304"/>
-          </a:xfrm>
-          <a:prstGeom prst="rect">
-            <a:avLst/>
-          </a:prstGeom>
-          <a:solidFill>
-            <a:srgbClr val="0E7490"/>
-          </a:solidFill>
-          <a:ln/>
-        </p:spPr>
-      </p:sp>
-      <p:sp>
-        <p:nvSpPr>
-          <p:cNvPr id="14" name="Text 10"/>
-          <p:cNvSpPr/>
-          <p:nvPr/>
-        </p:nvSpPr>
-        <p:spPr>
-          <a:xfrm>
-            <a:off x="3246120" y="4370832"/>
-            <a:ext cx="8412480" cy="274320"/>
-          </a:xfrm>
-          <a:prstGeom prst="rect">
-            <a:avLst/>
-          </a:prstGeom>
-          <a:noFill/>
-          <a:ln/>
-        </p:spPr>
-        <p:txBody>
-          <a:bodyPr wrap="square" lIns="0" tIns="0" rIns="0" bIns="0" rtlCol="0" anchor="ctr"/>
-          <a:lstStyle/>
-          <a:p>
-            <a:pPr indent="0" marL="0">
-              <a:buNone/>
-            </a:pPr>
-            <a:r>
-              <a:rPr lang="en-US" sz="900" dirty="0">
-                <a:solidFill>
-                  <a:srgbClr val="1F2937"/>
-                </a:solidFill>
-                <a:latin typeface="Calibri" pitchFamily="34" charset="0"/>
-                <a:ea typeface="Calibri" pitchFamily="34" charset="-122"/>
-                <a:cs typeface="Calibri" pitchFamily="34" charset="-120"/>
-              </a:rPr>
-              <a:t>Missing trachea — harvested for another buyer</a:t>
-            </a:r>
-            <a:pPr indent="0" marL="0">
-              <a:buNone/>
-            </a:pPr>
-            <a:r>
-              <a:rPr lang="en-US" sz="900" dirty="0">
-                <a:solidFill>
-                  <a:srgbClr val="6B7280"/>
-                </a:solidFill>
-                <a:latin typeface="Calibri" pitchFamily="34" charset="0"/>
-                <a:ea typeface="Calibri" pitchFamily="34" charset="-122"/>
-                <a:cs typeface="Calibri" pitchFamily="34" charset="-120"/>
-              </a:rPr>
-              <a:t>  —  </a:t>
-            </a:r>
-            <a:pPr indent="0" marL="0">
-              <a:buNone/>
-            </a:pPr>
-            <a:r>
-              <a:rPr lang="en-US" sz="900" b="1" dirty="0">
-                <a:solidFill>
-                  <a:srgbClr val="1F2937"/>
-                </a:solidFill>
-                <a:latin typeface="Calibri" pitchFamily="34" charset="0"/>
-                <a:ea typeface="Calibri" pitchFamily="34" charset="-122"/>
-                <a:cs typeface="Calibri" pitchFamily="34" charset="-120"/>
-              </a:rPr>
-              <a:t>9</a:t>
-            </a:r>
-            <a:endParaRPr lang="en-US" sz="900" dirty="0"/>
-          </a:p>
-        </p:txBody>
-      </p:sp>
-      <p:sp>
-        <p:nvSpPr>
-          <p:cNvPr id="15" name="Shape 11"/>
-          <p:cNvSpPr/>
-          <p:nvPr/>
-        </p:nvSpPr>
-        <p:spPr>
-          <a:xfrm>
-            <a:off x="411480" y="4754880"/>
-            <a:ext cx="109728" cy="146304"/>
-          </a:xfrm>
-          <a:prstGeom prst="rect">
-            <a:avLst/>
-          </a:prstGeom>
-          <a:solidFill>
-            <a:srgbClr val="0E7490"/>
-          </a:solidFill>
-          <a:ln/>
-        </p:spPr>
-      </p:sp>
-      <p:sp>
-        <p:nvSpPr>
-          <p:cNvPr id="16" name="Text 12"/>
-          <p:cNvSpPr/>
-          <p:nvPr/>
-        </p:nvSpPr>
-        <p:spPr>
-          <a:xfrm>
-            <a:off x="3246120" y="4690872"/>
-            <a:ext cx="8412480" cy="274320"/>
-          </a:xfrm>
-          <a:prstGeom prst="rect">
-            <a:avLst/>
-          </a:prstGeom>
-          <a:noFill/>
-          <a:ln/>
-        </p:spPr>
-        <p:txBody>
-          <a:bodyPr wrap="square" lIns="0" tIns="0" rIns="0" bIns="0" rtlCol="0" anchor="ctr"/>
-          <a:lstStyle/>
-          <a:p>
-            <a:pPr indent="0" marL="0">
-              <a:buNone/>
-            </a:pPr>
-            <a:r>
-              <a:rPr lang="en-US" sz="900" dirty="0">
-                <a:solidFill>
-                  <a:srgbClr val="1F2937"/>
-                </a:solidFill>
-                <a:latin typeface="Calibri" pitchFamily="34" charset="0"/>
-                <a:ea typeface="Calibri" pitchFamily="34" charset="-122"/>
-                <a:cs typeface="Calibri" pitchFamily="34" charset="-120"/>
-              </a:rPr>
-              <a:t>Undocumented</a:t>
-            </a:r>
-            <a:pPr indent="0" marL="0">
-              <a:buNone/>
-            </a:pPr>
-            <a:r>
-              <a:rPr lang="en-US" sz="900" dirty="0">
-                <a:solidFill>
-                  <a:srgbClr val="6B7280"/>
-                </a:solidFill>
-                <a:latin typeface="Calibri" pitchFamily="34" charset="0"/>
-                <a:ea typeface="Calibri" pitchFamily="34" charset="-122"/>
-                <a:cs typeface="Calibri" pitchFamily="34" charset="-120"/>
-              </a:rPr>
-              <a:t>  —  </a:t>
-            </a:r>
-            <a:pPr indent="0" marL="0">
-              <a:buNone/>
-            </a:pPr>
-            <a:r>
-              <a:rPr lang="en-US" sz="900" b="1" dirty="0">
-                <a:solidFill>
-                  <a:srgbClr val="1F2937"/>
-                </a:solidFill>
-                <a:latin typeface="Calibri" pitchFamily="34" charset="0"/>
-                <a:ea typeface="Calibri" pitchFamily="34" charset="-122"/>
-                <a:cs typeface="Calibri" pitchFamily="34" charset="-120"/>
-              </a:rPr>
-              <a:t>1</a:t>
-            </a:r>
-            <a:endParaRPr lang="en-US" sz="900" dirty="0"/>
-          </a:p>
-        </p:txBody>
-      </p:sp>
-      <p:sp>
-        <p:nvSpPr>
-          <p:cNvPr id="17" name="Text 13"/>
+          <p:cNvPr id="10" name="Text 5"/>
           <p:cNvSpPr/>
           <p:nvPr/>
         </p:nvSpPr>
@@ -7280,7 +7184,7 @@
       </p:graphicFrame>
       <p:sp>
         <p:nvSpPr>
-          <p:cNvPr id="19" name="Shape 14"/>
+          <p:cNvPr id="12" name="Shape 6"/>
           <p:cNvSpPr/>
           <p:nvPr/>
         </p:nvSpPr>
@@ -7302,7 +7206,7 @@
       </p:sp>
       <p:sp>
         <p:nvSpPr>
-          <p:cNvPr id="20" name="Text 15"/>
+          <p:cNvPr id="13" name="Text 7"/>
           <p:cNvSpPr/>
           <p:nvPr/>
         </p:nvSpPr>
@@ -7341,7 +7245,7 @@
       </p:sp>
       <p:sp>
         <p:nvSpPr>
-          <p:cNvPr id="21" name="Text 16"/>
+          <p:cNvPr id="14" name="Text 8"/>
           <p:cNvSpPr/>
           <p:nvPr/>
         </p:nvSpPr>
@@ -7426,7 +7330,7 @@
       </p:sp>
       <p:sp>
         <p:nvSpPr>
-          <p:cNvPr id="22" name="Shape 17"/>
+          <p:cNvPr id="15" name="Shape 9"/>
           <p:cNvSpPr/>
           <p:nvPr/>
         </p:nvSpPr>
@@ -7453,7 +7357,7 @@
       </p:sp>
       <p:sp>
         <p:nvSpPr>
-          <p:cNvPr id="23" name="Text 18"/>
+          <p:cNvPr id="16" name="Text 10"/>
           <p:cNvSpPr/>
           <p:nvPr/>
         </p:nvSpPr>
@@ -7492,7 +7396,7 @@
       </p:sp>
       <p:sp>
         <p:nvSpPr>
-          <p:cNvPr id="24" name="Text 19"/>
+          <p:cNvPr id="17" name="Text 11"/>
           <p:cNvSpPr/>
           <p:nvPr/>
         </p:nvSpPr>

--- a/QC inspections suppliers/Nahunta_Thoracics_DeepDive.pptx
+++ b/QC inspections suppliers/Nahunta_Thoracics_DeepDive.pptx
@@ -105,6 +105,501 @@
     </a:lvl9pPr>
   </p:defaultTextStyle>
 </p:presentation>
+</file>
+
+<file path=ppt/charts/chart1.xml><?xml version="1.0" encoding="utf-8"?>
+<c:chartSpace xmlns:c="http://schemas.openxmlformats.org/drawingml/2006/chart" xmlns:a="http://schemas.openxmlformats.org/drawingml/2006/main" xmlns:r="http://schemas.openxmlformats.org/officeDocument/2006/relationships">
+  <c:date1904 val="0"/>
+  <c:roundedCorners val="1"/>
+  <c:chart>
+    <c:autoTitleDeleted val="1"/>
+    <c:plotArea>
+      <c:layout/>
+      <c:barChart>
+        <c:barDir val="col"/>
+        <c:grouping val="clustered"/>
+        <c:varyColors val="0"/>
+        <c:ser>
+          <c:idx val="0"/>
+          <c:order val="0"/>
+          <c:tx>
+            <c:strRef>
+              <c:f>Sheet1!$B$1</c:f>
+              <c:strCache>
+                <c:ptCount val="1"/>
+                <c:pt idx="0">
+                  <c:v>Harvest yield</c:v>
+                </c:pt>
+              </c:strCache>
+            </c:strRef>
+          </c:tx>
+          <c:spPr>
+            <a:solidFill>
+              <a:srgbClr val="0E7490"/>
+            </a:solidFill>
+            <a:effectLst/>
+          </c:spPr>
+          <c:invertIfNegative val="0"/>
+          <c:dLbls>
+            <c:numFmt formatCode="0.0%" sourceLinked="0"/>
+            <c:txPr>
+              <a:bodyPr/>
+              <a:lstStyle/>
+              <a:p>
+                <a:pPr>
+                  <a:defRPr b="0" i="0" strike="noStrike" sz="900" u="none">
+                    <a:solidFill>
+                      <a:srgbClr val="1F2937"/>
+                    </a:solidFill>
+                    <a:latin typeface="Calibri"/>
+                  </a:defRPr>
+                </a:pPr>
+              </a:p>
+            </c:txPr>
+            <c:showLegendKey val="0"/>
+            <c:showVal val="1"/>
+            <c:showCatName val="0"/>
+            <c:showSerName val="0"/>
+            <c:showPercent val="0"/>
+            <c:showBubbleSize val="0"/>
+            <c:showLeaderLines val="0"/>
+          </c:dLbls>
+          <c:cat>
+            <c:multiLvlStrRef>
+              <c:f>Sheet1!$A$2:$A$7</c:f>
+              <c:multiLvlStrCache>
+                <c:ptCount val="6"/>
+                <c:lvl>
+                  <c:pt idx="0">
+                    <c:v>7/29</c:v>
+                  </c:pt>
+                  <c:pt idx="1">
+                    <c:v>8/5</c:v>
+                  </c:pt>
+                  <c:pt idx="2">
+                    <c:v>8/12</c:v>
+                  </c:pt>
+                  <c:pt idx="3">
+                    <c:v>8/19</c:v>
+                  </c:pt>
+                  <c:pt idx="4">
+                    <c:v>8/26 · Francisco + two-stage</c:v>
+                  </c:pt>
+                  <c:pt idx="5">
+                    <c:v>9/9 · trachea conflict</c:v>
+                  </c:pt>
+                </c:lvl>
+              </c:multiLvlStrCache>
+            </c:multiLvlStrRef>
+          </c:cat>
+          <c:val>
+            <c:numRef>
+              <c:f>Sheet1!$B$2:$B$7</c:f>
+              <c:numCache>
+                <c:formatCode>General</c:formatCode>
+                <c:ptCount val="6"/>
+                <c:pt idx="0">
+                  <c:v>0.3158</c:v>
+                </c:pt>
+                <c:pt idx="1">
+                  <c:v>0</c:v>
+                </c:pt>
+                <c:pt idx="2">
+                  <c:v>0.1538</c:v>
+                </c:pt>
+                <c:pt idx="3">
+                  <c:v>0.2069</c:v>
+                </c:pt>
+                <c:pt idx="4">
+                  <c:v>0.4444</c:v>
+                </c:pt>
+                <c:pt idx="5">
+                  <c:v>0.1053</c:v>
+                </c:pt>
+              </c:numCache>
+            </c:numRef>
+          </c:val>
+        </c:ser>
+        <c:dLbls>
+          <c:numFmt formatCode="0.0%" sourceLinked="0"/>
+          <c:txPr>
+            <a:bodyPr/>
+            <a:lstStyle/>
+            <a:p>
+              <a:pPr>
+                <a:defRPr b="0" i="0" strike="noStrike" sz="900" u="none">
+                  <a:solidFill>
+                    <a:srgbClr val="1F2937"/>
+                  </a:solidFill>
+                  <a:latin typeface="Calibri"/>
+                </a:defRPr>
+              </a:pPr>
+            </a:p>
+          </c:txPr>
+          <c:showLegendKey val="0"/>
+          <c:showVal val="1"/>
+          <c:showCatName val="0"/>
+          <c:showSerName val="0"/>
+          <c:showPercent val="0"/>
+          <c:showBubbleSize val="0"/>
+          <c:showLeaderLines val="0"/>
+        </c:dLbls>
+        <c:gapWidth val="45"/>
+        <c:overlap val="0"/>
+        <c:axId val="2094734554"/>
+        <c:axId val="2094734552"/>
+        <c:axId val="2094734556"/>
+      </c:barChart>
+      <c:catAx>
+        <c:axId val="2094734554"/>
+        <c:scaling>
+          <c:orientation val="minMax"/>
+        </c:scaling>
+        <c:delete val="0"/>
+        <c:axPos val="b"/>
+        <c:numFmt formatCode="General" sourceLinked="1"/>
+        <c:majorTickMark val="out"/>
+        <c:minorTickMark val="none"/>
+        <c:tickLblPos val="low"/>
+        <c:spPr>
+          <a:ln w="12700" cap="flat">
+            <a:solidFill>
+              <a:srgbClr val="888888"/>
+            </a:solidFill>
+            <a:prstDash val="solid"/>
+            <a:round/>
+          </a:ln>
+        </c:spPr>
+        <c:txPr>
+          <a:bodyPr/>
+          <a:lstStyle/>
+          <a:p>
+            <a:pPr>
+              <a:defRPr sz="800" b="0" i="0" u="none" strike="noStrike">
+                <a:solidFill>
+                  <a:srgbClr val="1F2937"/>
+                </a:solidFill>
+                <a:latin typeface="Calibri"/>
+              </a:defRPr>
+            </a:pPr>
+            <a:endParaRPr lang="en-US"/>
+          </a:p>
+        </c:txPr>
+        <c:crossAx val="2094734552"/>
+        <c:crosses val="autoZero"/>
+        <c:auto val="1"/>
+        <c:lblAlgn val="ctr"/>
+        <c:noMultiLvlLbl val="1"/>
+      </c:catAx>
+      <c:valAx>
+        <c:axId val="2094734552"/>
+        <c:scaling>
+          <c:orientation val="minMax"/>
+          <c:max val="0.5"/>
+        </c:scaling>
+        <c:delete val="0"/>
+        <c:axPos val="l"/>
+        <c:majorGridlines>
+          <c:spPr>
+            <a:ln w="6350" cap="flat">
+              <a:solidFill>
+                <a:srgbClr val="E5E7EB"/>
+              </a:solidFill>
+              <a:prstDash val="solid"/>
+              <a:round/>
+            </a:ln>
+          </c:spPr>
+        </c:majorGridlines>
+        <c:numFmt formatCode="0%" sourceLinked="0"/>
+        <c:majorTickMark val="out"/>
+        <c:minorTickMark val="none"/>
+        <c:tickLblPos val="nextTo"/>
+        <c:spPr>
+          <a:ln w="12700" cap="flat">
+            <a:solidFill>
+              <a:srgbClr val="888888"/>
+            </a:solidFill>
+            <a:prstDash val="solid"/>
+            <a:round/>
+          </a:ln>
+        </c:spPr>
+        <c:txPr>
+          <a:bodyPr/>
+          <a:lstStyle/>
+          <a:p>
+            <a:pPr>
+              <a:defRPr sz="800" b="0" i="0" u="none" strike="noStrike">
+                <a:solidFill>
+                  <a:srgbClr val="6B7280"/>
+                </a:solidFill>
+                <a:latin typeface="Calibri"/>
+              </a:defRPr>
+            </a:pPr>
+            <a:endParaRPr lang="en-US"/>
+          </a:p>
+        </c:txPr>
+        <c:crossAx val="2094734554"/>
+        <c:crosses val="autoZero"/>
+        <c:crossBetween val="between"/>
+      </c:valAx>
+      <c:spPr>
+        <a:noFill/>
+        <a:ln>
+          <a:noFill/>
+        </a:ln>
+        <a:effectLst/>
+      </c:spPr>
+    </c:plotArea>
+    <c:plotVisOnly val="1"/>
+    <c:dispBlanksAs val="span"/>
+  </c:chart>
+  <c:spPr>
+    <a:noFill/>
+    <a:ln>
+      <a:noFill/>
+    </a:ln>
+    <a:effectLst/>
+  </c:spPr>
+  <c:externalData r:id="rId1">
+    <c:autoUpdate val="0"/>
+  </c:externalData>
+</c:chartSpace>
+</file>
+
+<file path=ppt/charts/chart2.xml><?xml version="1.0" encoding="utf-8"?>
+<c:chartSpace xmlns:c="http://schemas.openxmlformats.org/drawingml/2006/chart" xmlns:a="http://schemas.openxmlformats.org/drawingml/2006/main" xmlns:r="http://schemas.openxmlformats.org/officeDocument/2006/relationships">
+  <c:date1904 val="0"/>
+  <c:roundedCorners val="1"/>
+  <c:chart>
+    <c:autoTitleDeleted val="1"/>
+    <c:plotArea>
+      <c:layout/>
+      <c:barChart>
+        <c:barDir val="bar"/>
+        <c:grouping val="clustered"/>
+        <c:varyColors val="0"/>
+        <c:ser>
+          <c:idx val="0"/>
+          <c:order val="0"/>
+          <c:tx>
+            <c:strRef>
+              <c:f>Sheet1!$B$1</c:f>
+              <c:strCache>
+                <c:ptCount val="1"/>
+                <c:pt idx="0">
+                  <c:v>Rejects</c:v>
+                </c:pt>
+              </c:strCache>
+            </c:strRef>
+          </c:tx>
+          <c:spPr>
+            <a:solidFill>
+              <a:srgbClr val="0E7490"/>
+            </a:solidFill>
+            <a:effectLst/>
+          </c:spPr>
+          <c:invertIfNegative val="0"/>
+          <c:dLbls>
+            <c:numFmt formatCode="0" sourceLinked="0"/>
+            <c:txPr>
+              <a:bodyPr/>
+              <a:lstStyle/>
+              <a:p>
+                <a:pPr>
+                  <a:defRPr b="0" i="0" strike="noStrike" sz="1000" u="none">
+                    <a:solidFill>
+                      <a:srgbClr val="1F2937"/>
+                    </a:solidFill>
+                    <a:latin typeface="Calibri"/>
+                  </a:defRPr>
+                </a:pPr>
+              </a:p>
+            </c:txPr>
+            <c:showLegendKey val="0"/>
+            <c:showVal val="1"/>
+            <c:showCatName val="0"/>
+            <c:showSerName val="0"/>
+            <c:showPercent val="0"/>
+            <c:showBubbleSize val="0"/>
+            <c:showLeaderLines val="0"/>
+          </c:dLbls>
+          <c:cat>
+            <c:multiLvlStrRef>
+              <c:f>Sheet1!$A$2:$A$5</c:f>
+              <c:multiLvlStrCache>
+                <c:ptCount val="4"/>
+                <c:lvl>
+                  <c:pt idx="0">
+                    <c:v>Not itemized (8/26 harvest 9 + QC 1)</c:v>
+                  </c:pt>
+                  <c:pt idx="1">
+                    <c:v>Missing trachea — other buyer</c:v>
+                  </c:pt>
+                  <c:pt idx="2">
+                    <c:v>Heart damage / laceration</c:v>
+                  </c:pt>
+                  <c:pt idx="3">
+                    <c:v>Lung laceration (right-lung perimeter)</c:v>
+                  </c:pt>
+                </c:lvl>
+              </c:multiLvlStrCache>
+            </c:multiLvlStrRef>
+          </c:cat>
+          <c:val>
+            <c:numRef>
+              <c:f>Sheet1!$B$2:$B$5</c:f>
+              <c:numCache>
+                <c:formatCode>General</c:formatCode>
+                <c:ptCount val="4"/>
+                <c:pt idx="0">
+                  <c:v>10</c:v>
+                </c:pt>
+                <c:pt idx="1">
+                  <c:v>9</c:v>
+                </c:pt>
+                <c:pt idx="2">
+                  <c:v>21</c:v>
+                </c:pt>
+                <c:pt idx="3">
+                  <c:v>50</c:v>
+                </c:pt>
+              </c:numCache>
+            </c:numRef>
+          </c:val>
+        </c:ser>
+        <c:dLbls>
+          <c:numFmt formatCode="0" sourceLinked="0"/>
+          <c:txPr>
+            <a:bodyPr/>
+            <a:lstStyle/>
+            <a:p>
+              <a:pPr>
+                <a:defRPr b="0" i="0" strike="noStrike" sz="1000" u="none">
+                  <a:solidFill>
+                    <a:srgbClr val="1F2937"/>
+                  </a:solidFill>
+                  <a:latin typeface="Calibri"/>
+                </a:defRPr>
+              </a:pPr>
+            </a:p>
+          </c:txPr>
+          <c:showLegendKey val="0"/>
+          <c:showVal val="1"/>
+          <c:showCatName val="0"/>
+          <c:showSerName val="0"/>
+          <c:showPercent val="0"/>
+          <c:showBubbleSize val="0"/>
+          <c:showLeaderLines val="0"/>
+        </c:dLbls>
+        <c:gapWidth val="40"/>
+        <c:overlap val="0"/>
+        <c:axId val="2094734554"/>
+        <c:axId val="2094734552"/>
+        <c:axId val="2094734556"/>
+      </c:barChart>
+      <c:catAx>
+        <c:axId val="2094734554"/>
+        <c:scaling>
+          <c:orientation val="minMax"/>
+        </c:scaling>
+        <c:delete val="0"/>
+        <c:axPos val="l"/>
+        <c:numFmt formatCode="General" sourceLinked="1"/>
+        <c:majorTickMark val="out"/>
+        <c:minorTickMark val="none"/>
+        <c:tickLblPos val="nextTo"/>
+        <c:spPr>
+          <a:ln w="12700" cap="flat">
+            <a:solidFill>
+              <a:srgbClr val="888888"/>
+            </a:solidFill>
+            <a:prstDash val="solid"/>
+            <a:round/>
+          </a:ln>
+        </c:spPr>
+        <c:txPr>
+          <a:bodyPr/>
+          <a:lstStyle/>
+          <a:p>
+            <a:pPr>
+              <a:defRPr sz="850" b="0" i="0" u="none" strike="noStrike">
+                <a:solidFill>
+                  <a:srgbClr val="1F2937"/>
+                </a:solidFill>
+                <a:latin typeface="Calibri"/>
+              </a:defRPr>
+            </a:pPr>
+            <a:endParaRPr lang="en-US"/>
+          </a:p>
+        </c:txPr>
+        <c:crossAx val="2094734552"/>
+        <c:crosses val="autoZero"/>
+        <c:auto val="1"/>
+        <c:lblAlgn val="ctr"/>
+        <c:noMultiLvlLbl val="1"/>
+      </c:catAx>
+      <c:valAx>
+        <c:axId val="2094734552"/>
+        <c:scaling>
+          <c:orientation val="minMax"/>
+          <c:max val="55"/>
+        </c:scaling>
+        <c:delete val="1"/>
+        <c:axPos val="b"/>
+        <c:numFmt formatCode="General" sourceLinked="0"/>
+        <c:majorTickMark val="out"/>
+        <c:minorTickMark val="none"/>
+        <c:tickLblPos val="low"/>
+        <c:spPr>
+          <a:ln w="12700" cap="flat">
+            <a:solidFill>
+              <a:srgbClr val="888888"/>
+            </a:solidFill>
+            <a:prstDash val="solid"/>
+            <a:round/>
+          </a:ln>
+        </c:spPr>
+        <c:txPr>
+          <a:bodyPr/>
+          <a:lstStyle/>
+          <a:p>
+            <a:pPr>
+              <a:defRPr sz="1200" b="0" i="0" u="none" strike="noStrike">
+                <a:solidFill>
+                  <a:srgbClr val="000000"/>
+                </a:solidFill>
+                <a:latin typeface="Arial"/>
+              </a:defRPr>
+            </a:pPr>
+            <a:endParaRPr lang="en-US"/>
+          </a:p>
+        </c:txPr>
+        <c:crossAx val="2094734554"/>
+        <c:crosses val="autoZero"/>
+        <c:crossBetween val="between"/>
+      </c:valAx>
+      <c:spPr>
+        <a:noFill/>
+        <a:ln>
+          <a:noFill/>
+        </a:ln>
+        <a:effectLst/>
+      </c:spPr>
+    </c:plotArea>
+    <c:plotVisOnly val="1"/>
+    <c:dispBlanksAs val="span"/>
+  </c:chart>
+  <c:spPr>
+    <a:noFill/>
+    <a:ln>
+      <a:noFill/>
+    </a:ln>
+    <a:effectLst/>
+  </c:spPr>
+  <c:externalData r:id="rId1">
+    <c:autoUpdate val="0"/>
+  </c:externalData>
+</c:chartSpace>
 </file>
 
 <file path=ppt/notesMasters/notesMaster1.xml><?xml version="1.0" encoding="utf-8"?>
@@ -883,8 +1378,8 @@
         </p:nvSpPr>
         <p:spPr>
           <a:xfrm>
-            <a:off x="502920" y="320040"/>
-            <a:ext cx="11155680" cy="256032"/>
+            <a:off x="411480" y="201168"/>
+            <a:ext cx="11338560" cy="237744"/>
           </a:xfrm>
           <a:prstGeom prst="rect">
             <a:avLst/>
@@ -900,7 +1395,7 @@
               <a:buNone/>
             </a:pPr>
             <a:r>
-              <a:rPr lang="en-US" sz="1100" b="1" spc="200" kern="0" dirty="0">
+              <a:rPr lang="en-US" sz="1050" b="1" spc="200" kern="0" dirty="0">
                 <a:solidFill>
                   <a:srgbClr val="0E7490"/>
                 </a:solidFill>
@@ -908,9 +1403,9 @@
                 <a:ea typeface="Calibri" pitchFamily="34" charset="-122"/>
                 <a:cs typeface="Calibri" pitchFamily="34" charset="-120"/>
               </a:rPr>
-              <a:t>NAHUNTA  ·  THORACICS 666521  ·  JUL 29 – SEP 9 2026</a:t>
+              <a:t>SPECIAL TOPIC  ·  NAHUNTA  ·  666521  ·  JUL 29 – SEP 9 2026  ·  SH FLOOR + ATM RECEIPT</a:t>
             </a:r>
-            <a:endParaRPr lang="en-US" sz="1100" dirty="0"/>
+            <a:endParaRPr lang="en-US" sz="1050" dirty="0"/>
           </a:p>
         </p:txBody>
       </p:sp>
@@ -922,8 +1417,8 @@
         </p:nvSpPr>
         <p:spPr>
           <a:xfrm>
-            <a:off x="502920" y="566928"/>
-            <a:ext cx="11155680" cy="548640"/>
+            <a:off x="411480" y="420624"/>
+            <a:ext cx="11338560" cy="502920"/>
           </a:xfrm>
           <a:prstGeom prst="rect">
             <a:avLst/>
@@ -939,7 +1434,7 @@
               <a:buNone/>
             </a:pPr>
             <a:r>
-              <a:rPr lang="en-US" sz="2800" b="1" dirty="0">
+              <a:rPr lang="en-US" sz="2500" b="1" dirty="0">
                 <a:solidFill>
                   <a:srgbClr val="1F2937"/>
                 </a:solidFill>
@@ -947,9 +1442,103 @@
                 <a:ea typeface="Calibri" pitchFamily="34" charset="-122"/>
                 <a:cs typeface="Calibri" pitchFamily="34" charset="-120"/>
               </a:rPr>
-              <a:t>Thoracics @ Nahunta — received vs scrapped</a:t>
+              <a:t>Thoracics @ Nahunta — what's going on</a:t>
             </a:r>
-            <a:endParaRPr lang="en-US" sz="2800" dirty="0"/>
+            <a:endParaRPr lang="en-US" sz="2500" dirty="0"/>
+          </a:p>
+        </p:txBody>
+      </p:sp>
+      <p:sp>
+        <p:nvSpPr>
+          <p:cNvPr id="4" name="Text 2"/>
+          <p:cNvSpPr/>
+          <p:nvPr/>
+        </p:nvSpPr>
+        <p:spPr>
+          <a:xfrm>
+            <a:off x="411480" y="1024128"/>
+            <a:ext cx="5577840" cy="219456"/>
+          </a:xfrm>
+          <a:prstGeom prst="rect">
+            <a:avLst/>
+          </a:prstGeom>
+          <a:noFill/>
+          <a:ln/>
+        </p:spPr>
+        <p:txBody>
+          <a:bodyPr wrap="square" lIns="0" tIns="0" rIns="0" bIns="0" rtlCol="0" anchor="ctr"/>
+          <a:lstStyle/>
+          <a:p>
+            <a:pPr indent="0" marL="0">
+              <a:buNone/>
+            </a:pPr>
+            <a:r>
+              <a:rPr lang="en-US" sz="1000" b="1" dirty="0">
+                <a:solidFill>
+                  <a:srgbClr val="1F2937"/>
+                </a:solidFill>
+                <a:latin typeface="Calibri" pitchFamily="34" charset="0"/>
+                <a:ea typeface="Calibri" pitchFamily="34" charset="-122"/>
+                <a:cs typeface="Calibri" pitchFamily="34" charset="-120"/>
+              </a:rPr>
+              <a:t>Harvest yield by visit — usable ÷ blocks at harvest</a:t>
+            </a:r>
+            <a:endParaRPr lang="en-US" sz="1000" dirty="0"/>
+          </a:p>
+        </p:txBody>
+      </p:sp>
+      <p:graphicFrame>
+        <p:nvGraphicFramePr>
+          <p:cNvPr id="5" name="Chart 0" descr=""/>
+          <p:cNvGraphicFramePr/>
+          <p:nvPr/>
+        </p:nvGraphicFramePr>
+        <p:xfrm>
+          <a:off x="411480" y="1261872"/>
+          <a:ext cx="5577840" cy="1874520"/>
+        </p:xfrm>
+        <a:graphic xmlns:a="http://schemas.openxmlformats.org/drawingml/2006/main">
+          <a:graphicData uri="http://schemas.openxmlformats.org/drawingml/2006/chart">
+            <c:chart xmlns:c="http://schemas.openxmlformats.org/drawingml/2006/chart" r:id="rId1"/>
+          </a:graphicData>
+        </a:graphic>
+      </p:graphicFrame>
+      <p:sp>
+        <p:nvSpPr>
+          <p:cNvPr id="6" name="Text 3"/>
+          <p:cNvSpPr/>
+          <p:nvPr/>
+        </p:nvSpPr>
+        <p:spPr>
+          <a:xfrm>
+            <a:off x="6172200" y="1024128"/>
+            <a:ext cx="5577840" cy="219456"/>
+          </a:xfrm>
+          <a:prstGeom prst="rect">
+            <a:avLst/>
+          </a:prstGeom>
+          <a:noFill/>
+          <a:ln/>
+        </p:spPr>
+        <p:txBody>
+          <a:bodyPr wrap="square" lIns="0" tIns="0" rIns="0" bIns="0" rtlCol="0" anchor="ctr"/>
+          <a:lstStyle/>
+          <a:p>
+            <a:pPr indent="0" marL="0">
+              <a:buNone/>
+            </a:pPr>
+            <a:r>
+              <a:rPr lang="en-US" sz="1000" b="1" dirty="0">
+                <a:solidFill>
+                  <a:srgbClr val="1F2937"/>
+                </a:solidFill>
+                <a:latin typeface="Calibri" pitchFamily="34" charset="0"/>
+                <a:ea typeface="Calibri" pitchFamily="34" charset="-122"/>
+                <a:cs typeface="Calibri" pitchFamily="34" charset="-120"/>
+              </a:rPr>
+              <a:t>Every visit — received vs scrapped</a:t>
+            </a:r>
+            <a:endParaRPr lang="en-US" sz="1000" dirty="0"/>
           </a:p>
         </p:txBody>
       </p:sp>
@@ -968,22 +1557,22 @@
           </p:nvPr>
         </p:nvGraphicFramePr>
         <p:xfrm>
-          <a:off x="822960" y="1600200"/>
-          <a:ext cx="10515600" cy="914400"/>
+          <a:off x="6172200" y="1261872"/>
+          <a:ext cx="5577840" cy="914400"/>
         </p:xfrm>
         <a:graphic>
           <a:graphicData uri="http://schemas.openxmlformats.org/drawingml/2006/table">
             <a:tbl>
               <a:tblPr/>
               <a:tblGrid>
-                <a:gridCol w="1554480"/>
-                <a:gridCol w="1554480"/>
-                <a:gridCol w="2377440"/>
-                <a:gridCol w="2011680"/>
-                <a:gridCol w="1645920"/>
-                <a:gridCol w="1371600"/>
+                <a:gridCol w="731520"/>
+                <a:gridCol w="868680"/>
+                <a:gridCol w="1280160"/>
+                <a:gridCol w="1005840"/>
+                <a:gridCol w="868680"/>
+                <a:gridCol w="822960"/>
               </a:tblGrid>
-              <a:tr h="502920">
+              <a:tr h="228600">
                 <a:tc>
                   <a:txBody>
                     <a:bodyPr/>
@@ -993,7 +1582,7 @@
                         <a:buNone/>
                       </a:pPr>
                       <a:r>
-                        <a:rPr lang="en-US" sz="1300" b="1" dirty="0">
+                        <a:rPr lang="en-US" sz="800" b="1" dirty="0">
                           <a:solidFill>
                             <a:srgbClr val="FFFFFF"/>
                           </a:solidFill>
@@ -1003,7 +1592,7 @@
                         </a:rPr>
                         <a:t>Harvest date</a:t>
                       </a:r>
-                      <a:endParaRPr lang="en-US" sz="1300" dirty="0">
+                      <a:endParaRPr lang="en-US" sz="800" dirty="0">
                         <a:latin typeface="Calibri" charset="0"/>
                         <a:ea typeface="Calibri" charset="0"/>
                         <a:cs typeface="Calibri" charset="0"/>
@@ -1011,7 +1600,7 @@
                     </a:p>
                   </a:txBody>
                   <a:tcPr marL="91440" marR="91440" marT="45720" marB="45720" anchor="ctr">
-                    <a:lnL w="9525" cap="flat" cmpd="sng" algn="ctr">
+                    <a:lnL w="6350" cap="flat" cmpd="sng" algn="ctr">
                       <a:solidFill>
                         <a:srgbClr val="E5E7EB"/>
                       </a:solidFill>
@@ -1020,7 +1609,7 @@
                       <a:headEnd type="none" w="med" len="med"/>
                       <a:tailEnd type="none" w="med" len="med"/>
                     </a:lnL>
-                    <a:lnR w="9525" cap="flat" cmpd="sng" algn="ctr">
+                    <a:lnR w="6350" cap="flat" cmpd="sng" algn="ctr">
                       <a:solidFill>
                         <a:srgbClr val="E5E7EB"/>
                       </a:solidFill>
@@ -1029,7 +1618,7 @@
                       <a:headEnd type="none" w="med" len="med"/>
                       <a:tailEnd type="none" w="med" len="med"/>
                     </a:lnR>
-                    <a:lnT w="9525" cap="flat" cmpd="sng" algn="ctr">
+                    <a:lnT w="6350" cap="flat" cmpd="sng" algn="ctr">
                       <a:solidFill>
                         <a:srgbClr val="E5E7EB"/>
                       </a:solidFill>
@@ -1038,7 +1627,7 @@
                       <a:headEnd type="none" w="med" len="med"/>
                       <a:tailEnd type="none" w="med" len="med"/>
                     </a:lnT>
-                    <a:lnB w="9525" cap="flat" cmpd="sng" algn="ctr">
+                    <a:lnB w="6350" cap="flat" cmpd="sng" algn="ctr">
                       <a:solidFill>
                         <a:srgbClr val="E5E7EB"/>
                       </a:solidFill>
@@ -1061,7 +1650,7 @@
                         <a:buNone/>
                       </a:pPr>
                       <a:r>
-                        <a:rPr lang="en-US" sz="1300" b="1" dirty="0">
+                        <a:rPr lang="en-US" sz="800" b="1" dirty="0">
                           <a:solidFill>
                             <a:srgbClr val="FFFFFF"/>
                           </a:solidFill>
@@ -1071,7 +1660,7 @@
                         </a:rPr>
                         <a:t># Received</a:t>
                       </a:r>
-                      <a:endParaRPr lang="en-US" sz="1300" dirty="0">
+                      <a:endParaRPr lang="en-US" sz="800" dirty="0">
                         <a:latin typeface="Calibri" charset="0"/>
                         <a:ea typeface="Calibri" charset="0"/>
                         <a:cs typeface="Calibri" charset="0"/>
@@ -1079,7 +1668,7 @@
                     </a:p>
                   </a:txBody>
                   <a:tcPr marL="91440" marR="91440" marT="45720" marB="45720" anchor="ctr">
-                    <a:lnL w="9525" cap="flat" cmpd="sng" algn="ctr">
+                    <a:lnL w="6350" cap="flat" cmpd="sng" algn="ctr">
                       <a:solidFill>
                         <a:srgbClr val="E5E7EB"/>
                       </a:solidFill>
@@ -1088,7 +1677,7 @@
                       <a:headEnd type="none" w="med" len="med"/>
                       <a:tailEnd type="none" w="med" len="med"/>
                     </a:lnL>
-                    <a:lnR w="9525" cap="flat" cmpd="sng" algn="ctr">
+                    <a:lnR w="6350" cap="flat" cmpd="sng" algn="ctr">
                       <a:solidFill>
                         <a:srgbClr val="E5E7EB"/>
                       </a:solidFill>
@@ -1097,7 +1686,7 @@
                       <a:headEnd type="none" w="med" len="med"/>
                       <a:tailEnd type="none" w="med" len="med"/>
                     </a:lnR>
-                    <a:lnT w="9525" cap="flat" cmpd="sng" algn="ctr">
+                    <a:lnT w="6350" cap="flat" cmpd="sng" algn="ctr">
                       <a:solidFill>
                         <a:srgbClr val="E5E7EB"/>
                       </a:solidFill>
@@ -1106,7 +1695,7 @@
                       <a:headEnd type="none" w="med" len="med"/>
                       <a:tailEnd type="none" w="med" len="med"/>
                     </a:lnT>
-                    <a:lnB w="9525" cap="flat" cmpd="sng" algn="ctr">
+                    <a:lnB w="6350" cap="flat" cmpd="sng" algn="ctr">
                       <a:solidFill>
                         <a:srgbClr val="E5E7EB"/>
                       </a:solidFill>
@@ -1129,7 +1718,7 @@
                         <a:buNone/>
                       </a:pPr>
                       <a:r>
-                        <a:rPr lang="en-US" sz="1300" b="1" dirty="0">
+                        <a:rPr lang="en-US" sz="800" b="1" dirty="0">
                           <a:solidFill>
                             <a:srgbClr val="FFFFFF"/>
                           </a:solidFill>
@@ -1139,7 +1728,7 @@
                         </a:rPr>
                         <a:t>Scrapped by Jordan (harvest)</a:t>
                       </a:r>
-                      <a:endParaRPr lang="en-US" sz="1300" dirty="0">
+                      <a:endParaRPr lang="en-US" sz="800" dirty="0">
                         <a:latin typeface="Calibri" charset="0"/>
                         <a:ea typeface="Calibri" charset="0"/>
                         <a:cs typeface="Calibri" charset="0"/>
@@ -1147,7 +1736,7 @@
                     </a:p>
                   </a:txBody>
                   <a:tcPr marL="91440" marR="91440" marT="45720" marB="45720" anchor="ctr">
-                    <a:lnL w="9525" cap="flat" cmpd="sng" algn="ctr">
+                    <a:lnL w="6350" cap="flat" cmpd="sng" algn="ctr">
                       <a:solidFill>
                         <a:srgbClr val="E5E7EB"/>
                       </a:solidFill>
@@ -1156,7 +1745,7 @@
                       <a:headEnd type="none" w="med" len="med"/>
                       <a:tailEnd type="none" w="med" len="med"/>
                     </a:lnL>
-                    <a:lnR w="9525" cap="flat" cmpd="sng" algn="ctr">
+                    <a:lnR w="6350" cap="flat" cmpd="sng" algn="ctr">
                       <a:solidFill>
                         <a:srgbClr val="E5E7EB"/>
                       </a:solidFill>
@@ -1165,7 +1754,7 @@
                       <a:headEnd type="none" w="med" len="med"/>
                       <a:tailEnd type="none" w="med" len="med"/>
                     </a:lnR>
-                    <a:lnT w="9525" cap="flat" cmpd="sng" algn="ctr">
+                    <a:lnT w="6350" cap="flat" cmpd="sng" algn="ctr">
                       <a:solidFill>
                         <a:srgbClr val="E5E7EB"/>
                       </a:solidFill>
@@ -1174,7 +1763,7 @@
                       <a:headEnd type="none" w="med" len="med"/>
                       <a:tailEnd type="none" w="med" len="med"/>
                     </a:lnT>
-                    <a:lnB w="9525" cap="flat" cmpd="sng" algn="ctr">
+                    <a:lnB w="6350" cap="flat" cmpd="sng" algn="ctr">
                       <a:solidFill>
                         <a:srgbClr val="E5E7EB"/>
                       </a:solidFill>
@@ -1197,7 +1786,7 @@
                         <a:buNone/>
                       </a:pPr>
                       <a:r>
-                        <a:rPr lang="en-US" sz="1300" b="1" dirty="0">
+                        <a:rPr lang="en-US" sz="800" b="1" dirty="0">
                           <a:solidFill>
                             <a:srgbClr val="FFFFFF"/>
                           </a:solidFill>
@@ -1207,7 +1796,7 @@
                         </a:rPr>
                         <a:t>Scrapped by our QC</a:t>
                       </a:r>
-                      <a:endParaRPr lang="en-US" sz="1300" dirty="0">
+                      <a:endParaRPr lang="en-US" sz="800" dirty="0">
                         <a:latin typeface="Calibri" charset="0"/>
                         <a:ea typeface="Calibri" charset="0"/>
                         <a:cs typeface="Calibri" charset="0"/>
@@ -1215,7 +1804,7 @@
                     </a:p>
                   </a:txBody>
                   <a:tcPr marL="91440" marR="91440" marT="45720" marB="45720" anchor="ctr">
-                    <a:lnL w="9525" cap="flat" cmpd="sng" algn="ctr">
+                    <a:lnL w="6350" cap="flat" cmpd="sng" algn="ctr">
                       <a:solidFill>
                         <a:srgbClr val="E5E7EB"/>
                       </a:solidFill>
@@ -1224,7 +1813,7 @@
                       <a:headEnd type="none" w="med" len="med"/>
                       <a:tailEnd type="none" w="med" len="med"/>
                     </a:lnL>
-                    <a:lnR w="9525" cap="flat" cmpd="sng" algn="ctr">
+                    <a:lnR w="6350" cap="flat" cmpd="sng" algn="ctr">
                       <a:solidFill>
                         <a:srgbClr val="E5E7EB"/>
                       </a:solidFill>
@@ -1233,7 +1822,7 @@
                       <a:headEnd type="none" w="med" len="med"/>
                       <a:tailEnd type="none" w="med" len="med"/>
                     </a:lnR>
-                    <a:lnT w="9525" cap="flat" cmpd="sng" algn="ctr">
+                    <a:lnT w="6350" cap="flat" cmpd="sng" algn="ctr">
                       <a:solidFill>
                         <a:srgbClr val="E5E7EB"/>
                       </a:solidFill>
@@ -1242,7 +1831,7 @@
                       <a:headEnd type="none" w="med" len="med"/>
                       <a:tailEnd type="none" w="med" len="med"/>
                     </a:lnT>
-                    <a:lnB w="9525" cap="flat" cmpd="sng" algn="ctr">
+                    <a:lnB w="6350" cap="flat" cmpd="sng" algn="ctr">
                       <a:solidFill>
                         <a:srgbClr val="E5E7EB"/>
                       </a:solidFill>
@@ -1265,7 +1854,7 @@
                         <a:buNone/>
                       </a:pPr>
                       <a:r>
-                        <a:rPr lang="en-US" sz="1300" b="1" dirty="0">
+                        <a:rPr lang="en-US" sz="800" b="1" dirty="0">
                           <a:solidFill>
                             <a:srgbClr val="FFFFFF"/>
                           </a:solidFill>
@@ -1275,7 +1864,7 @@
                         </a:rPr>
                         <a:t>Total scrapped</a:t>
                       </a:r>
-                      <a:endParaRPr lang="en-US" sz="1300" dirty="0">
+                      <a:endParaRPr lang="en-US" sz="800" dirty="0">
                         <a:latin typeface="Calibri" charset="0"/>
                         <a:ea typeface="Calibri" charset="0"/>
                         <a:cs typeface="Calibri" charset="0"/>
@@ -1283,7 +1872,7 @@
                     </a:p>
                   </a:txBody>
                   <a:tcPr marL="91440" marR="91440" marT="45720" marB="45720" anchor="ctr">
-                    <a:lnL w="9525" cap="flat" cmpd="sng" algn="ctr">
+                    <a:lnL w="6350" cap="flat" cmpd="sng" algn="ctr">
                       <a:solidFill>
                         <a:srgbClr val="E5E7EB"/>
                       </a:solidFill>
@@ -1292,7 +1881,7 @@
                       <a:headEnd type="none" w="med" len="med"/>
                       <a:tailEnd type="none" w="med" len="med"/>
                     </a:lnL>
-                    <a:lnR w="9525" cap="flat" cmpd="sng" algn="ctr">
+                    <a:lnR w="6350" cap="flat" cmpd="sng" algn="ctr">
                       <a:solidFill>
                         <a:srgbClr val="E5E7EB"/>
                       </a:solidFill>
@@ -1301,7 +1890,7 @@
                       <a:headEnd type="none" w="med" len="med"/>
                       <a:tailEnd type="none" w="med" len="med"/>
                     </a:lnR>
-                    <a:lnT w="9525" cap="flat" cmpd="sng" algn="ctr">
+                    <a:lnT w="6350" cap="flat" cmpd="sng" algn="ctr">
                       <a:solidFill>
                         <a:srgbClr val="E5E7EB"/>
                       </a:solidFill>
@@ -1310,7 +1899,7 @@
                       <a:headEnd type="none" w="med" len="med"/>
                       <a:tailEnd type="none" w="med" len="med"/>
                     </a:lnT>
-                    <a:lnB w="9525" cap="flat" cmpd="sng" algn="ctr">
+                    <a:lnB w="6350" cap="flat" cmpd="sng" algn="ctr">
                       <a:solidFill>
                         <a:srgbClr val="E5E7EB"/>
                       </a:solidFill>
@@ -1333,7 +1922,7 @@
                         <a:buNone/>
                       </a:pPr>
                       <a:r>
-                        <a:rPr lang="en-US" sz="1300" b="1" dirty="0">
+                        <a:rPr lang="en-US" sz="800" b="1" dirty="0">
                           <a:solidFill>
                             <a:srgbClr val="FFFFFF"/>
                           </a:solidFill>
@@ -1343,7 +1932,7 @@
                         </a:rPr>
                         <a:t>Scrap % of received</a:t>
                       </a:r>
-                      <a:endParaRPr lang="en-US" sz="1300" dirty="0">
+                      <a:endParaRPr lang="en-US" sz="800" dirty="0">
                         <a:latin typeface="Calibri" charset="0"/>
                         <a:ea typeface="Calibri" charset="0"/>
                         <a:cs typeface="Calibri" charset="0"/>
@@ -1351,7 +1940,7 @@
                     </a:p>
                   </a:txBody>
                   <a:tcPr marL="91440" marR="91440" marT="45720" marB="45720" anchor="ctr">
-                    <a:lnL w="9525" cap="flat" cmpd="sng" algn="ctr">
+                    <a:lnL w="6350" cap="flat" cmpd="sng" algn="ctr">
                       <a:solidFill>
                         <a:srgbClr val="E5E7EB"/>
                       </a:solidFill>
@@ -1360,7 +1949,7 @@
                       <a:headEnd type="none" w="med" len="med"/>
                       <a:tailEnd type="none" w="med" len="med"/>
                     </a:lnL>
-                    <a:lnR w="9525" cap="flat" cmpd="sng" algn="ctr">
+                    <a:lnR w="6350" cap="flat" cmpd="sng" algn="ctr">
                       <a:solidFill>
                         <a:srgbClr val="E5E7EB"/>
                       </a:solidFill>
@@ -1369,7 +1958,7 @@
                       <a:headEnd type="none" w="med" len="med"/>
                       <a:tailEnd type="none" w="med" len="med"/>
                     </a:lnR>
-                    <a:lnT w="9525" cap="flat" cmpd="sng" algn="ctr">
+                    <a:lnT w="6350" cap="flat" cmpd="sng" algn="ctr">
                       <a:solidFill>
                         <a:srgbClr val="E5E7EB"/>
                       </a:solidFill>
@@ -1378,7 +1967,7 @@
                       <a:headEnd type="none" w="med" len="med"/>
                       <a:tailEnd type="none" w="med" len="med"/>
                     </a:lnT>
-                    <a:lnB w="9525" cap="flat" cmpd="sng" algn="ctr">
+                    <a:lnB w="6350" cap="flat" cmpd="sng" algn="ctr">
                       <a:solidFill>
                         <a:srgbClr val="E5E7EB"/>
                       </a:solidFill>
@@ -1393,7 +1982,7 @@
                   </a:tcPr>
                 </a:tc>
               </a:tr>
-              <a:tr h="502920">
+              <a:tr h="228600">
                 <a:tc>
                   <a:txBody>
                     <a:bodyPr/>
@@ -1403,7 +1992,7 @@
                         <a:buNone/>
                       </a:pPr>
                       <a:r>
-                        <a:rPr lang="en-US" sz="1300" b="1" dirty="0">
+                        <a:rPr lang="en-US" sz="850" b="1" dirty="0">
                           <a:solidFill>
                             <a:srgbClr val="000000"/>
                           </a:solidFill>
@@ -1411,9 +2000,9 @@
                           <a:ea typeface="Calibri" pitchFamily="34" charset="-122"/>
                           <a:cs typeface="Calibri" pitchFamily="34" charset="-120"/>
                         </a:rPr>
-                        <a:t>07/29</a:t>
+                        <a:t>7/29</a:t>
                       </a:r>
-                      <a:endParaRPr lang="en-US" sz="1300" dirty="0">
+                      <a:endParaRPr lang="en-US" sz="850" dirty="0">
                         <a:latin typeface="Calibri" charset="0"/>
                         <a:ea typeface="Calibri" charset="0"/>
                         <a:cs typeface="Calibri" charset="0"/>
@@ -1421,7 +2010,7 @@
                     </a:p>
                   </a:txBody>
                   <a:tcPr marL="91440" marR="91440" marT="45720" marB="45720" anchor="ctr">
-                    <a:lnL w="9525" cap="flat" cmpd="sng" algn="ctr">
+                    <a:lnL w="6350" cap="flat" cmpd="sng" algn="ctr">
                       <a:solidFill>
                         <a:srgbClr val="E5E7EB"/>
                       </a:solidFill>
@@ -1430,7 +2019,7 @@
                       <a:headEnd type="none" w="med" len="med"/>
                       <a:tailEnd type="none" w="med" len="med"/>
                     </a:lnL>
-                    <a:lnR w="9525" cap="flat" cmpd="sng" algn="ctr">
+                    <a:lnR w="6350" cap="flat" cmpd="sng" algn="ctr">
                       <a:solidFill>
                         <a:srgbClr val="E5E7EB"/>
                       </a:solidFill>
@@ -1439,7 +2028,7 @@
                       <a:headEnd type="none" w="med" len="med"/>
                       <a:tailEnd type="none" w="med" len="med"/>
                     </a:lnR>
-                    <a:lnT w="9525" cap="flat" cmpd="sng" algn="ctr">
+                    <a:lnT w="6350" cap="flat" cmpd="sng" algn="ctr">
                       <a:solidFill>
                         <a:srgbClr val="E5E7EB"/>
                       </a:solidFill>
@@ -1448,7 +2037,7 @@
                       <a:headEnd type="none" w="med" len="med"/>
                       <a:tailEnd type="none" w="med" len="med"/>
                     </a:lnT>
-                    <a:lnB w="9525" cap="flat" cmpd="sng" algn="ctr">
+                    <a:lnB w="6350" cap="flat" cmpd="sng" algn="ctr">
                       <a:solidFill>
                         <a:srgbClr val="E5E7EB"/>
                       </a:solidFill>
@@ -1468,7 +2057,7 @@
                         <a:buNone/>
                       </a:pPr>
                       <a:r>
-                        <a:rPr lang="en-US" sz="1300" dirty="0">
+                        <a:rPr lang="en-US" sz="850" dirty="0">
                           <a:solidFill>
                             <a:srgbClr val="000000"/>
                           </a:solidFill>
@@ -1478,7 +2067,7 @@
                         </a:rPr>
                         <a:t>19</a:t>
                       </a:r>
-                      <a:endParaRPr lang="en-US" sz="1300" dirty="0">
+                      <a:endParaRPr lang="en-US" sz="850" dirty="0">
                         <a:latin typeface="Calibri" charset="0"/>
                         <a:ea typeface="Calibri" charset="0"/>
                         <a:cs typeface="Calibri" charset="0"/>
@@ -1486,7 +2075,7 @@
                     </a:p>
                   </a:txBody>
                   <a:tcPr marL="91440" marR="91440" marT="45720" marB="45720" anchor="ctr">
-                    <a:lnL w="9525" cap="flat" cmpd="sng" algn="ctr">
+                    <a:lnL w="6350" cap="flat" cmpd="sng" algn="ctr">
                       <a:solidFill>
                         <a:srgbClr val="E5E7EB"/>
                       </a:solidFill>
@@ -1495,7 +2084,7 @@
                       <a:headEnd type="none" w="med" len="med"/>
                       <a:tailEnd type="none" w="med" len="med"/>
                     </a:lnL>
-                    <a:lnR w="9525" cap="flat" cmpd="sng" algn="ctr">
+                    <a:lnR w="6350" cap="flat" cmpd="sng" algn="ctr">
                       <a:solidFill>
                         <a:srgbClr val="E5E7EB"/>
                       </a:solidFill>
@@ -1504,7 +2093,7 @@
                       <a:headEnd type="none" w="med" len="med"/>
                       <a:tailEnd type="none" w="med" len="med"/>
                     </a:lnR>
-                    <a:lnT w="9525" cap="flat" cmpd="sng" algn="ctr">
+                    <a:lnT w="6350" cap="flat" cmpd="sng" algn="ctr">
                       <a:solidFill>
                         <a:srgbClr val="E5E7EB"/>
                       </a:solidFill>
@@ -1513,7 +2102,7 @@
                       <a:headEnd type="none" w="med" len="med"/>
                       <a:tailEnd type="none" w="med" len="med"/>
                     </a:lnT>
-                    <a:lnB w="9525" cap="flat" cmpd="sng" algn="ctr">
+                    <a:lnB w="6350" cap="flat" cmpd="sng" algn="ctr">
                       <a:solidFill>
                         <a:srgbClr val="E5E7EB"/>
                       </a:solidFill>
@@ -1533,7 +2122,7 @@
                         <a:buNone/>
                       </a:pPr>
                       <a:r>
-                        <a:rPr lang="en-US" sz="1300" dirty="0">
+                        <a:rPr lang="en-US" sz="850" dirty="0">
                           <a:solidFill>
                             <a:srgbClr val="000000"/>
                           </a:solidFill>
@@ -1543,7 +2132,7 @@
                         </a:rPr>
                         <a:t>0</a:t>
                       </a:r>
-                      <a:endParaRPr lang="en-US" sz="1300" dirty="0">
+                      <a:endParaRPr lang="en-US" sz="850" dirty="0">
                         <a:latin typeface="Calibri" charset="0"/>
                         <a:ea typeface="Calibri" charset="0"/>
                         <a:cs typeface="Calibri" charset="0"/>
@@ -1551,7 +2140,7 @@
                     </a:p>
                   </a:txBody>
                   <a:tcPr marL="91440" marR="91440" marT="45720" marB="45720" anchor="ctr">
-                    <a:lnL w="9525" cap="flat" cmpd="sng" algn="ctr">
+                    <a:lnL w="6350" cap="flat" cmpd="sng" algn="ctr">
                       <a:solidFill>
                         <a:srgbClr val="E5E7EB"/>
                       </a:solidFill>
@@ -1560,7 +2149,7 @@
                       <a:headEnd type="none" w="med" len="med"/>
                       <a:tailEnd type="none" w="med" len="med"/>
                     </a:lnL>
-                    <a:lnR w="9525" cap="flat" cmpd="sng" algn="ctr">
+                    <a:lnR w="6350" cap="flat" cmpd="sng" algn="ctr">
                       <a:solidFill>
                         <a:srgbClr val="E5E7EB"/>
                       </a:solidFill>
@@ -1569,7 +2158,7 @@
                       <a:headEnd type="none" w="med" len="med"/>
                       <a:tailEnd type="none" w="med" len="med"/>
                     </a:lnR>
-                    <a:lnT w="9525" cap="flat" cmpd="sng" algn="ctr">
+                    <a:lnT w="6350" cap="flat" cmpd="sng" algn="ctr">
                       <a:solidFill>
                         <a:srgbClr val="E5E7EB"/>
                       </a:solidFill>
@@ -1578,7 +2167,7 @@
                       <a:headEnd type="none" w="med" len="med"/>
                       <a:tailEnd type="none" w="med" len="med"/>
                     </a:lnT>
-                    <a:lnB w="9525" cap="flat" cmpd="sng" algn="ctr">
+                    <a:lnB w="6350" cap="flat" cmpd="sng" algn="ctr">
                       <a:solidFill>
                         <a:srgbClr val="E5E7EB"/>
                       </a:solidFill>
@@ -1598,7 +2187,7 @@
                         <a:buNone/>
                       </a:pPr>
                       <a:r>
-                        <a:rPr lang="en-US" sz="1300" dirty="0">
+                        <a:rPr lang="en-US" sz="850" dirty="0">
                           <a:solidFill>
                             <a:srgbClr val="000000"/>
                           </a:solidFill>
@@ -1608,7 +2197,7 @@
                         </a:rPr>
                         <a:t>13</a:t>
                       </a:r>
-                      <a:endParaRPr lang="en-US" sz="1300" dirty="0">
+                      <a:endParaRPr lang="en-US" sz="850" dirty="0">
                         <a:latin typeface="Calibri" charset="0"/>
                         <a:ea typeface="Calibri" charset="0"/>
                         <a:cs typeface="Calibri" charset="0"/>
@@ -1616,7 +2205,7 @@
                     </a:p>
                   </a:txBody>
                   <a:tcPr marL="91440" marR="91440" marT="45720" marB="45720" anchor="ctr">
-                    <a:lnL w="9525" cap="flat" cmpd="sng" algn="ctr">
+                    <a:lnL w="6350" cap="flat" cmpd="sng" algn="ctr">
                       <a:solidFill>
                         <a:srgbClr val="E5E7EB"/>
                       </a:solidFill>
@@ -1625,7 +2214,7 @@
                       <a:headEnd type="none" w="med" len="med"/>
                       <a:tailEnd type="none" w="med" len="med"/>
                     </a:lnL>
-                    <a:lnR w="9525" cap="flat" cmpd="sng" algn="ctr">
+                    <a:lnR w="6350" cap="flat" cmpd="sng" algn="ctr">
                       <a:solidFill>
                         <a:srgbClr val="E5E7EB"/>
                       </a:solidFill>
@@ -1634,7 +2223,7 @@
                       <a:headEnd type="none" w="med" len="med"/>
                       <a:tailEnd type="none" w="med" len="med"/>
                     </a:lnR>
-                    <a:lnT w="9525" cap="flat" cmpd="sng" algn="ctr">
+                    <a:lnT w="6350" cap="flat" cmpd="sng" algn="ctr">
                       <a:solidFill>
                         <a:srgbClr val="E5E7EB"/>
                       </a:solidFill>
@@ -1643,7 +2232,7 @@
                       <a:headEnd type="none" w="med" len="med"/>
                       <a:tailEnd type="none" w="med" len="med"/>
                     </a:lnT>
-                    <a:lnB w="9525" cap="flat" cmpd="sng" algn="ctr">
+                    <a:lnB w="6350" cap="flat" cmpd="sng" algn="ctr">
                       <a:solidFill>
                         <a:srgbClr val="E5E7EB"/>
                       </a:solidFill>
@@ -1663,7 +2252,7 @@
                         <a:buNone/>
                       </a:pPr>
                       <a:r>
-                        <a:rPr lang="en-US" sz="1300" b="1" dirty="0">
+                        <a:rPr lang="en-US" sz="850" b="1" dirty="0">
                           <a:solidFill>
                             <a:srgbClr val="000000"/>
                           </a:solidFill>
@@ -1673,7 +2262,7 @@
                         </a:rPr>
                         <a:t>13</a:t>
                       </a:r>
-                      <a:endParaRPr lang="en-US" sz="1300" dirty="0">
+                      <a:endParaRPr lang="en-US" sz="850" dirty="0">
                         <a:latin typeface="Calibri" charset="0"/>
                         <a:ea typeface="Calibri" charset="0"/>
                         <a:cs typeface="Calibri" charset="0"/>
@@ -1681,7 +2270,7 @@
                     </a:p>
                   </a:txBody>
                   <a:tcPr marL="91440" marR="91440" marT="45720" marB="45720" anchor="ctr">
-                    <a:lnL w="9525" cap="flat" cmpd="sng" algn="ctr">
+                    <a:lnL w="6350" cap="flat" cmpd="sng" algn="ctr">
                       <a:solidFill>
                         <a:srgbClr val="E5E7EB"/>
                       </a:solidFill>
@@ -1690,7 +2279,7 @@
                       <a:headEnd type="none" w="med" len="med"/>
                       <a:tailEnd type="none" w="med" len="med"/>
                     </a:lnL>
-                    <a:lnR w="9525" cap="flat" cmpd="sng" algn="ctr">
+                    <a:lnR w="6350" cap="flat" cmpd="sng" algn="ctr">
                       <a:solidFill>
                         <a:srgbClr val="E5E7EB"/>
                       </a:solidFill>
@@ -1699,7 +2288,7 @@
                       <a:headEnd type="none" w="med" len="med"/>
                       <a:tailEnd type="none" w="med" len="med"/>
                     </a:lnR>
-                    <a:lnT w="9525" cap="flat" cmpd="sng" algn="ctr">
+                    <a:lnT w="6350" cap="flat" cmpd="sng" algn="ctr">
                       <a:solidFill>
                         <a:srgbClr val="E5E7EB"/>
                       </a:solidFill>
@@ -1708,7 +2297,7 @@
                       <a:headEnd type="none" w="med" len="med"/>
                       <a:tailEnd type="none" w="med" len="med"/>
                     </a:lnT>
-                    <a:lnB w="9525" cap="flat" cmpd="sng" algn="ctr">
+                    <a:lnB w="6350" cap="flat" cmpd="sng" algn="ctr">
                       <a:solidFill>
                         <a:srgbClr val="E5E7EB"/>
                       </a:solidFill>
@@ -1728,7 +2317,7 @@
                         <a:buNone/>
                       </a:pPr>
                       <a:r>
-                        <a:rPr lang="en-US" sz="1300" b="1" dirty="0">
+                        <a:rPr lang="en-US" sz="850" b="1" dirty="0">
                           <a:solidFill>
                             <a:srgbClr val="B45309"/>
                           </a:solidFill>
@@ -1738,7 +2327,7 @@
                         </a:rPr>
                         <a:t>68.4%</a:t>
                       </a:r>
-                      <a:endParaRPr lang="en-US" sz="1300" dirty="0">
+                      <a:endParaRPr lang="en-US" sz="850" dirty="0">
                         <a:latin typeface="Calibri" charset="0"/>
                         <a:ea typeface="Calibri" charset="0"/>
                         <a:cs typeface="Calibri" charset="0"/>
@@ -1746,7 +2335,7 @@
                     </a:p>
                   </a:txBody>
                   <a:tcPr marL="91440" marR="91440" marT="45720" marB="45720" anchor="ctr">
-                    <a:lnL w="9525" cap="flat" cmpd="sng" algn="ctr">
+                    <a:lnL w="6350" cap="flat" cmpd="sng" algn="ctr">
                       <a:solidFill>
                         <a:srgbClr val="E5E7EB"/>
                       </a:solidFill>
@@ -1755,7 +2344,7 @@
                       <a:headEnd type="none" w="med" len="med"/>
                       <a:tailEnd type="none" w="med" len="med"/>
                     </a:lnL>
-                    <a:lnR w="9525" cap="flat" cmpd="sng" algn="ctr">
+                    <a:lnR w="6350" cap="flat" cmpd="sng" algn="ctr">
                       <a:solidFill>
                         <a:srgbClr val="E5E7EB"/>
                       </a:solidFill>
@@ -1764,7 +2353,7 @@
                       <a:headEnd type="none" w="med" len="med"/>
                       <a:tailEnd type="none" w="med" len="med"/>
                     </a:lnR>
-                    <a:lnT w="9525" cap="flat" cmpd="sng" algn="ctr">
+                    <a:lnT w="6350" cap="flat" cmpd="sng" algn="ctr">
                       <a:solidFill>
                         <a:srgbClr val="E5E7EB"/>
                       </a:solidFill>
@@ -1773,7 +2362,7 @@
                       <a:headEnd type="none" w="med" len="med"/>
                       <a:tailEnd type="none" w="med" len="med"/>
                     </a:lnT>
-                    <a:lnB w="9525" cap="flat" cmpd="sng" algn="ctr">
+                    <a:lnB w="6350" cap="flat" cmpd="sng" algn="ctr">
                       <a:solidFill>
                         <a:srgbClr val="E5E7EB"/>
                       </a:solidFill>
@@ -1785,7 +2374,7 @@
                   </a:tcPr>
                 </a:tc>
               </a:tr>
-              <a:tr h="502920">
+              <a:tr h="228600">
                 <a:tc>
                   <a:txBody>
                     <a:bodyPr/>
@@ -1795,7 +2384,7 @@
                         <a:buNone/>
                       </a:pPr>
                       <a:r>
-                        <a:rPr lang="en-US" sz="1300" b="1" dirty="0">
+                        <a:rPr lang="en-US" sz="850" b="1" dirty="0">
                           <a:solidFill>
                             <a:srgbClr val="000000"/>
                           </a:solidFill>
@@ -1803,9 +2392,9 @@
                           <a:ea typeface="Calibri" pitchFamily="34" charset="-122"/>
                           <a:cs typeface="Calibri" pitchFamily="34" charset="-120"/>
                         </a:rPr>
-                        <a:t>08/05</a:t>
+                        <a:t>8/5</a:t>
                       </a:r>
-                      <a:endParaRPr lang="en-US" sz="1300" dirty="0">
+                      <a:endParaRPr lang="en-US" sz="850" dirty="0">
                         <a:latin typeface="Calibri" charset="0"/>
                         <a:ea typeface="Calibri" charset="0"/>
                         <a:cs typeface="Calibri" charset="0"/>
@@ -1813,7 +2402,7 @@
                     </a:p>
                   </a:txBody>
                   <a:tcPr marL="91440" marR="91440" marT="45720" marB="45720" anchor="ctr">
-                    <a:lnL w="9525" cap="flat" cmpd="sng" algn="ctr">
+                    <a:lnL w="6350" cap="flat" cmpd="sng" algn="ctr">
                       <a:solidFill>
                         <a:srgbClr val="E5E7EB"/>
                       </a:solidFill>
@@ -1822,7 +2411,7 @@
                       <a:headEnd type="none" w="med" len="med"/>
                       <a:tailEnd type="none" w="med" len="med"/>
                     </a:lnL>
-                    <a:lnR w="9525" cap="flat" cmpd="sng" algn="ctr">
+                    <a:lnR w="6350" cap="flat" cmpd="sng" algn="ctr">
                       <a:solidFill>
                         <a:srgbClr val="E5E7EB"/>
                       </a:solidFill>
@@ -1831,7 +2420,7 @@
                       <a:headEnd type="none" w="med" len="med"/>
                       <a:tailEnd type="none" w="med" len="med"/>
                     </a:lnR>
-                    <a:lnT w="9525" cap="flat" cmpd="sng" algn="ctr">
+                    <a:lnT w="6350" cap="flat" cmpd="sng" algn="ctr">
                       <a:solidFill>
                         <a:srgbClr val="E5E7EB"/>
                       </a:solidFill>
@@ -1840,7 +2429,7 @@
                       <a:headEnd type="none" w="med" len="med"/>
                       <a:tailEnd type="none" w="med" len="med"/>
                     </a:lnT>
-                    <a:lnB w="9525" cap="flat" cmpd="sng" algn="ctr">
+                    <a:lnB w="6350" cap="flat" cmpd="sng" algn="ctr">
                       <a:solidFill>
                         <a:srgbClr val="E5E7EB"/>
                       </a:solidFill>
@@ -1860,7 +2449,7 @@
                         <a:buNone/>
                       </a:pPr>
                       <a:r>
-                        <a:rPr lang="en-US" sz="1300" dirty="0">
+                        <a:rPr lang="en-US" sz="850" dirty="0">
                           <a:solidFill>
                             <a:srgbClr val="000000"/>
                           </a:solidFill>
@@ -1870,7 +2459,7 @@
                         </a:rPr>
                         <a:t>15</a:t>
                       </a:r>
-                      <a:endParaRPr lang="en-US" sz="1300" dirty="0">
+                      <a:endParaRPr lang="en-US" sz="850" dirty="0">
                         <a:latin typeface="Calibri" charset="0"/>
                         <a:ea typeface="Calibri" charset="0"/>
                         <a:cs typeface="Calibri" charset="0"/>
@@ -1878,7 +2467,7 @@
                     </a:p>
                   </a:txBody>
                   <a:tcPr marL="91440" marR="91440" marT="45720" marB="45720" anchor="ctr">
-                    <a:lnL w="9525" cap="flat" cmpd="sng" algn="ctr">
+                    <a:lnL w="6350" cap="flat" cmpd="sng" algn="ctr">
                       <a:solidFill>
                         <a:srgbClr val="E5E7EB"/>
                       </a:solidFill>
@@ -1887,7 +2476,7 @@
                       <a:headEnd type="none" w="med" len="med"/>
                       <a:tailEnd type="none" w="med" len="med"/>
                     </a:lnL>
-                    <a:lnR w="9525" cap="flat" cmpd="sng" algn="ctr">
+                    <a:lnR w="6350" cap="flat" cmpd="sng" algn="ctr">
                       <a:solidFill>
                         <a:srgbClr val="E5E7EB"/>
                       </a:solidFill>
@@ -1896,7 +2485,7 @@
                       <a:headEnd type="none" w="med" len="med"/>
                       <a:tailEnd type="none" w="med" len="med"/>
                     </a:lnR>
-                    <a:lnT w="9525" cap="flat" cmpd="sng" algn="ctr">
+                    <a:lnT w="6350" cap="flat" cmpd="sng" algn="ctr">
                       <a:solidFill>
                         <a:srgbClr val="E5E7EB"/>
                       </a:solidFill>
@@ -1905,7 +2494,7 @@
                       <a:headEnd type="none" w="med" len="med"/>
                       <a:tailEnd type="none" w="med" len="med"/>
                     </a:lnT>
-                    <a:lnB w="9525" cap="flat" cmpd="sng" algn="ctr">
+                    <a:lnB w="6350" cap="flat" cmpd="sng" algn="ctr">
                       <a:solidFill>
                         <a:srgbClr val="E5E7EB"/>
                       </a:solidFill>
@@ -1925,7 +2514,7 @@
                         <a:buNone/>
                       </a:pPr>
                       <a:r>
-                        <a:rPr lang="en-US" sz="1300" dirty="0">
+                        <a:rPr lang="en-US" sz="850" dirty="0">
                           <a:solidFill>
                             <a:srgbClr val="000000"/>
                           </a:solidFill>
@@ -1935,7 +2524,7 @@
                         </a:rPr>
                         <a:t>0</a:t>
                       </a:r>
-                      <a:endParaRPr lang="en-US" sz="1300" dirty="0">
+                      <a:endParaRPr lang="en-US" sz="850" dirty="0">
                         <a:latin typeface="Calibri" charset="0"/>
                         <a:ea typeface="Calibri" charset="0"/>
                         <a:cs typeface="Calibri" charset="0"/>
@@ -1943,7 +2532,7 @@
                     </a:p>
                   </a:txBody>
                   <a:tcPr marL="91440" marR="91440" marT="45720" marB="45720" anchor="ctr">
-                    <a:lnL w="9525" cap="flat" cmpd="sng" algn="ctr">
+                    <a:lnL w="6350" cap="flat" cmpd="sng" algn="ctr">
                       <a:solidFill>
                         <a:srgbClr val="E5E7EB"/>
                       </a:solidFill>
@@ -1952,7 +2541,7 @@
                       <a:headEnd type="none" w="med" len="med"/>
                       <a:tailEnd type="none" w="med" len="med"/>
                     </a:lnL>
-                    <a:lnR w="9525" cap="flat" cmpd="sng" algn="ctr">
+                    <a:lnR w="6350" cap="flat" cmpd="sng" algn="ctr">
                       <a:solidFill>
                         <a:srgbClr val="E5E7EB"/>
                       </a:solidFill>
@@ -1961,7 +2550,7 @@
                       <a:headEnd type="none" w="med" len="med"/>
                       <a:tailEnd type="none" w="med" len="med"/>
                     </a:lnR>
-                    <a:lnT w="9525" cap="flat" cmpd="sng" algn="ctr">
+                    <a:lnT w="6350" cap="flat" cmpd="sng" algn="ctr">
                       <a:solidFill>
                         <a:srgbClr val="E5E7EB"/>
                       </a:solidFill>
@@ -1970,7 +2559,7 @@
                       <a:headEnd type="none" w="med" len="med"/>
                       <a:tailEnd type="none" w="med" len="med"/>
                     </a:lnT>
-                    <a:lnB w="9525" cap="flat" cmpd="sng" algn="ctr">
+                    <a:lnB w="6350" cap="flat" cmpd="sng" algn="ctr">
                       <a:solidFill>
                         <a:srgbClr val="E5E7EB"/>
                       </a:solidFill>
@@ -1990,7 +2579,7 @@
                         <a:buNone/>
                       </a:pPr>
                       <a:r>
-                        <a:rPr lang="en-US" sz="1300" dirty="0">
+                        <a:rPr lang="en-US" sz="850" dirty="0">
                           <a:solidFill>
                             <a:srgbClr val="000000"/>
                           </a:solidFill>
@@ -2000,7 +2589,7 @@
                         </a:rPr>
                         <a:t>15</a:t>
                       </a:r>
-                      <a:endParaRPr lang="en-US" sz="1300" dirty="0">
+                      <a:endParaRPr lang="en-US" sz="850" dirty="0">
                         <a:latin typeface="Calibri" charset="0"/>
                         <a:ea typeface="Calibri" charset="0"/>
                         <a:cs typeface="Calibri" charset="0"/>
@@ -2008,7 +2597,7 @@
                     </a:p>
                   </a:txBody>
                   <a:tcPr marL="91440" marR="91440" marT="45720" marB="45720" anchor="ctr">
-                    <a:lnL w="9525" cap="flat" cmpd="sng" algn="ctr">
+                    <a:lnL w="6350" cap="flat" cmpd="sng" algn="ctr">
                       <a:solidFill>
                         <a:srgbClr val="E5E7EB"/>
                       </a:solidFill>
@@ -2017,7 +2606,7 @@
                       <a:headEnd type="none" w="med" len="med"/>
                       <a:tailEnd type="none" w="med" len="med"/>
                     </a:lnL>
-                    <a:lnR w="9525" cap="flat" cmpd="sng" algn="ctr">
+                    <a:lnR w="6350" cap="flat" cmpd="sng" algn="ctr">
                       <a:solidFill>
                         <a:srgbClr val="E5E7EB"/>
                       </a:solidFill>
@@ -2026,7 +2615,7 @@
                       <a:headEnd type="none" w="med" len="med"/>
                       <a:tailEnd type="none" w="med" len="med"/>
                     </a:lnR>
-                    <a:lnT w="9525" cap="flat" cmpd="sng" algn="ctr">
+                    <a:lnT w="6350" cap="flat" cmpd="sng" algn="ctr">
                       <a:solidFill>
                         <a:srgbClr val="E5E7EB"/>
                       </a:solidFill>
@@ -2035,7 +2624,7 @@
                       <a:headEnd type="none" w="med" len="med"/>
                       <a:tailEnd type="none" w="med" len="med"/>
                     </a:lnT>
-                    <a:lnB w="9525" cap="flat" cmpd="sng" algn="ctr">
+                    <a:lnB w="6350" cap="flat" cmpd="sng" algn="ctr">
                       <a:solidFill>
                         <a:srgbClr val="E5E7EB"/>
                       </a:solidFill>
@@ -2055,7 +2644,7 @@
                         <a:buNone/>
                       </a:pPr>
                       <a:r>
-                        <a:rPr lang="en-US" sz="1300" b="1" dirty="0">
+                        <a:rPr lang="en-US" sz="850" b="1" dirty="0">
                           <a:solidFill>
                             <a:srgbClr val="000000"/>
                           </a:solidFill>
@@ -2065,7 +2654,7 @@
                         </a:rPr>
                         <a:t>15</a:t>
                       </a:r>
-                      <a:endParaRPr lang="en-US" sz="1300" dirty="0">
+                      <a:endParaRPr lang="en-US" sz="850" dirty="0">
                         <a:latin typeface="Calibri" charset="0"/>
                         <a:ea typeface="Calibri" charset="0"/>
                         <a:cs typeface="Calibri" charset="0"/>
@@ -2073,7 +2662,7 @@
                     </a:p>
                   </a:txBody>
                   <a:tcPr marL="91440" marR="91440" marT="45720" marB="45720" anchor="ctr">
-                    <a:lnL w="9525" cap="flat" cmpd="sng" algn="ctr">
+                    <a:lnL w="6350" cap="flat" cmpd="sng" algn="ctr">
                       <a:solidFill>
                         <a:srgbClr val="E5E7EB"/>
                       </a:solidFill>
@@ -2082,7 +2671,7 @@
                       <a:headEnd type="none" w="med" len="med"/>
                       <a:tailEnd type="none" w="med" len="med"/>
                     </a:lnL>
-                    <a:lnR w="9525" cap="flat" cmpd="sng" algn="ctr">
+                    <a:lnR w="6350" cap="flat" cmpd="sng" algn="ctr">
                       <a:solidFill>
                         <a:srgbClr val="E5E7EB"/>
                       </a:solidFill>
@@ -2091,7 +2680,7 @@
                       <a:headEnd type="none" w="med" len="med"/>
                       <a:tailEnd type="none" w="med" len="med"/>
                     </a:lnR>
-                    <a:lnT w="9525" cap="flat" cmpd="sng" algn="ctr">
+                    <a:lnT w="6350" cap="flat" cmpd="sng" algn="ctr">
                       <a:solidFill>
                         <a:srgbClr val="E5E7EB"/>
                       </a:solidFill>
@@ -2100,7 +2689,7 @@
                       <a:headEnd type="none" w="med" len="med"/>
                       <a:tailEnd type="none" w="med" len="med"/>
                     </a:lnT>
-                    <a:lnB w="9525" cap="flat" cmpd="sng" algn="ctr">
+                    <a:lnB w="6350" cap="flat" cmpd="sng" algn="ctr">
                       <a:solidFill>
                         <a:srgbClr val="E5E7EB"/>
                       </a:solidFill>
@@ -2120,7 +2709,7 @@
                         <a:buNone/>
                       </a:pPr>
                       <a:r>
-                        <a:rPr lang="en-US" sz="1300" b="1" dirty="0">
+                        <a:rPr lang="en-US" sz="850" b="1" dirty="0">
                           <a:solidFill>
                             <a:srgbClr val="DC2626"/>
                           </a:solidFill>
@@ -2130,7 +2719,7 @@
                         </a:rPr>
                         <a:t>100.0%</a:t>
                       </a:r>
-                      <a:endParaRPr lang="en-US" sz="1300" dirty="0">
+                      <a:endParaRPr lang="en-US" sz="850" dirty="0">
                         <a:latin typeface="Calibri" charset="0"/>
                         <a:ea typeface="Calibri" charset="0"/>
                         <a:cs typeface="Calibri" charset="0"/>
@@ -2138,7 +2727,7 @@
                     </a:p>
                   </a:txBody>
                   <a:tcPr marL="91440" marR="91440" marT="45720" marB="45720" anchor="ctr">
-                    <a:lnL w="9525" cap="flat" cmpd="sng" algn="ctr">
+                    <a:lnL w="6350" cap="flat" cmpd="sng" algn="ctr">
                       <a:solidFill>
                         <a:srgbClr val="E5E7EB"/>
                       </a:solidFill>
@@ -2147,7 +2736,7 @@
                       <a:headEnd type="none" w="med" len="med"/>
                       <a:tailEnd type="none" w="med" len="med"/>
                     </a:lnL>
-                    <a:lnR w="9525" cap="flat" cmpd="sng" algn="ctr">
+                    <a:lnR w="6350" cap="flat" cmpd="sng" algn="ctr">
                       <a:solidFill>
                         <a:srgbClr val="E5E7EB"/>
                       </a:solidFill>
@@ -2156,7 +2745,7 @@
                       <a:headEnd type="none" w="med" len="med"/>
                       <a:tailEnd type="none" w="med" len="med"/>
                     </a:lnR>
-                    <a:lnT w="9525" cap="flat" cmpd="sng" algn="ctr">
+                    <a:lnT w="6350" cap="flat" cmpd="sng" algn="ctr">
                       <a:solidFill>
                         <a:srgbClr val="E5E7EB"/>
                       </a:solidFill>
@@ -2165,7 +2754,7 @@
                       <a:headEnd type="none" w="med" len="med"/>
                       <a:tailEnd type="none" w="med" len="med"/>
                     </a:lnT>
-                    <a:lnB w="9525" cap="flat" cmpd="sng" algn="ctr">
+                    <a:lnB w="6350" cap="flat" cmpd="sng" algn="ctr">
                       <a:solidFill>
                         <a:srgbClr val="E5E7EB"/>
                       </a:solidFill>
@@ -2177,7 +2766,7 @@
                   </a:tcPr>
                 </a:tc>
               </a:tr>
-              <a:tr h="502920">
+              <a:tr h="228600">
                 <a:tc>
                   <a:txBody>
                     <a:bodyPr/>
@@ -2187,7 +2776,7 @@
                         <a:buNone/>
                       </a:pPr>
                       <a:r>
-                        <a:rPr lang="en-US" sz="1300" b="1" dirty="0">
+                        <a:rPr lang="en-US" sz="850" b="1" dirty="0">
                           <a:solidFill>
                             <a:srgbClr val="000000"/>
                           </a:solidFill>
@@ -2195,9 +2784,9 @@
                           <a:ea typeface="Calibri" pitchFamily="34" charset="-122"/>
                           <a:cs typeface="Calibri" pitchFamily="34" charset="-120"/>
                         </a:rPr>
-                        <a:t>08/12</a:t>
+                        <a:t>8/12</a:t>
                       </a:r>
-                      <a:endParaRPr lang="en-US" sz="1300" dirty="0">
+                      <a:endParaRPr lang="en-US" sz="850" dirty="0">
                         <a:latin typeface="Calibri" charset="0"/>
                         <a:ea typeface="Calibri" charset="0"/>
                         <a:cs typeface="Calibri" charset="0"/>
@@ -2205,7 +2794,7 @@
                     </a:p>
                   </a:txBody>
                   <a:tcPr marL="91440" marR="91440" marT="45720" marB="45720" anchor="ctr">
-                    <a:lnL w="9525" cap="flat" cmpd="sng" algn="ctr">
+                    <a:lnL w="6350" cap="flat" cmpd="sng" algn="ctr">
                       <a:solidFill>
                         <a:srgbClr val="E5E7EB"/>
                       </a:solidFill>
@@ -2214,7 +2803,7 @@
                       <a:headEnd type="none" w="med" len="med"/>
                       <a:tailEnd type="none" w="med" len="med"/>
                     </a:lnL>
-                    <a:lnR w="9525" cap="flat" cmpd="sng" algn="ctr">
+                    <a:lnR w="6350" cap="flat" cmpd="sng" algn="ctr">
                       <a:solidFill>
                         <a:srgbClr val="E5E7EB"/>
                       </a:solidFill>
@@ -2223,7 +2812,7 @@
                       <a:headEnd type="none" w="med" len="med"/>
                       <a:tailEnd type="none" w="med" len="med"/>
                     </a:lnR>
-                    <a:lnT w="9525" cap="flat" cmpd="sng" algn="ctr">
+                    <a:lnT w="6350" cap="flat" cmpd="sng" algn="ctr">
                       <a:solidFill>
                         <a:srgbClr val="E5E7EB"/>
                       </a:solidFill>
@@ -2232,7 +2821,7 @@
                       <a:headEnd type="none" w="med" len="med"/>
                       <a:tailEnd type="none" w="med" len="med"/>
                     </a:lnT>
-                    <a:lnB w="9525" cap="flat" cmpd="sng" algn="ctr">
+                    <a:lnB w="6350" cap="flat" cmpd="sng" algn="ctr">
                       <a:solidFill>
                         <a:srgbClr val="E5E7EB"/>
                       </a:solidFill>
@@ -2252,7 +2841,7 @@
                         <a:buNone/>
                       </a:pPr>
                       <a:r>
-                        <a:rPr lang="en-US" sz="1300" dirty="0">
+                        <a:rPr lang="en-US" sz="850" dirty="0">
                           <a:solidFill>
                             <a:srgbClr val="000000"/>
                           </a:solidFill>
@@ -2262,7 +2851,7 @@
                         </a:rPr>
                         <a:t>13</a:t>
                       </a:r>
-                      <a:endParaRPr lang="en-US" sz="1300" dirty="0">
+                      <a:endParaRPr lang="en-US" sz="850" dirty="0">
                         <a:latin typeface="Calibri" charset="0"/>
                         <a:ea typeface="Calibri" charset="0"/>
                         <a:cs typeface="Calibri" charset="0"/>
@@ -2270,7 +2859,7 @@
                     </a:p>
                   </a:txBody>
                   <a:tcPr marL="91440" marR="91440" marT="45720" marB="45720" anchor="ctr">
-                    <a:lnL w="9525" cap="flat" cmpd="sng" algn="ctr">
+                    <a:lnL w="6350" cap="flat" cmpd="sng" algn="ctr">
                       <a:solidFill>
                         <a:srgbClr val="E5E7EB"/>
                       </a:solidFill>
@@ -2279,7 +2868,7 @@
                       <a:headEnd type="none" w="med" len="med"/>
                       <a:tailEnd type="none" w="med" len="med"/>
                     </a:lnL>
-                    <a:lnR w="9525" cap="flat" cmpd="sng" algn="ctr">
+                    <a:lnR w="6350" cap="flat" cmpd="sng" algn="ctr">
                       <a:solidFill>
                         <a:srgbClr val="E5E7EB"/>
                       </a:solidFill>
@@ -2288,7 +2877,7 @@
                       <a:headEnd type="none" w="med" len="med"/>
                       <a:tailEnd type="none" w="med" len="med"/>
                     </a:lnR>
-                    <a:lnT w="9525" cap="flat" cmpd="sng" algn="ctr">
+                    <a:lnT w="6350" cap="flat" cmpd="sng" algn="ctr">
                       <a:solidFill>
                         <a:srgbClr val="E5E7EB"/>
                       </a:solidFill>
@@ -2297,7 +2886,7 @@
                       <a:headEnd type="none" w="med" len="med"/>
                       <a:tailEnd type="none" w="med" len="med"/>
                     </a:lnT>
-                    <a:lnB w="9525" cap="flat" cmpd="sng" algn="ctr">
+                    <a:lnB w="6350" cap="flat" cmpd="sng" algn="ctr">
                       <a:solidFill>
                         <a:srgbClr val="E5E7EB"/>
                       </a:solidFill>
@@ -2317,7 +2906,7 @@
                         <a:buNone/>
                       </a:pPr>
                       <a:r>
-                        <a:rPr lang="en-US" sz="1300" dirty="0">
+                        <a:rPr lang="en-US" sz="850" dirty="0">
                           <a:solidFill>
                             <a:srgbClr val="000000"/>
                           </a:solidFill>
@@ -2327,7 +2916,7 @@
                         </a:rPr>
                         <a:t>0</a:t>
                       </a:r>
-                      <a:endParaRPr lang="en-US" sz="1300" dirty="0">
+                      <a:endParaRPr lang="en-US" sz="850" dirty="0">
                         <a:latin typeface="Calibri" charset="0"/>
                         <a:ea typeface="Calibri" charset="0"/>
                         <a:cs typeface="Calibri" charset="0"/>
@@ -2335,7 +2924,7 @@
                     </a:p>
                   </a:txBody>
                   <a:tcPr marL="91440" marR="91440" marT="45720" marB="45720" anchor="ctr">
-                    <a:lnL w="9525" cap="flat" cmpd="sng" algn="ctr">
+                    <a:lnL w="6350" cap="flat" cmpd="sng" algn="ctr">
                       <a:solidFill>
                         <a:srgbClr val="E5E7EB"/>
                       </a:solidFill>
@@ -2344,7 +2933,7 @@
                       <a:headEnd type="none" w="med" len="med"/>
                       <a:tailEnd type="none" w="med" len="med"/>
                     </a:lnL>
-                    <a:lnR w="9525" cap="flat" cmpd="sng" algn="ctr">
+                    <a:lnR w="6350" cap="flat" cmpd="sng" algn="ctr">
                       <a:solidFill>
                         <a:srgbClr val="E5E7EB"/>
                       </a:solidFill>
@@ -2353,7 +2942,7 @@
                       <a:headEnd type="none" w="med" len="med"/>
                       <a:tailEnd type="none" w="med" len="med"/>
                     </a:lnR>
-                    <a:lnT w="9525" cap="flat" cmpd="sng" algn="ctr">
+                    <a:lnT w="6350" cap="flat" cmpd="sng" algn="ctr">
                       <a:solidFill>
                         <a:srgbClr val="E5E7EB"/>
                       </a:solidFill>
@@ -2362,7 +2951,7 @@
                       <a:headEnd type="none" w="med" len="med"/>
                       <a:tailEnd type="none" w="med" len="med"/>
                     </a:lnT>
-                    <a:lnB w="9525" cap="flat" cmpd="sng" algn="ctr">
+                    <a:lnB w="6350" cap="flat" cmpd="sng" algn="ctr">
                       <a:solidFill>
                         <a:srgbClr val="E5E7EB"/>
                       </a:solidFill>
@@ -2382,7 +2971,7 @@
                         <a:buNone/>
                       </a:pPr>
                       <a:r>
-                        <a:rPr lang="en-US" sz="1300" dirty="0">
+                        <a:rPr lang="en-US" sz="850" dirty="0">
                           <a:solidFill>
                             <a:srgbClr val="000000"/>
                           </a:solidFill>
@@ -2392,7 +2981,7 @@
                         </a:rPr>
                         <a:t>11</a:t>
                       </a:r>
-                      <a:endParaRPr lang="en-US" sz="1300" dirty="0">
+                      <a:endParaRPr lang="en-US" sz="850" dirty="0">
                         <a:latin typeface="Calibri" charset="0"/>
                         <a:ea typeface="Calibri" charset="0"/>
                         <a:cs typeface="Calibri" charset="0"/>
@@ -2400,7 +2989,7 @@
                     </a:p>
                   </a:txBody>
                   <a:tcPr marL="91440" marR="91440" marT="45720" marB="45720" anchor="ctr">
-                    <a:lnL w="9525" cap="flat" cmpd="sng" algn="ctr">
+                    <a:lnL w="6350" cap="flat" cmpd="sng" algn="ctr">
                       <a:solidFill>
                         <a:srgbClr val="E5E7EB"/>
                       </a:solidFill>
@@ -2409,7 +2998,7 @@
                       <a:headEnd type="none" w="med" len="med"/>
                       <a:tailEnd type="none" w="med" len="med"/>
                     </a:lnL>
-                    <a:lnR w="9525" cap="flat" cmpd="sng" algn="ctr">
+                    <a:lnR w="6350" cap="flat" cmpd="sng" algn="ctr">
                       <a:solidFill>
                         <a:srgbClr val="E5E7EB"/>
                       </a:solidFill>
@@ -2418,7 +3007,7 @@
                       <a:headEnd type="none" w="med" len="med"/>
                       <a:tailEnd type="none" w="med" len="med"/>
                     </a:lnR>
-                    <a:lnT w="9525" cap="flat" cmpd="sng" algn="ctr">
+                    <a:lnT w="6350" cap="flat" cmpd="sng" algn="ctr">
                       <a:solidFill>
                         <a:srgbClr val="E5E7EB"/>
                       </a:solidFill>
@@ -2427,7 +3016,7 @@
                       <a:headEnd type="none" w="med" len="med"/>
                       <a:tailEnd type="none" w="med" len="med"/>
                     </a:lnT>
-                    <a:lnB w="9525" cap="flat" cmpd="sng" algn="ctr">
+                    <a:lnB w="6350" cap="flat" cmpd="sng" algn="ctr">
                       <a:solidFill>
                         <a:srgbClr val="E5E7EB"/>
                       </a:solidFill>
@@ -2447,7 +3036,7 @@
                         <a:buNone/>
                       </a:pPr>
                       <a:r>
-                        <a:rPr lang="en-US" sz="1300" b="1" dirty="0">
+                        <a:rPr lang="en-US" sz="850" b="1" dirty="0">
                           <a:solidFill>
                             <a:srgbClr val="000000"/>
                           </a:solidFill>
@@ -2457,7 +3046,7 @@
                         </a:rPr>
                         <a:t>11</a:t>
                       </a:r>
-                      <a:endParaRPr lang="en-US" sz="1300" dirty="0">
+                      <a:endParaRPr lang="en-US" sz="850" dirty="0">
                         <a:latin typeface="Calibri" charset="0"/>
                         <a:ea typeface="Calibri" charset="0"/>
                         <a:cs typeface="Calibri" charset="0"/>
@@ -2465,7 +3054,7 @@
                     </a:p>
                   </a:txBody>
                   <a:tcPr marL="91440" marR="91440" marT="45720" marB="45720" anchor="ctr">
-                    <a:lnL w="9525" cap="flat" cmpd="sng" algn="ctr">
+                    <a:lnL w="6350" cap="flat" cmpd="sng" algn="ctr">
                       <a:solidFill>
                         <a:srgbClr val="E5E7EB"/>
                       </a:solidFill>
@@ -2474,7 +3063,7 @@
                       <a:headEnd type="none" w="med" len="med"/>
                       <a:tailEnd type="none" w="med" len="med"/>
                     </a:lnL>
-                    <a:lnR w="9525" cap="flat" cmpd="sng" algn="ctr">
+                    <a:lnR w="6350" cap="flat" cmpd="sng" algn="ctr">
                       <a:solidFill>
                         <a:srgbClr val="E5E7EB"/>
                       </a:solidFill>
@@ -2483,7 +3072,7 @@
                       <a:headEnd type="none" w="med" len="med"/>
                       <a:tailEnd type="none" w="med" len="med"/>
                     </a:lnR>
-                    <a:lnT w="9525" cap="flat" cmpd="sng" algn="ctr">
+                    <a:lnT w="6350" cap="flat" cmpd="sng" algn="ctr">
                       <a:solidFill>
                         <a:srgbClr val="E5E7EB"/>
                       </a:solidFill>
@@ -2492,7 +3081,7 @@
                       <a:headEnd type="none" w="med" len="med"/>
                       <a:tailEnd type="none" w="med" len="med"/>
                     </a:lnT>
-                    <a:lnB w="9525" cap="flat" cmpd="sng" algn="ctr">
+                    <a:lnB w="6350" cap="flat" cmpd="sng" algn="ctr">
                       <a:solidFill>
                         <a:srgbClr val="E5E7EB"/>
                       </a:solidFill>
@@ -2512,7 +3101,7 @@
                         <a:buNone/>
                       </a:pPr>
                       <a:r>
-                        <a:rPr lang="en-US" sz="1300" b="1" dirty="0">
+                        <a:rPr lang="en-US" sz="850" b="1" dirty="0">
                           <a:solidFill>
                             <a:srgbClr val="DC2626"/>
                           </a:solidFill>
@@ -2522,7 +3111,7 @@
                         </a:rPr>
                         <a:t>84.6%</a:t>
                       </a:r>
-                      <a:endParaRPr lang="en-US" sz="1300" dirty="0">
+                      <a:endParaRPr lang="en-US" sz="850" dirty="0">
                         <a:latin typeface="Calibri" charset="0"/>
                         <a:ea typeface="Calibri" charset="0"/>
                         <a:cs typeface="Calibri" charset="0"/>
@@ -2530,7 +3119,7 @@
                     </a:p>
                   </a:txBody>
                   <a:tcPr marL="91440" marR="91440" marT="45720" marB="45720" anchor="ctr">
-                    <a:lnL w="9525" cap="flat" cmpd="sng" algn="ctr">
+                    <a:lnL w="6350" cap="flat" cmpd="sng" algn="ctr">
                       <a:solidFill>
                         <a:srgbClr val="E5E7EB"/>
                       </a:solidFill>
@@ -2539,7 +3128,7 @@
                       <a:headEnd type="none" w="med" len="med"/>
                       <a:tailEnd type="none" w="med" len="med"/>
                     </a:lnL>
-                    <a:lnR w="9525" cap="flat" cmpd="sng" algn="ctr">
+                    <a:lnR w="6350" cap="flat" cmpd="sng" algn="ctr">
                       <a:solidFill>
                         <a:srgbClr val="E5E7EB"/>
                       </a:solidFill>
@@ -2548,7 +3137,7 @@
                       <a:headEnd type="none" w="med" len="med"/>
                       <a:tailEnd type="none" w="med" len="med"/>
                     </a:lnR>
-                    <a:lnT w="9525" cap="flat" cmpd="sng" algn="ctr">
+                    <a:lnT w="6350" cap="flat" cmpd="sng" algn="ctr">
                       <a:solidFill>
                         <a:srgbClr val="E5E7EB"/>
                       </a:solidFill>
@@ -2557,7 +3146,7 @@
                       <a:headEnd type="none" w="med" len="med"/>
                       <a:tailEnd type="none" w="med" len="med"/>
                     </a:lnT>
-                    <a:lnB w="9525" cap="flat" cmpd="sng" algn="ctr">
+                    <a:lnB w="6350" cap="flat" cmpd="sng" algn="ctr">
                       <a:solidFill>
                         <a:srgbClr val="E5E7EB"/>
                       </a:solidFill>
@@ -2569,7 +3158,7 @@
                   </a:tcPr>
                 </a:tc>
               </a:tr>
-              <a:tr h="502920">
+              <a:tr h="228600">
                 <a:tc>
                   <a:txBody>
                     <a:bodyPr/>
@@ -2579,7 +3168,7 @@
                         <a:buNone/>
                       </a:pPr>
                       <a:r>
-                        <a:rPr lang="en-US" sz="1300" b="1" dirty="0">
+                        <a:rPr lang="en-US" sz="850" b="1" dirty="0">
                           <a:solidFill>
                             <a:srgbClr val="000000"/>
                           </a:solidFill>
@@ -2587,9 +3176,9 @@
                           <a:ea typeface="Calibri" pitchFamily="34" charset="-122"/>
                           <a:cs typeface="Calibri" pitchFamily="34" charset="-120"/>
                         </a:rPr>
-                        <a:t>08/19</a:t>
+                        <a:t>8/19</a:t>
                       </a:r>
-                      <a:endParaRPr lang="en-US" sz="1300" dirty="0">
+                      <a:endParaRPr lang="en-US" sz="850" dirty="0">
                         <a:latin typeface="Calibri" charset="0"/>
                         <a:ea typeface="Calibri" charset="0"/>
                         <a:cs typeface="Calibri" charset="0"/>
@@ -2597,7 +3186,7 @@
                     </a:p>
                   </a:txBody>
                   <a:tcPr marL="91440" marR="91440" marT="45720" marB="45720" anchor="ctr">
-                    <a:lnL w="9525" cap="flat" cmpd="sng" algn="ctr">
+                    <a:lnL w="6350" cap="flat" cmpd="sng" algn="ctr">
                       <a:solidFill>
                         <a:srgbClr val="E5E7EB"/>
                       </a:solidFill>
@@ -2606,7 +3195,7 @@
                       <a:headEnd type="none" w="med" len="med"/>
                       <a:tailEnd type="none" w="med" len="med"/>
                     </a:lnL>
-                    <a:lnR w="9525" cap="flat" cmpd="sng" algn="ctr">
+                    <a:lnR w="6350" cap="flat" cmpd="sng" algn="ctr">
                       <a:solidFill>
                         <a:srgbClr val="E5E7EB"/>
                       </a:solidFill>
@@ -2615,7 +3204,7 @@
                       <a:headEnd type="none" w="med" len="med"/>
                       <a:tailEnd type="none" w="med" len="med"/>
                     </a:lnR>
-                    <a:lnT w="9525" cap="flat" cmpd="sng" algn="ctr">
+                    <a:lnT w="6350" cap="flat" cmpd="sng" algn="ctr">
                       <a:solidFill>
                         <a:srgbClr val="E5E7EB"/>
                       </a:solidFill>
@@ -2624,7 +3213,7 @@
                       <a:headEnd type="none" w="med" len="med"/>
                       <a:tailEnd type="none" w="med" len="med"/>
                     </a:lnT>
-                    <a:lnB w="9525" cap="flat" cmpd="sng" algn="ctr">
+                    <a:lnB w="6350" cap="flat" cmpd="sng" algn="ctr">
                       <a:solidFill>
                         <a:srgbClr val="E5E7EB"/>
                       </a:solidFill>
@@ -2644,7 +3233,7 @@
                         <a:buNone/>
                       </a:pPr>
                       <a:r>
-                        <a:rPr lang="en-US" sz="1300" dirty="0">
+                        <a:rPr lang="en-US" sz="850" dirty="0">
                           <a:solidFill>
                             <a:srgbClr val="000000"/>
                           </a:solidFill>
@@ -2654,7 +3243,7 @@
                         </a:rPr>
                         <a:t>29</a:t>
                       </a:r>
-                      <a:endParaRPr lang="en-US" sz="1300" dirty="0">
+                      <a:endParaRPr lang="en-US" sz="850" dirty="0">
                         <a:latin typeface="Calibri" charset="0"/>
                         <a:ea typeface="Calibri" charset="0"/>
                         <a:cs typeface="Calibri" charset="0"/>
@@ -2662,7 +3251,7 @@
                     </a:p>
                   </a:txBody>
                   <a:tcPr marL="91440" marR="91440" marT="45720" marB="45720" anchor="ctr">
-                    <a:lnL w="9525" cap="flat" cmpd="sng" algn="ctr">
+                    <a:lnL w="6350" cap="flat" cmpd="sng" algn="ctr">
                       <a:solidFill>
                         <a:srgbClr val="E5E7EB"/>
                       </a:solidFill>
@@ -2671,7 +3260,7 @@
                       <a:headEnd type="none" w="med" len="med"/>
                       <a:tailEnd type="none" w="med" len="med"/>
                     </a:lnL>
-                    <a:lnR w="9525" cap="flat" cmpd="sng" algn="ctr">
+                    <a:lnR w="6350" cap="flat" cmpd="sng" algn="ctr">
                       <a:solidFill>
                         <a:srgbClr val="E5E7EB"/>
                       </a:solidFill>
@@ -2680,7 +3269,7 @@
                       <a:headEnd type="none" w="med" len="med"/>
                       <a:tailEnd type="none" w="med" len="med"/>
                     </a:lnR>
-                    <a:lnT w="9525" cap="flat" cmpd="sng" algn="ctr">
+                    <a:lnT w="6350" cap="flat" cmpd="sng" algn="ctr">
                       <a:solidFill>
                         <a:srgbClr val="E5E7EB"/>
                       </a:solidFill>
@@ -2689,7 +3278,7 @@
                       <a:headEnd type="none" w="med" len="med"/>
                       <a:tailEnd type="none" w="med" len="med"/>
                     </a:lnT>
-                    <a:lnB w="9525" cap="flat" cmpd="sng" algn="ctr">
+                    <a:lnB w="6350" cap="flat" cmpd="sng" algn="ctr">
                       <a:solidFill>
                         <a:srgbClr val="E5E7EB"/>
                       </a:solidFill>
@@ -2709,7 +3298,7 @@
                         <a:buNone/>
                       </a:pPr>
                       <a:r>
-                        <a:rPr lang="en-US" sz="1300" dirty="0">
+                        <a:rPr lang="en-US" sz="850" dirty="0">
                           <a:solidFill>
                             <a:srgbClr val="000000"/>
                           </a:solidFill>
@@ -2719,7 +3308,7 @@
                         </a:rPr>
                         <a:t>0</a:t>
                       </a:r>
-                      <a:endParaRPr lang="en-US" sz="1300" dirty="0">
+                      <a:endParaRPr lang="en-US" sz="850" dirty="0">
                         <a:latin typeface="Calibri" charset="0"/>
                         <a:ea typeface="Calibri" charset="0"/>
                         <a:cs typeface="Calibri" charset="0"/>
@@ -2727,7 +3316,7 @@
                     </a:p>
                   </a:txBody>
                   <a:tcPr marL="91440" marR="91440" marT="45720" marB="45720" anchor="ctr">
-                    <a:lnL w="9525" cap="flat" cmpd="sng" algn="ctr">
+                    <a:lnL w="6350" cap="flat" cmpd="sng" algn="ctr">
                       <a:solidFill>
                         <a:srgbClr val="E5E7EB"/>
                       </a:solidFill>
@@ -2736,7 +3325,7 @@
                       <a:headEnd type="none" w="med" len="med"/>
                       <a:tailEnd type="none" w="med" len="med"/>
                     </a:lnL>
-                    <a:lnR w="9525" cap="flat" cmpd="sng" algn="ctr">
+                    <a:lnR w="6350" cap="flat" cmpd="sng" algn="ctr">
                       <a:solidFill>
                         <a:srgbClr val="E5E7EB"/>
                       </a:solidFill>
@@ -2745,7 +3334,7 @@
                       <a:headEnd type="none" w="med" len="med"/>
                       <a:tailEnd type="none" w="med" len="med"/>
                     </a:lnR>
-                    <a:lnT w="9525" cap="flat" cmpd="sng" algn="ctr">
+                    <a:lnT w="6350" cap="flat" cmpd="sng" algn="ctr">
                       <a:solidFill>
                         <a:srgbClr val="E5E7EB"/>
                       </a:solidFill>
@@ -2754,7 +3343,7 @@
                       <a:headEnd type="none" w="med" len="med"/>
                       <a:tailEnd type="none" w="med" len="med"/>
                     </a:lnT>
-                    <a:lnB w="9525" cap="flat" cmpd="sng" algn="ctr">
+                    <a:lnB w="6350" cap="flat" cmpd="sng" algn="ctr">
                       <a:solidFill>
                         <a:srgbClr val="E5E7EB"/>
                       </a:solidFill>
@@ -2774,7 +3363,7 @@
                         <a:buNone/>
                       </a:pPr>
                       <a:r>
-                        <a:rPr lang="en-US" sz="1300" dirty="0">
+                        <a:rPr lang="en-US" sz="850" dirty="0">
                           <a:solidFill>
                             <a:srgbClr val="000000"/>
                           </a:solidFill>
@@ -2784,7 +3373,7 @@
                         </a:rPr>
                         <a:t>23</a:t>
                       </a:r>
-                      <a:endParaRPr lang="en-US" sz="1300" dirty="0">
+                      <a:endParaRPr lang="en-US" sz="850" dirty="0">
                         <a:latin typeface="Calibri" charset="0"/>
                         <a:ea typeface="Calibri" charset="0"/>
                         <a:cs typeface="Calibri" charset="0"/>
@@ -2792,7 +3381,7 @@
                     </a:p>
                   </a:txBody>
                   <a:tcPr marL="91440" marR="91440" marT="45720" marB="45720" anchor="ctr">
-                    <a:lnL w="9525" cap="flat" cmpd="sng" algn="ctr">
+                    <a:lnL w="6350" cap="flat" cmpd="sng" algn="ctr">
                       <a:solidFill>
                         <a:srgbClr val="E5E7EB"/>
                       </a:solidFill>
@@ -2801,7 +3390,7 @@
                       <a:headEnd type="none" w="med" len="med"/>
                       <a:tailEnd type="none" w="med" len="med"/>
                     </a:lnL>
-                    <a:lnR w="9525" cap="flat" cmpd="sng" algn="ctr">
+                    <a:lnR w="6350" cap="flat" cmpd="sng" algn="ctr">
                       <a:solidFill>
                         <a:srgbClr val="E5E7EB"/>
                       </a:solidFill>
@@ -2810,7 +3399,7 @@
                       <a:headEnd type="none" w="med" len="med"/>
                       <a:tailEnd type="none" w="med" len="med"/>
                     </a:lnR>
-                    <a:lnT w="9525" cap="flat" cmpd="sng" algn="ctr">
+                    <a:lnT w="6350" cap="flat" cmpd="sng" algn="ctr">
                       <a:solidFill>
                         <a:srgbClr val="E5E7EB"/>
                       </a:solidFill>
@@ -2819,7 +3408,7 @@
                       <a:headEnd type="none" w="med" len="med"/>
                       <a:tailEnd type="none" w="med" len="med"/>
                     </a:lnT>
-                    <a:lnB w="9525" cap="flat" cmpd="sng" algn="ctr">
+                    <a:lnB w="6350" cap="flat" cmpd="sng" algn="ctr">
                       <a:solidFill>
                         <a:srgbClr val="E5E7EB"/>
                       </a:solidFill>
@@ -2839,7 +3428,7 @@
                         <a:buNone/>
                       </a:pPr>
                       <a:r>
-                        <a:rPr lang="en-US" sz="1300" b="1" dirty="0">
+                        <a:rPr lang="en-US" sz="850" b="1" dirty="0">
                           <a:solidFill>
                             <a:srgbClr val="000000"/>
                           </a:solidFill>
@@ -2849,7 +3438,7 @@
                         </a:rPr>
                         <a:t>23</a:t>
                       </a:r>
-                      <a:endParaRPr lang="en-US" sz="1300" dirty="0">
+                      <a:endParaRPr lang="en-US" sz="850" dirty="0">
                         <a:latin typeface="Calibri" charset="0"/>
                         <a:ea typeface="Calibri" charset="0"/>
                         <a:cs typeface="Calibri" charset="0"/>
@@ -2857,7 +3446,7 @@
                     </a:p>
                   </a:txBody>
                   <a:tcPr marL="91440" marR="91440" marT="45720" marB="45720" anchor="ctr">
-                    <a:lnL w="9525" cap="flat" cmpd="sng" algn="ctr">
+                    <a:lnL w="6350" cap="flat" cmpd="sng" algn="ctr">
                       <a:solidFill>
                         <a:srgbClr val="E5E7EB"/>
                       </a:solidFill>
@@ -2866,7 +3455,7 @@
                       <a:headEnd type="none" w="med" len="med"/>
                       <a:tailEnd type="none" w="med" len="med"/>
                     </a:lnL>
-                    <a:lnR w="9525" cap="flat" cmpd="sng" algn="ctr">
+                    <a:lnR w="6350" cap="flat" cmpd="sng" algn="ctr">
                       <a:solidFill>
                         <a:srgbClr val="E5E7EB"/>
                       </a:solidFill>
@@ -2875,7 +3464,7 @@
                       <a:headEnd type="none" w="med" len="med"/>
                       <a:tailEnd type="none" w="med" len="med"/>
                     </a:lnR>
-                    <a:lnT w="9525" cap="flat" cmpd="sng" algn="ctr">
+                    <a:lnT w="6350" cap="flat" cmpd="sng" algn="ctr">
                       <a:solidFill>
                         <a:srgbClr val="E5E7EB"/>
                       </a:solidFill>
@@ -2884,7 +3473,7 @@
                       <a:headEnd type="none" w="med" len="med"/>
                       <a:tailEnd type="none" w="med" len="med"/>
                     </a:lnT>
-                    <a:lnB w="9525" cap="flat" cmpd="sng" algn="ctr">
+                    <a:lnB w="6350" cap="flat" cmpd="sng" algn="ctr">
                       <a:solidFill>
                         <a:srgbClr val="E5E7EB"/>
                       </a:solidFill>
@@ -2904,7 +3493,7 @@
                         <a:buNone/>
                       </a:pPr>
                       <a:r>
-                        <a:rPr lang="en-US" sz="1300" b="1" dirty="0">
+                        <a:rPr lang="en-US" sz="850" b="1" dirty="0">
                           <a:solidFill>
                             <a:srgbClr val="B45309"/>
                           </a:solidFill>
@@ -2914,7 +3503,7 @@
                         </a:rPr>
                         <a:t>79.3%</a:t>
                       </a:r>
-                      <a:endParaRPr lang="en-US" sz="1300" dirty="0">
+                      <a:endParaRPr lang="en-US" sz="850" dirty="0">
                         <a:latin typeface="Calibri" charset="0"/>
                         <a:ea typeface="Calibri" charset="0"/>
                         <a:cs typeface="Calibri" charset="0"/>
@@ -2922,7 +3511,7 @@
                     </a:p>
                   </a:txBody>
                   <a:tcPr marL="91440" marR="91440" marT="45720" marB="45720" anchor="ctr">
-                    <a:lnL w="9525" cap="flat" cmpd="sng" algn="ctr">
+                    <a:lnL w="6350" cap="flat" cmpd="sng" algn="ctr">
                       <a:solidFill>
                         <a:srgbClr val="E5E7EB"/>
                       </a:solidFill>
@@ -2931,7 +3520,7 @@
                       <a:headEnd type="none" w="med" len="med"/>
                       <a:tailEnd type="none" w="med" len="med"/>
                     </a:lnL>
-                    <a:lnR w="9525" cap="flat" cmpd="sng" algn="ctr">
+                    <a:lnR w="6350" cap="flat" cmpd="sng" algn="ctr">
                       <a:solidFill>
                         <a:srgbClr val="E5E7EB"/>
                       </a:solidFill>
@@ -2940,7 +3529,7 @@
                       <a:headEnd type="none" w="med" len="med"/>
                       <a:tailEnd type="none" w="med" len="med"/>
                     </a:lnR>
-                    <a:lnT w="9525" cap="flat" cmpd="sng" algn="ctr">
+                    <a:lnT w="6350" cap="flat" cmpd="sng" algn="ctr">
                       <a:solidFill>
                         <a:srgbClr val="E5E7EB"/>
                       </a:solidFill>
@@ -2949,7 +3538,7 @@
                       <a:headEnd type="none" w="med" len="med"/>
                       <a:tailEnd type="none" w="med" len="med"/>
                     </a:lnT>
-                    <a:lnB w="9525" cap="flat" cmpd="sng" algn="ctr">
+                    <a:lnB w="6350" cap="flat" cmpd="sng" algn="ctr">
                       <a:solidFill>
                         <a:srgbClr val="E5E7EB"/>
                       </a:solidFill>
@@ -2961,7 +3550,7 @@
                   </a:tcPr>
                 </a:tc>
               </a:tr>
-              <a:tr h="502920">
+              <a:tr h="228600">
                 <a:tc>
                   <a:txBody>
                     <a:bodyPr/>
@@ -2971,7 +3560,7 @@
                         <a:buNone/>
                       </a:pPr>
                       <a:r>
-                        <a:rPr lang="en-US" sz="1300" b="1" dirty="0">
+                        <a:rPr lang="en-US" sz="850" b="1" dirty="0">
                           <a:solidFill>
                             <a:srgbClr val="000000"/>
                           </a:solidFill>
@@ -2979,9 +3568,9 @@
                           <a:ea typeface="Calibri" pitchFamily="34" charset="-122"/>
                           <a:cs typeface="Calibri" pitchFamily="34" charset="-120"/>
                         </a:rPr>
-                        <a:t>08/26</a:t>
+                        <a:t>8/26</a:t>
                       </a:r>
-                      <a:endParaRPr lang="en-US" sz="1300" dirty="0">
+                      <a:endParaRPr lang="en-US" sz="850" dirty="0">
                         <a:latin typeface="Calibri" charset="0"/>
                         <a:ea typeface="Calibri" charset="0"/>
                         <a:cs typeface="Calibri" charset="0"/>
@@ -2989,7 +3578,7 @@
                     </a:p>
                   </a:txBody>
                   <a:tcPr marL="91440" marR="91440" marT="45720" marB="45720" anchor="ctr">
-                    <a:lnL w="9525" cap="flat" cmpd="sng" algn="ctr">
+                    <a:lnL w="6350" cap="flat" cmpd="sng" algn="ctr">
                       <a:solidFill>
                         <a:srgbClr val="E5E7EB"/>
                       </a:solidFill>
@@ -2998,7 +3587,7 @@
                       <a:headEnd type="none" w="med" len="med"/>
                       <a:tailEnd type="none" w="med" len="med"/>
                     </a:lnL>
-                    <a:lnR w="9525" cap="flat" cmpd="sng" algn="ctr">
+                    <a:lnR w="6350" cap="flat" cmpd="sng" algn="ctr">
                       <a:solidFill>
                         <a:srgbClr val="E5E7EB"/>
                       </a:solidFill>
@@ -3007,7 +3596,7 @@
                       <a:headEnd type="none" w="med" len="med"/>
                       <a:tailEnd type="none" w="med" len="med"/>
                     </a:lnR>
-                    <a:lnT w="9525" cap="flat" cmpd="sng" algn="ctr">
+                    <a:lnT w="6350" cap="flat" cmpd="sng" algn="ctr">
                       <a:solidFill>
                         <a:srgbClr val="E5E7EB"/>
                       </a:solidFill>
@@ -3016,7 +3605,7 @@
                       <a:headEnd type="none" w="med" len="med"/>
                       <a:tailEnd type="none" w="med" len="med"/>
                     </a:lnT>
-                    <a:lnB w="9525" cap="flat" cmpd="sng" algn="ctr">
+                    <a:lnB w="6350" cap="flat" cmpd="sng" algn="ctr">
                       <a:solidFill>
                         <a:srgbClr val="E5E7EB"/>
                       </a:solidFill>
@@ -3036,7 +3625,7 @@
                         <a:buNone/>
                       </a:pPr>
                       <a:r>
-                        <a:rPr lang="en-US" sz="1300" dirty="0">
+                        <a:rPr lang="en-US" sz="850" dirty="0">
                           <a:solidFill>
                             <a:srgbClr val="000000"/>
                           </a:solidFill>
@@ -3046,7 +3635,7 @@
                         </a:rPr>
                         <a:t>18</a:t>
                       </a:r>
-                      <a:endParaRPr lang="en-US" sz="1300" dirty="0">
+                      <a:endParaRPr lang="en-US" sz="850" dirty="0">
                         <a:latin typeface="Calibri" charset="0"/>
                         <a:ea typeface="Calibri" charset="0"/>
                         <a:cs typeface="Calibri" charset="0"/>
@@ -3054,7 +3643,7 @@
                     </a:p>
                   </a:txBody>
                   <a:tcPr marL="91440" marR="91440" marT="45720" marB="45720" anchor="ctr">
-                    <a:lnL w="9525" cap="flat" cmpd="sng" algn="ctr">
+                    <a:lnL w="6350" cap="flat" cmpd="sng" algn="ctr">
                       <a:solidFill>
                         <a:srgbClr val="E5E7EB"/>
                       </a:solidFill>
@@ -3063,7 +3652,7 @@
                       <a:headEnd type="none" w="med" len="med"/>
                       <a:tailEnd type="none" w="med" len="med"/>
                     </a:lnL>
-                    <a:lnR w="9525" cap="flat" cmpd="sng" algn="ctr">
+                    <a:lnR w="6350" cap="flat" cmpd="sng" algn="ctr">
                       <a:solidFill>
                         <a:srgbClr val="E5E7EB"/>
                       </a:solidFill>
@@ -3072,7 +3661,7 @@
                       <a:headEnd type="none" w="med" len="med"/>
                       <a:tailEnd type="none" w="med" len="med"/>
                     </a:lnR>
-                    <a:lnT w="9525" cap="flat" cmpd="sng" algn="ctr">
+                    <a:lnT w="6350" cap="flat" cmpd="sng" algn="ctr">
                       <a:solidFill>
                         <a:srgbClr val="E5E7EB"/>
                       </a:solidFill>
@@ -3081,7 +3670,7 @@
                       <a:headEnd type="none" w="med" len="med"/>
                       <a:tailEnd type="none" w="med" len="med"/>
                     </a:lnT>
-                    <a:lnB w="9525" cap="flat" cmpd="sng" algn="ctr">
+                    <a:lnB w="6350" cap="flat" cmpd="sng" algn="ctr">
                       <a:solidFill>
                         <a:srgbClr val="E5E7EB"/>
                       </a:solidFill>
@@ -3101,7 +3690,7 @@
                         <a:buNone/>
                       </a:pPr>
                       <a:r>
-                        <a:rPr lang="en-US" sz="1300" dirty="0">
+                        <a:rPr lang="en-US" sz="850" dirty="0">
                           <a:solidFill>
                             <a:srgbClr val="000000"/>
                           </a:solidFill>
@@ -3111,7 +3700,7 @@
                         </a:rPr>
                         <a:t>9</a:t>
                       </a:r>
-                      <a:endParaRPr lang="en-US" sz="1300" dirty="0">
+                      <a:endParaRPr lang="en-US" sz="850" dirty="0">
                         <a:latin typeface="Calibri" charset="0"/>
                         <a:ea typeface="Calibri" charset="0"/>
                         <a:cs typeface="Calibri" charset="0"/>
@@ -3119,7 +3708,7 @@
                     </a:p>
                   </a:txBody>
                   <a:tcPr marL="91440" marR="91440" marT="45720" marB="45720" anchor="ctr">
-                    <a:lnL w="9525" cap="flat" cmpd="sng" algn="ctr">
+                    <a:lnL w="6350" cap="flat" cmpd="sng" algn="ctr">
                       <a:solidFill>
                         <a:srgbClr val="E5E7EB"/>
                       </a:solidFill>
@@ -3128,7 +3717,7 @@
                       <a:headEnd type="none" w="med" len="med"/>
                       <a:tailEnd type="none" w="med" len="med"/>
                     </a:lnL>
-                    <a:lnR w="9525" cap="flat" cmpd="sng" algn="ctr">
+                    <a:lnR w="6350" cap="flat" cmpd="sng" algn="ctr">
                       <a:solidFill>
                         <a:srgbClr val="E5E7EB"/>
                       </a:solidFill>
@@ -3137,7 +3726,7 @@
                       <a:headEnd type="none" w="med" len="med"/>
                       <a:tailEnd type="none" w="med" len="med"/>
                     </a:lnR>
-                    <a:lnT w="9525" cap="flat" cmpd="sng" algn="ctr">
+                    <a:lnT w="6350" cap="flat" cmpd="sng" algn="ctr">
                       <a:solidFill>
                         <a:srgbClr val="E5E7EB"/>
                       </a:solidFill>
@@ -3146,7 +3735,7 @@
                       <a:headEnd type="none" w="med" len="med"/>
                       <a:tailEnd type="none" w="med" len="med"/>
                     </a:lnT>
-                    <a:lnB w="9525" cap="flat" cmpd="sng" algn="ctr">
+                    <a:lnB w="6350" cap="flat" cmpd="sng" algn="ctr">
                       <a:solidFill>
                         <a:srgbClr val="E5E7EB"/>
                       </a:solidFill>
@@ -3166,7 +3755,7 @@
                         <a:buNone/>
                       </a:pPr>
                       <a:r>
-                        <a:rPr lang="en-US" sz="1300" dirty="0">
+                        <a:rPr lang="en-US" sz="850" dirty="0">
                           <a:solidFill>
                             <a:srgbClr val="000000"/>
                           </a:solidFill>
@@ -3176,7 +3765,7 @@
                         </a:rPr>
                         <a:t>1</a:t>
                       </a:r>
-                      <a:endParaRPr lang="en-US" sz="1300" dirty="0">
+                      <a:endParaRPr lang="en-US" sz="850" dirty="0">
                         <a:latin typeface="Calibri" charset="0"/>
                         <a:ea typeface="Calibri" charset="0"/>
                         <a:cs typeface="Calibri" charset="0"/>
@@ -3184,7 +3773,7 @@
                     </a:p>
                   </a:txBody>
                   <a:tcPr marL="91440" marR="91440" marT="45720" marB="45720" anchor="ctr">
-                    <a:lnL w="9525" cap="flat" cmpd="sng" algn="ctr">
+                    <a:lnL w="6350" cap="flat" cmpd="sng" algn="ctr">
                       <a:solidFill>
                         <a:srgbClr val="E5E7EB"/>
                       </a:solidFill>
@@ -3193,7 +3782,7 @@
                       <a:headEnd type="none" w="med" len="med"/>
                       <a:tailEnd type="none" w="med" len="med"/>
                     </a:lnL>
-                    <a:lnR w="9525" cap="flat" cmpd="sng" algn="ctr">
+                    <a:lnR w="6350" cap="flat" cmpd="sng" algn="ctr">
                       <a:solidFill>
                         <a:srgbClr val="E5E7EB"/>
                       </a:solidFill>
@@ -3202,7 +3791,7 @@
                       <a:headEnd type="none" w="med" len="med"/>
                       <a:tailEnd type="none" w="med" len="med"/>
                     </a:lnR>
-                    <a:lnT w="9525" cap="flat" cmpd="sng" algn="ctr">
+                    <a:lnT w="6350" cap="flat" cmpd="sng" algn="ctr">
                       <a:solidFill>
                         <a:srgbClr val="E5E7EB"/>
                       </a:solidFill>
@@ -3211,7 +3800,7 @@
                       <a:headEnd type="none" w="med" len="med"/>
                       <a:tailEnd type="none" w="med" len="med"/>
                     </a:lnT>
-                    <a:lnB w="9525" cap="flat" cmpd="sng" algn="ctr">
+                    <a:lnB w="6350" cap="flat" cmpd="sng" algn="ctr">
                       <a:solidFill>
                         <a:srgbClr val="E5E7EB"/>
                       </a:solidFill>
@@ -3231,7 +3820,7 @@
                         <a:buNone/>
                       </a:pPr>
                       <a:r>
-                        <a:rPr lang="en-US" sz="1300" b="1" dirty="0">
+                        <a:rPr lang="en-US" sz="850" b="1" dirty="0">
                           <a:solidFill>
                             <a:srgbClr val="000000"/>
                           </a:solidFill>
@@ -3241,7 +3830,7 @@
                         </a:rPr>
                         <a:t>10</a:t>
                       </a:r>
-                      <a:endParaRPr lang="en-US" sz="1300" dirty="0">
+                      <a:endParaRPr lang="en-US" sz="850" dirty="0">
                         <a:latin typeface="Calibri" charset="0"/>
                         <a:ea typeface="Calibri" charset="0"/>
                         <a:cs typeface="Calibri" charset="0"/>
@@ -3249,7 +3838,7 @@
                     </a:p>
                   </a:txBody>
                   <a:tcPr marL="91440" marR="91440" marT="45720" marB="45720" anchor="ctr">
-                    <a:lnL w="9525" cap="flat" cmpd="sng" algn="ctr">
+                    <a:lnL w="6350" cap="flat" cmpd="sng" algn="ctr">
                       <a:solidFill>
                         <a:srgbClr val="E5E7EB"/>
                       </a:solidFill>
@@ -3258,7 +3847,7 @@
                       <a:headEnd type="none" w="med" len="med"/>
                       <a:tailEnd type="none" w="med" len="med"/>
                     </a:lnL>
-                    <a:lnR w="9525" cap="flat" cmpd="sng" algn="ctr">
+                    <a:lnR w="6350" cap="flat" cmpd="sng" algn="ctr">
                       <a:solidFill>
                         <a:srgbClr val="E5E7EB"/>
                       </a:solidFill>
@@ -3267,7 +3856,7 @@
                       <a:headEnd type="none" w="med" len="med"/>
                       <a:tailEnd type="none" w="med" len="med"/>
                     </a:lnR>
-                    <a:lnT w="9525" cap="flat" cmpd="sng" algn="ctr">
+                    <a:lnT w="6350" cap="flat" cmpd="sng" algn="ctr">
                       <a:solidFill>
                         <a:srgbClr val="E5E7EB"/>
                       </a:solidFill>
@@ -3276,7 +3865,7 @@
                       <a:headEnd type="none" w="med" len="med"/>
                       <a:tailEnd type="none" w="med" len="med"/>
                     </a:lnT>
-                    <a:lnB w="9525" cap="flat" cmpd="sng" algn="ctr">
+                    <a:lnB w="6350" cap="flat" cmpd="sng" algn="ctr">
                       <a:solidFill>
                         <a:srgbClr val="E5E7EB"/>
                       </a:solidFill>
@@ -3296,7 +3885,7 @@
                         <a:buNone/>
                       </a:pPr>
                       <a:r>
-                        <a:rPr lang="en-US" sz="1300" b="1" dirty="0">
+                        <a:rPr lang="en-US" sz="850" b="1" dirty="0">
                           <a:solidFill>
                             <a:srgbClr val="15803D"/>
                           </a:solidFill>
@@ -3306,7 +3895,7 @@
                         </a:rPr>
                         <a:t>55.6%</a:t>
                       </a:r>
-                      <a:endParaRPr lang="en-US" sz="1300" dirty="0">
+                      <a:endParaRPr lang="en-US" sz="850" dirty="0">
                         <a:latin typeface="Calibri" charset="0"/>
                         <a:ea typeface="Calibri" charset="0"/>
                         <a:cs typeface="Calibri" charset="0"/>
@@ -3314,7 +3903,7 @@
                     </a:p>
                   </a:txBody>
                   <a:tcPr marL="91440" marR="91440" marT="45720" marB="45720" anchor="ctr">
-                    <a:lnL w="9525" cap="flat" cmpd="sng" algn="ctr">
+                    <a:lnL w="6350" cap="flat" cmpd="sng" algn="ctr">
                       <a:solidFill>
                         <a:srgbClr val="E5E7EB"/>
                       </a:solidFill>
@@ -3323,7 +3912,7 @@
                       <a:headEnd type="none" w="med" len="med"/>
                       <a:tailEnd type="none" w="med" len="med"/>
                     </a:lnL>
-                    <a:lnR w="9525" cap="flat" cmpd="sng" algn="ctr">
+                    <a:lnR w="6350" cap="flat" cmpd="sng" algn="ctr">
                       <a:solidFill>
                         <a:srgbClr val="E5E7EB"/>
                       </a:solidFill>
@@ -3332,7 +3921,7 @@
                       <a:headEnd type="none" w="med" len="med"/>
                       <a:tailEnd type="none" w="med" len="med"/>
                     </a:lnR>
-                    <a:lnT w="9525" cap="flat" cmpd="sng" algn="ctr">
+                    <a:lnT w="6350" cap="flat" cmpd="sng" algn="ctr">
                       <a:solidFill>
                         <a:srgbClr val="E5E7EB"/>
                       </a:solidFill>
@@ -3341,7 +3930,7 @@
                       <a:headEnd type="none" w="med" len="med"/>
                       <a:tailEnd type="none" w="med" len="med"/>
                     </a:lnT>
-                    <a:lnB w="9525" cap="flat" cmpd="sng" algn="ctr">
+                    <a:lnB w="6350" cap="flat" cmpd="sng" algn="ctr">
                       <a:solidFill>
                         <a:srgbClr val="E5E7EB"/>
                       </a:solidFill>
@@ -3353,7 +3942,7 @@
                   </a:tcPr>
                 </a:tc>
               </a:tr>
-              <a:tr h="502920">
+              <a:tr h="228600">
                 <a:tc>
                   <a:txBody>
                     <a:bodyPr/>
@@ -3363,7 +3952,7 @@
                         <a:buNone/>
                       </a:pPr>
                       <a:r>
-                        <a:rPr lang="en-US" sz="1300" b="1" dirty="0">
+                        <a:rPr lang="en-US" sz="850" b="1" dirty="0">
                           <a:solidFill>
                             <a:srgbClr val="000000"/>
                           </a:solidFill>
@@ -3371,9 +3960,9 @@
                           <a:ea typeface="Calibri" pitchFamily="34" charset="-122"/>
                           <a:cs typeface="Calibri" pitchFamily="34" charset="-120"/>
                         </a:rPr>
-                        <a:t>09/09</a:t>
+                        <a:t>9/9</a:t>
                       </a:r>
-                      <a:endParaRPr lang="en-US" sz="1300" dirty="0">
+                      <a:endParaRPr lang="en-US" sz="850" dirty="0">
                         <a:latin typeface="Calibri" charset="0"/>
                         <a:ea typeface="Calibri" charset="0"/>
                         <a:cs typeface="Calibri" charset="0"/>
@@ -3381,7 +3970,7 @@
                     </a:p>
                   </a:txBody>
                   <a:tcPr marL="91440" marR="91440" marT="45720" marB="45720" anchor="ctr">
-                    <a:lnL w="9525" cap="flat" cmpd="sng" algn="ctr">
+                    <a:lnL w="6350" cap="flat" cmpd="sng" algn="ctr">
                       <a:solidFill>
                         <a:srgbClr val="E5E7EB"/>
                       </a:solidFill>
@@ -3390,7 +3979,7 @@
                       <a:headEnd type="none" w="med" len="med"/>
                       <a:tailEnd type="none" w="med" len="med"/>
                     </a:lnL>
-                    <a:lnR w="9525" cap="flat" cmpd="sng" algn="ctr">
+                    <a:lnR w="6350" cap="flat" cmpd="sng" algn="ctr">
                       <a:solidFill>
                         <a:srgbClr val="E5E7EB"/>
                       </a:solidFill>
@@ -3399,7 +3988,7 @@
                       <a:headEnd type="none" w="med" len="med"/>
                       <a:tailEnd type="none" w="med" len="med"/>
                     </a:lnR>
-                    <a:lnT w="9525" cap="flat" cmpd="sng" algn="ctr">
+                    <a:lnT w="6350" cap="flat" cmpd="sng" algn="ctr">
                       <a:solidFill>
                         <a:srgbClr val="E5E7EB"/>
                       </a:solidFill>
@@ -3408,7 +3997,7 @@
                       <a:headEnd type="none" w="med" len="med"/>
                       <a:tailEnd type="none" w="med" len="med"/>
                     </a:lnT>
-                    <a:lnB w="9525" cap="flat" cmpd="sng" algn="ctr">
+                    <a:lnB w="6350" cap="flat" cmpd="sng" algn="ctr">
                       <a:solidFill>
                         <a:srgbClr val="E5E7EB"/>
                       </a:solidFill>
@@ -3428,7 +4017,7 @@
                         <a:buNone/>
                       </a:pPr>
                       <a:r>
-                        <a:rPr lang="en-US" sz="1300" dirty="0">
+                        <a:rPr lang="en-US" sz="850" dirty="0">
                           <a:solidFill>
                             <a:srgbClr val="000000"/>
                           </a:solidFill>
@@ -3438,7 +4027,7 @@
                         </a:rPr>
                         <a:t>19</a:t>
                       </a:r>
-                      <a:endParaRPr lang="en-US" sz="1300" dirty="0">
+                      <a:endParaRPr lang="en-US" sz="850" dirty="0">
                         <a:latin typeface="Calibri" charset="0"/>
                         <a:ea typeface="Calibri" charset="0"/>
                         <a:cs typeface="Calibri" charset="0"/>
@@ -3446,7 +4035,7 @@
                     </a:p>
                   </a:txBody>
                   <a:tcPr marL="91440" marR="91440" marT="45720" marB="45720" anchor="ctr">
-                    <a:lnL w="9525" cap="flat" cmpd="sng" algn="ctr">
+                    <a:lnL w="6350" cap="flat" cmpd="sng" algn="ctr">
                       <a:solidFill>
                         <a:srgbClr val="E5E7EB"/>
                       </a:solidFill>
@@ -3455,7 +4044,7 @@
                       <a:headEnd type="none" w="med" len="med"/>
                       <a:tailEnd type="none" w="med" len="med"/>
                     </a:lnL>
-                    <a:lnR w="9525" cap="flat" cmpd="sng" algn="ctr">
+                    <a:lnR w="6350" cap="flat" cmpd="sng" algn="ctr">
                       <a:solidFill>
                         <a:srgbClr val="E5E7EB"/>
                       </a:solidFill>
@@ -3464,7 +4053,7 @@
                       <a:headEnd type="none" w="med" len="med"/>
                       <a:tailEnd type="none" w="med" len="med"/>
                     </a:lnR>
-                    <a:lnT w="9525" cap="flat" cmpd="sng" algn="ctr">
+                    <a:lnT w="6350" cap="flat" cmpd="sng" algn="ctr">
                       <a:solidFill>
                         <a:srgbClr val="E5E7EB"/>
                       </a:solidFill>
@@ -3473,7 +4062,7 @@
                       <a:headEnd type="none" w="med" len="med"/>
                       <a:tailEnd type="none" w="med" len="med"/>
                     </a:lnT>
-                    <a:lnB w="9525" cap="flat" cmpd="sng" algn="ctr">
+                    <a:lnB w="6350" cap="flat" cmpd="sng" algn="ctr">
                       <a:solidFill>
                         <a:srgbClr val="E5E7EB"/>
                       </a:solidFill>
@@ -3493,7 +4082,7 @@
                         <a:buNone/>
                       </a:pPr>
                       <a:r>
-                        <a:rPr lang="en-US" sz="1300" dirty="0">
+                        <a:rPr lang="en-US" sz="850" dirty="0">
                           <a:solidFill>
                             <a:srgbClr val="000000"/>
                           </a:solidFill>
@@ -3503,7 +4092,7 @@
                         </a:rPr>
                         <a:t>17</a:t>
                       </a:r>
-                      <a:endParaRPr lang="en-US" sz="1300" dirty="0">
+                      <a:endParaRPr lang="en-US" sz="850" dirty="0">
                         <a:latin typeface="Calibri" charset="0"/>
                         <a:ea typeface="Calibri" charset="0"/>
                         <a:cs typeface="Calibri" charset="0"/>
@@ -3511,7 +4100,7 @@
                     </a:p>
                   </a:txBody>
                   <a:tcPr marL="91440" marR="91440" marT="45720" marB="45720" anchor="ctr">
-                    <a:lnL w="9525" cap="flat" cmpd="sng" algn="ctr">
+                    <a:lnL w="6350" cap="flat" cmpd="sng" algn="ctr">
                       <a:solidFill>
                         <a:srgbClr val="E5E7EB"/>
                       </a:solidFill>
@@ -3520,7 +4109,7 @@
                       <a:headEnd type="none" w="med" len="med"/>
                       <a:tailEnd type="none" w="med" len="med"/>
                     </a:lnL>
-                    <a:lnR w="9525" cap="flat" cmpd="sng" algn="ctr">
+                    <a:lnR w="6350" cap="flat" cmpd="sng" algn="ctr">
                       <a:solidFill>
                         <a:srgbClr val="E5E7EB"/>
                       </a:solidFill>
@@ -3529,7 +4118,7 @@
                       <a:headEnd type="none" w="med" len="med"/>
                       <a:tailEnd type="none" w="med" len="med"/>
                     </a:lnR>
-                    <a:lnT w="9525" cap="flat" cmpd="sng" algn="ctr">
+                    <a:lnT w="6350" cap="flat" cmpd="sng" algn="ctr">
                       <a:solidFill>
                         <a:srgbClr val="E5E7EB"/>
                       </a:solidFill>
@@ -3538,7 +4127,7 @@
                       <a:headEnd type="none" w="med" len="med"/>
                       <a:tailEnd type="none" w="med" len="med"/>
                     </a:lnT>
-                    <a:lnB w="9525" cap="flat" cmpd="sng" algn="ctr">
+                    <a:lnB w="6350" cap="flat" cmpd="sng" algn="ctr">
                       <a:solidFill>
                         <a:srgbClr val="E5E7EB"/>
                       </a:solidFill>
@@ -3558,7 +4147,7 @@
                         <a:buNone/>
                       </a:pPr>
                       <a:r>
-                        <a:rPr lang="en-US" sz="1300" dirty="0">
+                        <a:rPr lang="en-US" sz="850" dirty="0">
                           <a:solidFill>
                             <a:srgbClr val="000000"/>
                           </a:solidFill>
@@ -3568,7 +4157,7 @@
                         </a:rPr>
                         <a:t>0</a:t>
                       </a:r>
-                      <a:endParaRPr lang="en-US" sz="1300" dirty="0">
+                      <a:endParaRPr lang="en-US" sz="850" dirty="0">
                         <a:latin typeface="Calibri" charset="0"/>
                         <a:ea typeface="Calibri" charset="0"/>
                         <a:cs typeface="Calibri" charset="0"/>
@@ -3576,7 +4165,7 @@
                     </a:p>
                   </a:txBody>
                   <a:tcPr marL="91440" marR="91440" marT="45720" marB="45720" anchor="ctr">
-                    <a:lnL w="9525" cap="flat" cmpd="sng" algn="ctr">
+                    <a:lnL w="6350" cap="flat" cmpd="sng" algn="ctr">
                       <a:solidFill>
                         <a:srgbClr val="E5E7EB"/>
                       </a:solidFill>
@@ -3585,7 +4174,7 @@
                       <a:headEnd type="none" w="med" len="med"/>
                       <a:tailEnd type="none" w="med" len="med"/>
                     </a:lnL>
-                    <a:lnR w="9525" cap="flat" cmpd="sng" algn="ctr">
+                    <a:lnR w="6350" cap="flat" cmpd="sng" algn="ctr">
                       <a:solidFill>
                         <a:srgbClr val="E5E7EB"/>
                       </a:solidFill>
@@ -3594,7 +4183,7 @@
                       <a:headEnd type="none" w="med" len="med"/>
                       <a:tailEnd type="none" w="med" len="med"/>
                     </a:lnR>
-                    <a:lnT w="9525" cap="flat" cmpd="sng" algn="ctr">
+                    <a:lnT w="6350" cap="flat" cmpd="sng" algn="ctr">
                       <a:solidFill>
                         <a:srgbClr val="E5E7EB"/>
                       </a:solidFill>
@@ -3603,7 +4192,7 @@
                       <a:headEnd type="none" w="med" len="med"/>
                       <a:tailEnd type="none" w="med" len="med"/>
                     </a:lnT>
-                    <a:lnB w="9525" cap="flat" cmpd="sng" algn="ctr">
+                    <a:lnB w="6350" cap="flat" cmpd="sng" algn="ctr">
                       <a:solidFill>
                         <a:srgbClr val="E5E7EB"/>
                       </a:solidFill>
@@ -3623,7 +4212,7 @@
                         <a:buNone/>
                       </a:pPr>
                       <a:r>
-                        <a:rPr lang="en-US" sz="1300" b="1" dirty="0">
+                        <a:rPr lang="en-US" sz="850" b="1" dirty="0">
                           <a:solidFill>
                             <a:srgbClr val="000000"/>
                           </a:solidFill>
@@ -3633,7 +4222,7 @@
                         </a:rPr>
                         <a:t>17</a:t>
                       </a:r>
-                      <a:endParaRPr lang="en-US" sz="1300" dirty="0">
+                      <a:endParaRPr lang="en-US" sz="850" dirty="0">
                         <a:latin typeface="Calibri" charset="0"/>
                         <a:ea typeface="Calibri" charset="0"/>
                         <a:cs typeface="Calibri" charset="0"/>
@@ -3641,7 +4230,7 @@
                     </a:p>
                   </a:txBody>
                   <a:tcPr marL="91440" marR="91440" marT="45720" marB="45720" anchor="ctr">
-                    <a:lnL w="9525" cap="flat" cmpd="sng" algn="ctr">
+                    <a:lnL w="6350" cap="flat" cmpd="sng" algn="ctr">
                       <a:solidFill>
                         <a:srgbClr val="E5E7EB"/>
                       </a:solidFill>
@@ -3650,7 +4239,7 @@
                       <a:headEnd type="none" w="med" len="med"/>
                       <a:tailEnd type="none" w="med" len="med"/>
                     </a:lnL>
-                    <a:lnR w="9525" cap="flat" cmpd="sng" algn="ctr">
+                    <a:lnR w="6350" cap="flat" cmpd="sng" algn="ctr">
                       <a:solidFill>
                         <a:srgbClr val="E5E7EB"/>
                       </a:solidFill>
@@ -3659,7 +4248,7 @@
                       <a:headEnd type="none" w="med" len="med"/>
                       <a:tailEnd type="none" w="med" len="med"/>
                     </a:lnR>
-                    <a:lnT w="9525" cap="flat" cmpd="sng" algn="ctr">
+                    <a:lnT w="6350" cap="flat" cmpd="sng" algn="ctr">
                       <a:solidFill>
                         <a:srgbClr val="E5E7EB"/>
                       </a:solidFill>
@@ -3668,7 +4257,7 @@
                       <a:headEnd type="none" w="med" len="med"/>
                       <a:tailEnd type="none" w="med" len="med"/>
                     </a:lnT>
-                    <a:lnB w="9525" cap="flat" cmpd="sng" algn="ctr">
+                    <a:lnB w="6350" cap="flat" cmpd="sng" algn="ctr">
                       <a:solidFill>
                         <a:srgbClr val="E5E7EB"/>
                       </a:solidFill>
@@ -3688,7 +4277,7 @@
                         <a:buNone/>
                       </a:pPr>
                       <a:r>
-                        <a:rPr lang="en-US" sz="1300" b="1" dirty="0">
+                        <a:rPr lang="en-US" sz="850" b="1" dirty="0">
                           <a:solidFill>
                             <a:srgbClr val="DC2626"/>
                           </a:solidFill>
@@ -3698,7 +4287,7 @@
                         </a:rPr>
                         <a:t>89.5%</a:t>
                       </a:r>
-                      <a:endParaRPr lang="en-US" sz="1300" dirty="0">
+                      <a:endParaRPr lang="en-US" sz="850" dirty="0">
                         <a:latin typeface="Calibri" charset="0"/>
                         <a:ea typeface="Calibri" charset="0"/>
                         <a:cs typeface="Calibri" charset="0"/>
@@ -3706,7 +4295,7 @@
                     </a:p>
                   </a:txBody>
                   <a:tcPr marL="91440" marR="91440" marT="45720" marB="45720" anchor="ctr">
-                    <a:lnL w="9525" cap="flat" cmpd="sng" algn="ctr">
+                    <a:lnL w="6350" cap="flat" cmpd="sng" algn="ctr">
                       <a:solidFill>
                         <a:srgbClr val="E5E7EB"/>
                       </a:solidFill>
@@ -3715,7 +4304,7 @@
                       <a:headEnd type="none" w="med" len="med"/>
                       <a:tailEnd type="none" w="med" len="med"/>
                     </a:lnL>
-                    <a:lnR w="9525" cap="flat" cmpd="sng" algn="ctr">
+                    <a:lnR w="6350" cap="flat" cmpd="sng" algn="ctr">
                       <a:solidFill>
                         <a:srgbClr val="E5E7EB"/>
                       </a:solidFill>
@@ -3724,7 +4313,7 @@
                       <a:headEnd type="none" w="med" len="med"/>
                       <a:tailEnd type="none" w="med" len="med"/>
                     </a:lnR>
-                    <a:lnT w="9525" cap="flat" cmpd="sng" algn="ctr">
+                    <a:lnT w="6350" cap="flat" cmpd="sng" algn="ctr">
                       <a:solidFill>
                         <a:srgbClr val="E5E7EB"/>
                       </a:solidFill>
@@ -3733,7 +4322,7 @@
                       <a:headEnd type="none" w="med" len="med"/>
                       <a:tailEnd type="none" w="med" len="med"/>
                     </a:lnT>
-                    <a:lnB w="9525" cap="flat" cmpd="sng" algn="ctr">
+                    <a:lnB w="6350" cap="flat" cmpd="sng" algn="ctr">
                       <a:solidFill>
                         <a:srgbClr val="E5E7EB"/>
                       </a:solidFill>
@@ -3745,7 +4334,7 @@
                   </a:tcPr>
                 </a:tc>
               </a:tr>
-              <a:tr h="502920">
+              <a:tr h="228600">
                 <a:tc>
                   <a:txBody>
                     <a:bodyPr/>
@@ -3755,7 +4344,7 @@
                         <a:buNone/>
                       </a:pPr>
                       <a:r>
-                        <a:rPr lang="en-US" sz="1300" b="1" dirty="0">
+                        <a:rPr lang="en-US" sz="850" b="1" dirty="0">
                           <a:solidFill>
                             <a:srgbClr val="000000"/>
                           </a:solidFill>
@@ -3765,7 +4354,7 @@
                         </a:rPr>
                         <a:t>TOTAL</a:t>
                       </a:r>
-                      <a:endParaRPr lang="en-US" sz="1300" dirty="0">
+                      <a:endParaRPr lang="en-US" sz="850" dirty="0">
                         <a:latin typeface="Calibri" charset="0"/>
                         <a:ea typeface="Calibri" charset="0"/>
                         <a:cs typeface="Calibri" charset="0"/>
@@ -3773,7 +4362,7 @@
                     </a:p>
                   </a:txBody>
                   <a:tcPr marL="91440" marR="91440" marT="45720" marB="45720" anchor="ctr">
-                    <a:lnL w="9525" cap="flat" cmpd="sng" algn="ctr">
+                    <a:lnL w="6350" cap="flat" cmpd="sng" algn="ctr">
                       <a:solidFill>
                         <a:srgbClr val="E5E7EB"/>
                       </a:solidFill>
@@ -3782,7 +4371,7 @@
                       <a:headEnd type="none" w="med" len="med"/>
                       <a:tailEnd type="none" w="med" len="med"/>
                     </a:lnL>
-                    <a:lnR w="9525" cap="flat" cmpd="sng" algn="ctr">
+                    <a:lnR w="6350" cap="flat" cmpd="sng" algn="ctr">
                       <a:solidFill>
                         <a:srgbClr val="E5E7EB"/>
                       </a:solidFill>
@@ -3791,7 +4380,7 @@
                       <a:headEnd type="none" w="med" len="med"/>
                       <a:tailEnd type="none" w="med" len="med"/>
                     </a:lnR>
-                    <a:lnT w="9525" cap="flat" cmpd="sng" algn="ctr">
+                    <a:lnT w="6350" cap="flat" cmpd="sng" algn="ctr">
                       <a:solidFill>
                         <a:srgbClr val="E5E7EB"/>
                       </a:solidFill>
@@ -3800,7 +4389,7 @@
                       <a:headEnd type="none" w="med" len="med"/>
                       <a:tailEnd type="none" w="med" len="med"/>
                     </a:lnT>
-                    <a:lnB w="9525" cap="flat" cmpd="sng" algn="ctr">
+                    <a:lnB w="6350" cap="flat" cmpd="sng" algn="ctr">
                       <a:solidFill>
                         <a:srgbClr val="E5E7EB"/>
                       </a:solidFill>
@@ -3820,7 +4409,7 @@
                         <a:buNone/>
                       </a:pPr>
                       <a:r>
-                        <a:rPr lang="en-US" sz="1300" b="1" dirty="0">
+                        <a:rPr lang="en-US" sz="850" b="1" dirty="0">
                           <a:solidFill>
                             <a:srgbClr val="000000"/>
                           </a:solidFill>
@@ -3830,7 +4419,7 @@
                         </a:rPr>
                         <a:t>113</a:t>
                       </a:r>
-                      <a:endParaRPr lang="en-US" sz="1300" dirty="0">
+                      <a:endParaRPr lang="en-US" sz="850" dirty="0">
                         <a:latin typeface="Calibri" charset="0"/>
                         <a:ea typeface="Calibri" charset="0"/>
                         <a:cs typeface="Calibri" charset="0"/>
@@ -3838,7 +4427,7 @@
                     </a:p>
                   </a:txBody>
                   <a:tcPr marL="91440" marR="91440" marT="45720" marB="45720" anchor="ctr">
-                    <a:lnL w="9525" cap="flat" cmpd="sng" algn="ctr">
+                    <a:lnL w="6350" cap="flat" cmpd="sng" algn="ctr">
                       <a:solidFill>
                         <a:srgbClr val="E5E7EB"/>
                       </a:solidFill>
@@ -3847,7 +4436,7 @@
                       <a:headEnd type="none" w="med" len="med"/>
                       <a:tailEnd type="none" w="med" len="med"/>
                     </a:lnL>
-                    <a:lnR w="9525" cap="flat" cmpd="sng" algn="ctr">
+                    <a:lnR w="6350" cap="flat" cmpd="sng" algn="ctr">
                       <a:solidFill>
                         <a:srgbClr val="E5E7EB"/>
                       </a:solidFill>
@@ -3856,7 +4445,7 @@
                       <a:headEnd type="none" w="med" len="med"/>
                       <a:tailEnd type="none" w="med" len="med"/>
                     </a:lnR>
-                    <a:lnT w="9525" cap="flat" cmpd="sng" algn="ctr">
+                    <a:lnT w="6350" cap="flat" cmpd="sng" algn="ctr">
                       <a:solidFill>
                         <a:srgbClr val="E5E7EB"/>
                       </a:solidFill>
@@ -3865,7 +4454,7 @@
                       <a:headEnd type="none" w="med" len="med"/>
                       <a:tailEnd type="none" w="med" len="med"/>
                     </a:lnT>
-                    <a:lnB w="9525" cap="flat" cmpd="sng" algn="ctr">
+                    <a:lnB w="6350" cap="flat" cmpd="sng" algn="ctr">
                       <a:solidFill>
                         <a:srgbClr val="E5E7EB"/>
                       </a:solidFill>
@@ -3885,7 +4474,7 @@
                         <a:buNone/>
                       </a:pPr>
                       <a:r>
-                        <a:rPr lang="en-US" sz="1300" b="1" dirty="0">
+                        <a:rPr lang="en-US" sz="850" b="1" dirty="0">
                           <a:solidFill>
                             <a:srgbClr val="000000"/>
                           </a:solidFill>
@@ -3895,7 +4484,7 @@
                         </a:rPr>
                         <a:t>26</a:t>
                       </a:r>
-                      <a:endParaRPr lang="en-US" sz="1300" dirty="0">
+                      <a:endParaRPr lang="en-US" sz="850" dirty="0">
                         <a:latin typeface="Calibri" charset="0"/>
                         <a:ea typeface="Calibri" charset="0"/>
                         <a:cs typeface="Calibri" charset="0"/>
@@ -3903,7 +4492,7 @@
                     </a:p>
                   </a:txBody>
                   <a:tcPr marL="91440" marR="91440" marT="45720" marB="45720" anchor="ctr">
-                    <a:lnL w="9525" cap="flat" cmpd="sng" algn="ctr">
+                    <a:lnL w="6350" cap="flat" cmpd="sng" algn="ctr">
                       <a:solidFill>
                         <a:srgbClr val="E5E7EB"/>
                       </a:solidFill>
@@ -3912,7 +4501,7 @@
                       <a:headEnd type="none" w="med" len="med"/>
                       <a:tailEnd type="none" w="med" len="med"/>
                     </a:lnL>
-                    <a:lnR w="9525" cap="flat" cmpd="sng" algn="ctr">
+                    <a:lnR w="6350" cap="flat" cmpd="sng" algn="ctr">
                       <a:solidFill>
                         <a:srgbClr val="E5E7EB"/>
                       </a:solidFill>
@@ -3921,7 +4510,7 @@
                       <a:headEnd type="none" w="med" len="med"/>
                       <a:tailEnd type="none" w="med" len="med"/>
                     </a:lnR>
-                    <a:lnT w="9525" cap="flat" cmpd="sng" algn="ctr">
+                    <a:lnT w="6350" cap="flat" cmpd="sng" algn="ctr">
                       <a:solidFill>
                         <a:srgbClr val="E5E7EB"/>
                       </a:solidFill>
@@ -3930,7 +4519,7 @@
                       <a:headEnd type="none" w="med" len="med"/>
                       <a:tailEnd type="none" w="med" len="med"/>
                     </a:lnT>
-                    <a:lnB w="9525" cap="flat" cmpd="sng" algn="ctr">
+                    <a:lnB w="6350" cap="flat" cmpd="sng" algn="ctr">
                       <a:solidFill>
                         <a:srgbClr val="E5E7EB"/>
                       </a:solidFill>
@@ -3950,7 +4539,7 @@
                         <a:buNone/>
                       </a:pPr>
                       <a:r>
-                        <a:rPr lang="en-US" sz="1300" b="1" dirty="0">
+                        <a:rPr lang="en-US" sz="850" b="1" dirty="0">
                           <a:solidFill>
                             <a:srgbClr val="000000"/>
                           </a:solidFill>
@@ -3960,7 +4549,7 @@
                         </a:rPr>
                         <a:t>63</a:t>
                       </a:r>
-                      <a:endParaRPr lang="en-US" sz="1300" dirty="0">
+                      <a:endParaRPr lang="en-US" sz="850" dirty="0">
                         <a:latin typeface="Calibri" charset="0"/>
                         <a:ea typeface="Calibri" charset="0"/>
                         <a:cs typeface="Calibri" charset="0"/>
@@ -3968,7 +4557,7 @@
                     </a:p>
                   </a:txBody>
                   <a:tcPr marL="91440" marR="91440" marT="45720" marB="45720" anchor="ctr">
-                    <a:lnL w="9525" cap="flat" cmpd="sng" algn="ctr">
+                    <a:lnL w="6350" cap="flat" cmpd="sng" algn="ctr">
                       <a:solidFill>
                         <a:srgbClr val="E5E7EB"/>
                       </a:solidFill>
@@ -3977,7 +4566,7 @@
                       <a:headEnd type="none" w="med" len="med"/>
                       <a:tailEnd type="none" w="med" len="med"/>
                     </a:lnL>
-                    <a:lnR w="9525" cap="flat" cmpd="sng" algn="ctr">
+                    <a:lnR w="6350" cap="flat" cmpd="sng" algn="ctr">
                       <a:solidFill>
                         <a:srgbClr val="E5E7EB"/>
                       </a:solidFill>
@@ -3986,7 +4575,7 @@
                       <a:headEnd type="none" w="med" len="med"/>
                       <a:tailEnd type="none" w="med" len="med"/>
                     </a:lnR>
-                    <a:lnT w="9525" cap="flat" cmpd="sng" algn="ctr">
+                    <a:lnT w="6350" cap="flat" cmpd="sng" algn="ctr">
                       <a:solidFill>
                         <a:srgbClr val="E5E7EB"/>
                       </a:solidFill>
@@ -3995,7 +4584,7 @@
                       <a:headEnd type="none" w="med" len="med"/>
                       <a:tailEnd type="none" w="med" len="med"/>
                     </a:lnT>
-                    <a:lnB w="9525" cap="flat" cmpd="sng" algn="ctr">
+                    <a:lnB w="6350" cap="flat" cmpd="sng" algn="ctr">
                       <a:solidFill>
                         <a:srgbClr val="E5E7EB"/>
                       </a:solidFill>
@@ -4015,7 +4604,7 @@
                         <a:buNone/>
                       </a:pPr>
                       <a:r>
-                        <a:rPr lang="en-US" sz="1300" b="1" dirty="0">
+                        <a:rPr lang="en-US" sz="850" b="1" dirty="0">
                           <a:solidFill>
                             <a:srgbClr val="000000"/>
                           </a:solidFill>
@@ -4025,7 +4614,7 @@
                         </a:rPr>
                         <a:t>89</a:t>
                       </a:r>
-                      <a:endParaRPr lang="en-US" sz="1300" dirty="0">
+                      <a:endParaRPr lang="en-US" sz="850" dirty="0">
                         <a:latin typeface="Calibri" charset="0"/>
                         <a:ea typeface="Calibri" charset="0"/>
                         <a:cs typeface="Calibri" charset="0"/>
@@ -4033,7 +4622,7 @@
                     </a:p>
                   </a:txBody>
                   <a:tcPr marL="91440" marR="91440" marT="45720" marB="45720" anchor="ctr">
-                    <a:lnL w="9525" cap="flat" cmpd="sng" algn="ctr">
+                    <a:lnL w="6350" cap="flat" cmpd="sng" algn="ctr">
                       <a:solidFill>
                         <a:srgbClr val="E5E7EB"/>
                       </a:solidFill>
@@ -4042,7 +4631,7 @@
                       <a:headEnd type="none" w="med" len="med"/>
                       <a:tailEnd type="none" w="med" len="med"/>
                     </a:lnL>
-                    <a:lnR w="9525" cap="flat" cmpd="sng" algn="ctr">
+                    <a:lnR w="6350" cap="flat" cmpd="sng" algn="ctr">
                       <a:solidFill>
                         <a:srgbClr val="E5E7EB"/>
                       </a:solidFill>
@@ -4051,7 +4640,7 @@
                       <a:headEnd type="none" w="med" len="med"/>
                       <a:tailEnd type="none" w="med" len="med"/>
                     </a:lnR>
-                    <a:lnT w="9525" cap="flat" cmpd="sng" algn="ctr">
+                    <a:lnT w="6350" cap="flat" cmpd="sng" algn="ctr">
                       <a:solidFill>
                         <a:srgbClr val="E5E7EB"/>
                       </a:solidFill>
@@ -4060,7 +4649,7 @@
                       <a:headEnd type="none" w="med" len="med"/>
                       <a:tailEnd type="none" w="med" len="med"/>
                     </a:lnT>
-                    <a:lnB w="9525" cap="flat" cmpd="sng" algn="ctr">
+                    <a:lnB w="6350" cap="flat" cmpd="sng" algn="ctr">
                       <a:solidFill>
                         <a:srgbClr val="E5E7EB"/>
                       </a:solidFill>
@@ -4080,7 +4669,7 @@
                         <a:buNone/>
                       </a:pPr>
                       <a:r>
-                        <a:rPr lang="en-US" sz="1300" b="1" dirty="0">
+                        <a:rPr lang="en-US" sz="850" b="1" dirty="0">
                           <a:solidFill>
                             <a:srgbClr val="DC2626"/>
                           </a:solidFill>
@@ -4090,7 +4679,7 @@
                         </a:rPr>
                         <a:t>78.8%</a:t>
                       </a:r>
-                      <a:endParaRPr lang="en-US" sz="1300" dirty="0">
+                      <a:endParaRPr lang="en-US" sz="850" dirty="0">
                         <a:latin typeface="Calibri" charset="0"/>
                         <a:ea typeface="Calibri" charset="0"/>
                         <a:cs typeface="Calibri" charset="0"/>
@@ -4098,7 +4687,7 @@
                     </a:p>
                   </a:txBody>
                   <a:tcPr marL="91440" marR="91440" marT="45720" marB="45720" anchor="ctr">
-                    <a:lnL w="9525" cap="flat" cmpd="sng" algn="ctr">
+                    <a:lnL w="6350" cap="flat" cmpd="sng" algn="ctr">
                       <a:solidFill>
                         <a:srgbClr val="E5E7EB"/>
                       </a:solidFill>
@@ -4107,7 +4696,7 @@
                       <a:headEnd type="none" w="med" len="med"/>
                       <a:tailEnd type="none" w="med" len="med"/>
                     </a:lnL>
-                    <a:lnR w="9525" cap="flat" cmpd="sng" algn="ctr">
+                    <a:lnR w="6350" cap="flat" cmpd="sng" algn="ctr">
                       <a:solidFill>
                         <a:srgbClr val="E5E7EB"/>
                       </a:solidFill>
@@ -4116,7 +4705,7 @@
                       <a:headEnd type="none" w="med" len="med"/>
                       <a:tailEnd type="none" w="med" len="med"/>
                     </a:lnR>
-                    <a:lnT w="9525" cap="flat" cmpd="sng" algn="ctr">
+                    <a:lnT w="6350" cap="flat" cmpd="sng" algn="ctr">
                       <a:solidFill>
                         <a:srgbClr val="E5E7EB"/>
                       </a:solidFill>
@@ -4125,7 +4714,7 @@
                       <a:headEnd type="none" w="med" len="med"/>
                       <a:tailEnd type="none" w="med" len="med"/>
                     </a:lnT>
-                    <a:lnB w="9525" cap="flat" cmpd="sng" algn="ctr">
+                    <a:lnB w="6350" cap="flat" cmpd="sng" algn="ctr">
                       <a:solidFill>
                         <a:srgbClr val="E5E7EB"/>
                       </a:solidFill>
@@ -4143,14 +4732,14 @@
       </p:graphicFrame>
       <p:sp>
         <p:nvSpPr>
-          <p:cNvPr id="5" name="Text 2"/>
+          <p:cNvPr id="8" name="Text 4"/>
           <p:cNvSpPr/>
           <p:nvPr/>
         </p:nvSpPr>
         <p:spPr>
           <a:xfrm>
-            <a:off x="822960" y="5806440"/>
-            <a:ext cx="10515600" cy="274320"/>
+            <a:off x="411480" y="3456432"/>
+            <a:ext cx="5577840" cy="219456"/>
           </a:xfrm>
           <a:prstGeom prst="rect">
             <a:avLst/>
@@ -4166,17 +4755,1723 @@
               <a:buNone/>
             </a:pPr>
             <a:r>
-              <a:rPr lang="en-US" sz="1100" dirty="0">
+              <a:rPr lang="en-US" sz="1000" b="1" dirty="0">
                 <a:solidFill>
-                  <a:srgbClr val="6B7280"/>
+                  <a:srgbClr val="1F2937"/>
                 </a:solidFill>
                 <a:latin typeface="Calibri" pitchFamily="34" charset="0"/>
                 <a:ea typeface="Calibri" pitchFamily="34" charset="-122"/>
                 <a:cs typeface="Calibri" pitchFamily="34" charset="-120"/>
               </a:rPr>
-              <a:t>Jordan screens at harvest since 08/26; our QC inspects what he passes. 24 usable blocks of 113 received.</a:t>
+              <a:t>What's failing — reasons, all stages (tagged rejects)</a:t>
             </a:r>
-            <a:endParaRPr lang="en-US" sz="1100" dirty="0"/>
+            <a:endParaRPr lang="en-US" sz="1000" dirty="0"/>
+          </a:p>
+        </p:txBody>
+      </p:sp>
+      <p:graphicFrame>
+        <p:nvGraphicFramePr>
+          <p:cNvPr id="9" name="Chart 1" descr=""/>
+          <p:cNvGraphicFramePr/>
+          <p:nvPr/>
+        </p:nvGraphicFramePr>
+        <p:xfrm>
+          <a:off x="411480" y="3675888"/>
+          <a:ext cx="5577840" cy="1371600"/>
+        </p:xfrm>
+        <a:graphic xmlns:a="http://schemas.openxmlformats.org/drawingml/2006/main">
+          <a:graphicData uri="http://schemas.openxmlformats.org/drawingml/2006/chart">
+            <c:chart xmlns:c="http://schemas.openxmlformats.org/drawingml/2006/chart" r:id="rId2"/>
+          </a:graphicData>
+        </a:graphic>
+      </p:graphicFrame>
+      <p:sp>
+        <p:nvSpPr>
+          <p:cNvPr id="10" name="Text 5"/>
+          <p:cNvSpPr/>
+          <p:nvPr/>
+        </p:nvSpPr>
+        <p:spPr>
+          <a:xfrm>
+            <a:off x="6172200" y="3456432"/>
+            <a:ext cx="5577840" cy="219456"/>
+          </a:xfrm>
+          <a:prstGeom prst="rect">
+            <a:avLst/>
+          </a:prstGeom>
+          <a:noFill/>
+          <a:ln/>
+        </p:spPr>
+        <p:txBody>
+          <a:bodyPr wrap="square" lIns="0" tIns="0" rIns="0" bIns="0" rtlCol="0" anchor="ctr"/>
+          <a:lstStyle/>
+          <a:p>
+            <a:pPr indent="0" marL="0">
+              <a:buNone/>
+            </a:pPr>
+            <a:r>
+              <a:rPr lang="en-US" sz="1000" b="1" dirty="0">
+                <a:solidFill>
+                  <a:srgbClr val="1F2937"/>
+                </a:solidFill>
+                <a:latin typeface="Calibri" pitchFamily="34" charset="0"/>
+                <a:ea typeface="Calibri" pitchFamily="34" charset="-122"/>
+                <a:cs typeface="Calibri" pitchFamily="34" charset="-120"/>
+              </a:rPr>
+              <a:t>ATM receipt — every scrap unit on these batches: 9972 Laceration/Cut</a:t>
+            </a:r>
+            <a:endParaRPr lang="en-US" sz="1000" dirty="0"/>
+          </a:p>
+        </p:txBody>
+      </p:sp>
+      <p:graphicFrame>
+        <p:nvGraphicFramePr>
+          <p:cNvPr id="3" name="Table 1"/>
+          <p:cNvGraphicFramePr>
+            <a:graphicFrameLocks noGrp="1"/>
+          </p:cNvGraphicFramePr>
+          <p:nvPr>
+            <p:extLst>
+              <p:ext uri="{D42A27DB-BD31-4B8C-83A1-F6EECF244321}">
+                <p14:modId xmlns:p14="http://schemas.microsoft.com/office/powerpoint/2010/main" val="1579011935"/>
+              </p:ext>
+            </p:extLst>
+          </p:nvPr>
+        </p:nvGraphicFramePr>
+        <p:xfrm>
+          <a:off x="6172200" y="3749040"/>
+          <a:ext cx="5577840" cy="914400"/>
+        </p:xfrm>
+        <a:graphic>
+          <a:graphicData uri="http://schemas.openxmlformats.org/drawingml/2006/table">
+            <a:tbl>
+              <a:tblPr/>
+              <a:tblGrid>
+                <a:gridCol w="1371600"/>
+                <a:gridCol w="1371600"/>
+                <a:gridCol w="1417320"/>
+                <a:gridCol w="1417320"/>
+              </a:tblGrid>
+              <a:tr h="237744">
+                <a:tc>
+                  <a:txBody>
+                    <a:bodyPr/>
+                    <a:lstStyle/>
+                    <a:p>
+                      <a:pPr algn="l" indent="0" marL="0">
+                        <a:buNone/>
+                      </a:pPr>
+                      <a:r>
+                        <a:rPr lang="en-US" sz="800" b="1" dirty="0">
+                          <a:solidFill>
+                            <a:srgbClr val="FFFFFF"/>
+                          </a:solidFill>
+                          <a:latin typeface="Calibri" pitchFamily="34" charset="0"/>
+                          <a:ea typeface="Calibri" pitchFamily="34" charset="-122"/>
+                          <a:cs typeface="Calibri" pitchFamily="34" charset="-120"/>
+                        </a:rPr>
+                        <a:t>Batch</a:t>
+                      </a:r>
+                      <a:endParaRPr lang="en-US" sz="800" dirty="0">
+                        <a:latin typeface="Calibri" charset="0"/>
+                        <a:ea typeface="Calibri" charset="0"/>
+                        <a:cs typeface="Calibri" charset="0"/>
+                      </a:endParaRPr>
+                    </a:p>
+                  </a:txBody>
+                  <a:tcPr marL="91440" marR="91440" marT="45720" marB="45720" anchor="ctr">
+                    <a:lnL w="6350" cap="flat" cmpd="sng" algn="ctr">
+                      <a:solidFill>
+                        <a:srgbClr val="E5E7EB"/>
+                      </a:solidFill>
+                      <a:prstDash val="solid"/>
+                      <a:round/>
+                      <a:headEnd type="none" w="med" len="med"/>
+                      <a:tailEnd type="none" w="med" len="med"/>
+                    </a:lnL>
+                    <a:lnR w="6350" cap="flat" cmpd="sng" algn="ctr">
+                      <a:solidFill>
+                        <a:srgbClr val="E5E7EB"/>
+                      </a:solidFill>
+                      <a:prstDash val="solid"/>
+                      <a:round/>
+                      <a:headEnd type="none" w="med" len="med"/>
+                      <a:tailEnd type="none" w="med" len="med"/>
+                    </a:lnR>
+                    <a:lnT w="6350" cap="flat" cmpd="sng" algn="ctr">
+                      <a:solidFill>
+                        <a:srgbClr val="E5E7EB"/>
+                      </a:solidFill>
+                      <a:prstDash val="solid"/>
+                      <a:round/>
+                      <a:headEnd type="none" w="med" len="med"/>
+                      <a:tailEnd type="none" w="med" len="med"/>
+                    </a:lnT>
+                    <a:lnB w="6350" cap="flat" cmpd="sng" algn="ctr">
+                      <a:solidFill>
+                        <a:srgbClr val="E5E7EB"/>
+                      </a:solidFill>
+                      <a:prstDash val="solid"/>
+                      <a:round/>
+                      <a:headEnd type="none" w="med" len="med"/>
+                      <a:tailEnd type="none" w="med" len="med"/>
+                    </a:lnB>
+                    <a:solidFill>
+                      <a:srgbClr val="1F2937"/>
+                    </a:solidFill>
+                  </a:tcPr>
+                </a:tc>
+                <a:tc>
+                  <a:txBody>
+                    <a:bodyPr/>
+                    <a:lstStyle/>
+                    <a:p>
+                      <a:pPr algn="l" indent="0" marL="0">
+                        <a:buNone/>
+                      </a:pPr>
+                      <a:r>
+                        <a:rPr lang="en-US" sz="800" b="1" dirty="0">
+                          <a:solidFill>
+                            <a:srgbClr val="FFFFFF"/>
+                          </a:solidFill>
+                          <a:latin typeface="Calibri" pitchFamily="34" charset="0"/>
+                          <a:ea typeface="Calibri" pitchFamily="34" charset="-122"/>
+                          <a:cs typeface="Calibri" pitchFamily="34" charset="-120"/>
+                        </a:rPr>
+                        <a:t>SH visits</a:t>
+                      </a:r>
+                      <a:endParaRPr lang="en-US" sz="800" dirty="0">
+                        <a:latin typeface="Calibri" charset="0"/>
+                        <a:ea typeface="Calibri" charset="0"/>
+                        <a:cs typeface="Calibri" charset="0"/>
+                      </a:endParaRPr>
+                    </a:p>
+                  </a:txBody>
+                  <a:tcPr marL="91440" marR="91440" marT="45720" marB="45720" anchor="ctr">
+                    <a:lnL w="6350" cap="flat" cmpd="sng" algn="ctr">
+                      <a:solidFill>
+                        <a:srgbClr val="E5E7EB"/>
+                      </a:solidFill>
+                      <a:prstDash val="solid"/>
+                      <a:round/>
+                      <a:headEnd type="none" w="med" len="med"/>
+                      <a:tailEnd type="none" w="med" len="med"/>
+                    </a:lnL>
+                    <a:lnR w="6350" cap="flat" cmpd="sng" algn="ctr">
+                      <a:solidFill>
+                        <a:srgbClr val="E5E7EB"/>
+                      </a:solidFill>
+                      <a:prstDash val="solid"/>
+                      <a:round/>
+                      <a:headEnd type="none" w="med" len="med"/>
+                      <a:tailEnd type="none" w="med" len="med"/>
+                    </a:lnR>
+                    <a:lnT w="6350" cap="flat" cmpd="sng" algn="ctr">
+                      <a:solidFill>
+                        <a:srgbClr val="E5E7EB"/>
+                      </a:solidFill>
+                      <a:prstDash val="solid"/>
+                      <a:round/>
+                      <a:headEnd type="none" w="med" len="med"/>
+                      <a:tailEnd type="none" w="med" len="med"/>
+                    </a:lnT>
+                    <a:lnB w="6350" cap="flat" cmpd="sng" algn="ctr">
+                      <a:solidFill>
+                        <a:srgbClr val="E5E7EB"/>
+                      </a:solidFill>
+                      <a:prstDash val="solid"/>
+                      <a:round/>
+                      <a:headEnd type="none" w="med" len="med"/>
+                      <a:tailEnd type="none" w="med" len="med"/>
+                    </a:lnB>
+                    <a:solidFill>
+                      <a:srgbClr val="1F2937"/>
+                    </a:solidFill>
+                  </a:tcPr>
+                </a:tc>
+                <a:tc>
+                  <a:txBody>
+                    <a:bodyPr/>
+                    <a:lstStyle/>
+                    <a:p>
+                      <a:pPr algn="ctr" indent="0" marL="0">
+                        <a:buNone/>
+                      </a:pPr>
+                      <a:r>
+                        <a:rPr lang="en-US" sz="800" b="1" dirty="0">
+                          <a:solidFill>
+                            <a:srgbClr val="FFFFFF"/>
+                          </a:solidFill>
+                          <a:latin typeface="Calibri" pitchFamily="34" charset="0"/>
+                          <a:ea typeface="Calibri" pitchFamily="34" charset="-122"/>
+                          <a:cs typeface="Calibri" pitchFamily="34" charset="-120"/>
+                        </a:rPr>
+                        <a:t>Recv / scrap</a:t>
+                      </a:r>
+                      <a:endParaRPr lang="en-US" sz="800" dirty="0">
+                        <a:latin typeface="Calibri" charset="0"/>
+                        <a:ea typeface="Calibri" charset="0"/>
+                        <a:cs typeface="Calibri" charset="0"/>
+                      </a:endParaRPr>
+                    </a:p>
+                  </a:txBody>
+                  <a:tcPr marL="91440" marR="91440" marT="45720" marB="45720" anchor="ctr">
+                    <a:lnL w="6350" cap="flat" cmpd="sng" algn="ctr">
+                      <a:solidFill>
+                        <a:srgbClr val="E5E7EB"/>
+                      </a:solidFill>
+                      <a:prstDash val="solid"/>
+                      <a:round/>
+                      <a:headEnd type="none" w="med" len="med"/>
+                      <a:tailEnd type="none" w="med" len="med"/>
+                    </a:lnL>
+                    <a:lnR w="6350" cap="flat" cmpd="sng" algn="ctr">
+                      <a:solidFill>
+                        <a:srgbClr val="E5E7EB"/>
+                      </a:solidFill>
+                      <a:prstDash val="solid"/>
+                      <a:round/>
+                      <a:headEnd type="none" w="med" len="med"/>
+                      <a:tailEnd type="none" w="med" len="med"/>
+                    </a:lnR>
+                    <a:lnT w="6350" cap="flat" cmpd="sng" algn="ctr">
+                      <a:solidFill>
+                        <a:srgbClr val="E5E7EB"/>
+                      </a:solidFill>
+                      <a:prstDash val="solid"/>
+                      <a:round/>
+                      <a:headEnd type="none" w="med" len="med"/>
+                      <a:tailEnd type="none" w="med" len="med"/>
+                    </a:lnT>
+                    <a:lnB w="6350" cap="flat" cmpd="sng" algn="ctr">
+                      <a:solidFill>
+                        <a:srgbClr val="E5E7EB"/>
+                      </a:solidFill>
+                      <a:prstDash val="solid"/>
+                      <a:round/>
+                      <a:headEnd type="none" w="med" len="med"/>
+                      <a:tailEnd type="none" w="med" len="med"/>
+                    </a:lnB>
+                    <a:solidFill>
+                      <a:srgbClr val="1F2937"/>
+                    </a:solidFill>
+                  </a:tcPr>
+                </a:tc>
+                <a:tc>
+                  <a:txBody>
+                    <a:bodyPr/>
+                    <a:lstStyle/>
+                    <a:p>
+                      <a:pPr algn="ctr" indent="0" marL="0">
+                        <a:buNone/>
+                      </a:pPr>
+                      <a:r>
+                        <a:rPr lang="en-US" sz="800" b="1" dirty="0">
+                          <a:solidFill>
+                            <a:srgbClr val="FFFFFF"/>
+                          </a:solidFill>
+                          <a:latin typeface="Calibri" pitchFamily="34" charset="0"/>
+                          <a:ea typeface="Calibri" pitchFamily="34" charset="-122"/>
+                          <a:cs typeface="Calibri" pitchFamily="34" charset="-120"/>
+                        </a:rPr>
+                        <a:t>ATM scrap %</a:t>
+                      </a:r>
+                      <a:endParaRPr lang="en-US" sz="800" dirty="0">
+                        <a:latin typeface="Calibri" charset="0"/>
+                        <a:ea typeface="Calibri" charset="0"/>
+                        <a:cs typeface="Calibri" charset="0"/>
+                      </a:endParaRPr>
+                    </a:p>
+                  </a:txBody>
+                  <a:tcPr marL="91440" marR="91440" marT="45720" marB="45720" anchor="ctr">
+                    <a:lnL w="6350" cap="flat" cmpd="sng" algn="ctr">
+                      <a:solidFill>
+                        <a:srgbClr val="E5E7EB"/>
+                      </a:solidFill>
+                      <a:prstDash val="solid"/>
+                      <a:round/>
+                      <a:headEnd type="none" w="med" len="med"/>
+                      <a:tailEnd type="none" w="med" len="med"/>
+                    </a:lnL>
+                    <a:lnR w="6350" cap="flat" cmpd="sng" algn="ctr">
+                      <a:solidFill>
+                        <a:srgbClr val="E5E7EB"/>
+                      </a:solidFill>
+                      <a:prstDash val="solid"/>
+                      <a:round/>
+                      <a:headEnd type="none" w="med" len="med"/>
+                      <a:tailEnd type="none" w="med" len="med"/>
+                    </a:lnR>
+                    <a:lnT w="6350" cap="flat" cmpd="sng" algn="ctr">
+                      <a:solidFill>
+                        <a:srgbClr val="E5E7EB"/>
+                      </a:solidFill>
+                      <a:prstDash val="solid"/>
+                      <a:round/>
+                      <a:headEnd type="none" w="med" len="med"/>
+                      <a:tailEnd type="none" w="med" len="med"/>
+                    </a:lnT>
+                    <a:lnB w="6350" cap="flat" cmpd="sng" algn="ctr">
+                      <a:solidFill>
+                        <a:srgbClr val="E5E7EB"/>
+                      </a:solidFill>
+                      <a:prstDash val="solid"/>
+                      <a:round/>
+                      <a:headEnd type="none" w="med" len="med"/>
+                      <a:tailEnd type="none" w="med" len="med"/>
+                    </a:lnB>
+                    <a:solidFill>
+                      <a:srgbClr val="1F2937"/>
+                    </a:solidFill>
+                  </a:tcPr>
+                </a:tc>
+              </a:tr>
+              <a:tr h="237744">
+                <a:tc>
+                  <a:txBody>
+                    <a:bodyPr/>
+                    <a:lstStyle/>
+                    <a:p>
+                      <a:pPr indent="0" marL="0">
+                        <a:buNone/>
+                      </a:pPr>
+                      <a:r>
+                        <a:rPr lang="en-US" sz="850" dirty="0">
+                          <a:solidFill>
+                            <a:srgbClr val="000000"/>
+                          </a:solidFill>
+                          <a:latin typeface="Calibri" pitchFamily="34" charset="0"/>
+                          <a:ea typeface="Calibri" pitchFamily="34" charset="-122"/>
+                          <a:cs typeface="Calibri" pitchFamily="34" charset="-120"/>
+                        </a:rPr>
+                        <a:t>5502512218</a:t>
+                      </a:r>
+                      <a:endParaRPr lang="en-US" sz="850" dirty="0">
+                        <a:latin typeface="Calibri" charset="0"/>
+                        <a:ea typeface="Calibri" charset="0"/>
+                        <a:cs typeface="Calibri" charset="0"/>
+                      </a:endParaRPr>
+                    </a:p>
+                  </a:txBody>
+                  <a:tcPr marL="91440" marR="91440" marT="45720" marB="45720" anchor="ctr">
+                    <a:lnL w="6350" cap="flat" cmpd="sng" algn="ctr">
+                      <a:solidFill>
+                        <a:srgbClr val="E5E7EB"/>
+                      </a:solidFill>
+                      <a:prstDash val="solid"/>
+                      <a:round/>
+                      <a:headEnd type="none" w="med" len="med"/>
+                      <a:tailEnd type="none" w="med" len="med"/>
+                    </a:lnL>
+                    <a:lnR w="6350" cap="flat" cmpd="sng" algn="ctr">
+                      <a:solidFill>
+                        <a:srgbClr val="E5E7EB"/>
+                      </a:solidFill>
+                      <a:prstDash val="solid"/>
+                      <a:round/>
+                      <a:headEnd type="none" w="med" len="med"/>
+                      <a:tailEnd type="none" w="med" len="med"/>
+                    </a:lnR>
+                    <a:lnT w="6350" cap="flat" cmpd="sng" algn="ctr">
+                      <a:solidFill>
+                        <a:srgbClr val="E5E7EB"/>
+                      </a:solidFill>
+                      <a:prstDash val="solid"/>
+                      <a:round/>
+                      <a:headEnd type="none" w="med" len="med"/>
+                      <a:tailEnd type="none" w="med" len="med"/>
+                    </a:lnT>
+                    <a:lnB w="6350" cap="flat" cmpd="sng" algn="ctr">
+                      <a:solidFill>
+                        <a:srgbClr val="E5E7EB"/>
+                      </a:solidFill>
+                      <a:prstDash val="solid"/>
+                      <a:round/>
+                      <a:headEnd type="none" w="med" len="med"/>
+                      <a:tailEnd type="none" w="med" len="med"/>
+                    </a:lnB>
+                  </a:tcPr>
+                </a:tc>
+                <a:tc>
+                  <a:txBody>
+                    <a:bodyPr/>
+                    <a:lstStyle/>
+                    <a:p>
+                      <a:pPr indent="0" marL="0">
+                        <a:buNone/>
+                      </a:pPr>
+                      <a:r>
+                        <a:rPr lang="en-US" sz="850" dirty="0">
+                          <a:solidFill>
+                            <a:srgbClr val="6B7280"/>
+                          </a:solidFill>
+                          <a:latin typeface="Calibri" pitchFamily="34" charset="0"/>
+                          <a:ea typeface="Calibri" pitchFamily="34" charset="-122"/>
+                          <a:cs typeface="Calibri" pitchFamily="34" charset="-120"/>
+                        </a:rPr>
+                        <a:t>7/29 + 8/5</a:t>
+                      </a:r>
+                      <a:endParaRPr lang="en-US" sz="850" dirty="0">
+                        <a:latin typeface="Calibri" charset="0"/>
+                        <a:ea typeface="Calibri" charset="0"/>
+                        <a:cs typeface="Calibri" charset="0"/>
+                      </a:endParaRPr>
+                    </a:p>
+                  </a:txBody>
+                  <a:tcPr marL="91440" marR="91440" marT="45720" marB="45720" anchor="ctr">
+                    <a:lnL w="6350" cap="flat" cmpd="sng" algn="ctr">
+                      <a:solidFill>
+                        <a:srgbClr val="E5E7EB"/>
+                      </a:solidFill>
+                      <a:prstDash val="solid"/>
+                      <a:round/>
+                      <a:headEnd type="none" w="med" len="med"/>
+                      <a:tailEnd type="none" w="med" len="med"/>
+                    </a:lnL>
+                    <a:lnR w="6350" cap="flat" cmpd="sng" algn="ctr">
+                      <a:solidFill>
+                        <a:srgbClr val="E5E7EB"/>
+                      </a:solidFill>
+                      <a:prstDash val="solid"/>
+                      <a:round/>
+                      <a:headEnd type="none" w="med" len="med"/>
+                      <a:tailEnd type="none" w="med" len="med"/>
+                    </a:lnR>
+                    <a:lnT w="6350" cap="flat" cmpd="sng" algn="ctr">
+                      <a:solidFill>
+                        <a:srgbClr val="E5E7EB"/>
+                      </a:solidFill>
+                      <a:prstDash val="solid"/>
+                      <a:round/>
+                      <a:headEnd type="none" w="med" len="med"/>
+                      <a:tailEnd type="none" w="med" len="med"/>
+                    </a:lnT>
+                    <a:lnB w="6350" cap="flat" cmpd="sng" algn="ctr">
+                      <a:solidFill>
+                        <a:srgbClr val="E5E7EB"/>
+                      </a:solidFill>
+                      <a:prstDash val="solid"/>
+                      <a:round/>
+                      <a:headEnd type="none" w="med" len="med"/>
+                      <a:tailEnd type="none" w="med" len="med"/>
+                    </a:lnB>
+                  </a:tcPr>
+                </a:tc>
+                <a:tc>
+                  <a:txBody>
+                    <a:bodyPr/>
+                    <a:lstStyle/>
+                    <a:p>
+                      <a:pPr algn="ctr" indent="0" marL="0">
+                        <a:buNone/>
+                      </a:pPr>
+                      <a:r>
+                        <a:rPr lang="en-US" sz="850" dirty="0">
+                          <a:solidFill>
+                            <a:srgbClr val="000000"/>
+                          </a:solidFill>
+                          <a:latin typeface="Calibri" pitchFamily="34" charset="0"/>
+                          <a:ea typeface="Calibri" pitchFamily="34" charset="-122"/>
+                          <a:cs typeface="Calibri" pitchFamily="34" charset="-120"/>
+                        </a:rPr>
+                        <a:t>24 / 10</a:t>
+                      </a:r>
+                      <a:endParaRPr lang="en-US" sz="850" dirty="0">
+                        <a:latin typeface="Calibri" charset="0"/>
+                        <a:ea typeface="Calibri" charset="0"/>
+                        <a:cs typeface="Calibri" charset="0"/>
+                      </a:endParaRPr>
+                    </a:p>
+                  </a:txBody>
+                  <a:tcPr marL="91440" marR="91440" marT="45720" marB="45720" anchor="ctr">
+                    <a:lnL w="6350" cap="flat" cmpd="sng" algn="ctr">
+                      <a:solidFill>
+                        <a:srgbClr val="E5E7EB"/>
+                      </a:solidFill>
+                      <a:prstDash val="solid"/>
+                      <a:round/>
+                      <a:headEnd type="none" w="med" len="med"/>
+                      <a:tailEnd type="none" w="med" len="med"/>
+                    </a:lnL>
+                    <a:lnR w="6350" cap="flat" cmpd="sng" algn="ctr">
+                      <a:solidFill>
+                        <a:srgbClr val="E5E7EB"/>
+                      </a:solidFill>
+                      <a:prstDash val="solid"/>
+                      <a:round/>
+                      <a:headEnd type="none" w="med" len="med"/>
+                      <a:tailEnd type="none" w="med" len="med"/>
+                    </a:lnR>
+                    <a:lnT w="6350" cap="flat" cmpd="sng" algn="ctr">
+                      <a:solidFill>
+                        <a:srgbClr val="E5E7EB"/>
+                      </a:solidFill>
+                      <a:prstDash val="solid"/>
+                      <a:round/>
+                      <a:headEnd type="none" w="med" len="med"/>
+                      <a:tailEnd type="none" w="med" len="med"/>
+                    </a:lnT>
+                    <a:lnB w="6350" cap="flat" cmpd="sng" algn="ctr">
+                      <a:solidFill>
+                        <a:srgbClr val="E5E7EB"/>
+                      </a:solidFill>
+                      <a:prstDash val="solid"/>
+                      <a:round/>
+                      <a:headEnd type="none" w="med" len="med"/>
+                      <a:tailEnd type="none" w="med" len="med"/>
+                    </a:lnB>
+                  </a:tcPr>
+                </a:tc>
+                <a:tc>
+                  <a:txBody>
+                    <a:bodyPr/>
+                    <a:lstStyle/>
+                    <a:p>
+                      <a:pPr algn="ctr" indent="0" marL="0">
+                        <a:buNone/>
+                      </a:pPr>
+                      <a:r>
+                        <a:rPr lang="en-US" sz="850" b="1" dirty="0">
+                          <a:solidFill>
+                            <a:srgbClr val="DC2626"/>
+                          </a:solidFill>
+                          <a:latin typeface="Calibri" pitchFamily="34" charset="0"/>
+                          <a:ea typeface="Calibri" pitchFamily="34" charset="-122"/>
+                          <a:cs typeface="Calibri" pitchFamily="34" charset="-120"/>
+                        </a:rPr>
+                        <a:t>41.7%</a:t>
+                      </a:r>
+                      <a:endParaRPr lang="en-US" sz="850" dirty="0">
+                        <a:latin typeface="Calibri" charset="0"/>
+                        <a:ea typeface="Calibri" charset="0"/>
+                        <a:cs typeface="Calibri" charset="0"/>
+                      </a:endParaRPr>
+                    </a:p>
+                  </a:txBody>
+                  <a:tcPr marL="91440" marR="91440" marT="45720" marB="45720" anchor="ctr">
+                    <a:lnL w="6350" cap="flat" cmpd="sng" algn="ctr">
+                      <a:solidFill>
+                        <a:srgbClr val="E5E7EB"/>
+                      </a:solidFill>
+                      <a:prstDash val="solid"/>
+                      <a:round/>
+                      <a:headEnd type="none" w="med" len="med"/>
+                      <a:tailEnd type="none" w="med" len="med"/>
+                    </a:lnL>
+                    <a:lnR w="6350" cap="flat" cmpd="sng" algn="ctr">
+                      <a:solidFill>
+                        <a:srgbClr val="E5E7EB"/>
+                      </a:solidFill>
+                      <a:prstDash val="solid"/>
+                      <a:round/>
+                      <a:headEnd type="none" w="med" len="med"/>
+                      <a:tailEnd type="none" w="med" len="med"/>
+                    </a:lnR>
+                    <a:lnT w="6350" cap="flat" cmpd="sng" algn="ctr">
+                      <a:solidFill>
+                        <a:srgbClr val="E5E7EB"/>
+                      </a:solidFill>
+                      <a:prstDash val="solid"/>
+                      <a:round/>
+                      <a:headEnd type="none" w="med" len="med"/>
+                      <a:tailEnd type="none" w="med" len="med"/>
+                    </a:lnT>
+                    <a:lnB w="6350" cap="flat" cmpd="sng" algn="ctr">
+                      <a:solidFill>
+                        <a:srgbClr val="E5E7EB"/>
+                      </a:solidFill>
+                      <a:prstDash val="solid"/>
+                      <a:round/>
+                      <a:headEnd type="none" w="med" len="med"/>
+                      <a:tailEnd type="none" w="med" len="med"/>
+                    </a:lnB>
+                  </a:tcPr>
+                </a:tc>
+              </a:tr>
+              <a:tr h="237744">
+                <a:tc>
+                  <a:txBody>
+                    <a:bodyPr/>
+                    <a:lstStyle/>
+                    <a:p>
+                      <a:pPr indent="0" marL="0">
+                        <a:buNone/>
+                      </a:pPr>
+                      <a:r>
+                        <a:rPr lang="en-US" sz="850" dirty="0">
+                          <a:solidFill>
+                            <a:srgbClr val="000000"/>
+                          </a:solidFill>
+                          <a:latin typeface="Calibri" pitchFamily="34" charset="0"/>
+                          <a:ea typeface="Calibri" pitchFamily="34" charset="-122"/>
+                          <a:cs typeface="Calibri" pitchFamily="34" charset="-120"/>
+                        </a:rPr>
+                        <a:t>5502523283</a:t>
+                      </a:r>
+                      <a:endParaRPr lang="en-US" sz="850" dirty="0">
+                        <a:latin typeface="Calibri" charset="0"/>
+                        <a:ea typeface="Calibri" charset="0"/>
+                        <a:cs typeface="Calibri" charset="0"/>
+                      </a:endParaRPr>
+                    </a:p>
+                  </a:txBody>
+                  <a:tcPr marL="91440" marR="91440" marT="45720" marB="45720" anchor="ctr">
+                    <a:lnL w="6350" cap="flat" cmpd="sng" algn="ctr">
+                      <a:solidFill>
+                        <a:srgbClr val="E5E7EB"/>
+                      </a:solidFill>
+                      <a:prstDash val="solid"/>
+                      <a:round/>
+                      <a:headEnd type="none" w="med" len="med"/>
+                      <a:tailEnd type="none" w="med" len="med"/>
+                    </a:lnL>
+                    <a:lnR w="6350" cap="flat" cmpd="sng" algn="ctr">
+                      <a:solidFill>
+                        <a:srgbClr val="E5E7EB"/>
+                      </a:solidFill>
+                      <a:prstDash val="solid"/>
+                      <a:round/>
+                      <a:headEnd type="none" w="med" len="med"/>
+                      <a:tailEnd type="none" w="med" len="med"/>
+                    </a:lnR>
+                    <a:lnT w="6350" cap="flat" cmpd="sng" algn="ctr">
+                      <a:solidFill>
+                        <a:srgbClr val="E5E7EB"/>
+                      </a:solidFill>
+                      <a:prstDash val="solid"/>
+                      <a:round/>
+                      <a:headEnd type="none" w="med" len="med"/>
+                      <a:tailEnd type="none" w="med" len="med"/>
+                    </a:lnT>
+                    <a:lnB w="6350" cap="flat" cmpd="sng" algn="ctr">
+                      <a:solidFill>
+                        <a:srgbClr val="E5E7EB"/>
+                      </a:solidFill>
+                      <a:prstDash val="solid"/>
+                      <a:round/>
+                      <a:headEnd type="none" w="med" len="med"/>
+                      <a:tailEnd type="none" w="med" len="med"/>
+                    </a:lnB>
+                  </a:tcPr>
+                </a:tc>
+                <a:tc>
+                  <a:txBody>
+                    <a:bodyPr/>
+                    <a:lstStyle/>
+                    <a:p>
+                      <a:pPr indent="0" marL="0">
+                        <a:buNone/>
+                      </a:pPr>
+                      <a:r>
+                        <a:rPr lang="en-US" sz="850" dirty="0">
+                          <a:solidFill>
+                            <a:srgbClr val="6B7280"/>
+                          </a:solidFill>
+                          <a:latin typeface="Calibri" pitchFamily="34" charset="0"/>
+                          <a:ea typeface="Calibri" pitchFamily="34" charset="-122"/>
+                          <a:cs typeface="Calibri" pitchFamily="34" charset="-120"/>
+                        </a:rPr>
+                        <a:t>8/12 + 8/19</a:t>
+                      </a:r>
+                      <a:endParaRPr lang="en-US" sz="850" dirty="0">
+                        <a:latin typeface="Calibri" charset="0"/>
+                        <a:ea typeface="Calibri" charset="0"/>
+                        <a:cs typeface="Calibri" charset="0"/>
+                      </a:endParaRPr>
+                    </a:p>
+                  </a:txBody>
+                  <a:tcPr marL="91440" marR="91440" marT="45720" marB="45720" anchor="ctr">
+                    <a:lnL w="6350" cap="flat" cmpd="sng" algn="ctr">
+                      <a:solidFill>
+                        <a:srgbClr val="E5E7EB"/>
+                      </a:solidFill>
+                      <a:prstDash val="solid"/>
+                      <a:round/>
+                      <a:headEnd type="none" w="med" len="med"/>
+                      <a:tailEnd type="none" w="med" len="med"/>
+                    </a:lnL>
+                    <a:lnR w="6350" cap="flat" cmpd="sng" algn="ctr">
+                      <a:solidFill>
+                        <a:srgbClr val="E5E7EB"/>
+                      </a:solidFill>
+                      <a:prstDash val="solid"/>
+                      <a:round/>
+                      <a:headEnd type="none" w="med" len="med"/>
+                      <a:tailEnd type="none" w="med" len="med"/>
+                    </a:lnR>
+                    <a:lnT w="6350" cap="flat" cmpd="sng" algn="ctr">
+                      <a:solidFill>
+                        <a:srgbClr val="E5E7EB"/>
+                      </a:solidFill>
+                      <a:prstDash val="solid"/>
+                      <a:round/>
+                      <a:headEnd type="none" w="med" len="med"/>
+                      <a:tailEnd type="none" w="med" len="med"/>
+                    </a:lnT>
+                    <a:lnB w="6350" cap="flat" cmpd="sng" algn="ctr">
+                      <a:solidFill>
+                        <a:srgbClr val="E5E7EB"/>
+                      </a:solidFill>
+                      <a:prstDash val="solid"/>
+                      <a:round/>
+                      <a:headEnd type="none" w="med" len="med"/>
+                      <a:tailEnd type="none" w="med" len="med"/>
+                    </a:lnB>
+                  </a:tcPr>
+                </a:tc>
+                <a:tc>
+                  <a:txBody>
+                    <a:bodyPr/>
+                    <a:lstStyle/>
+                    <a:p>
+                      <a:pPr algn="ctr" indent="0" marL="0">
+                        <a:buNone/>
+                      </a:pPr>
+                      <a:r>
+                        <a:rPr lang="en-US" sz="850" dirty="0">
+                          <a:solidFill>
+                            <a:srgbClr val="000000"/>
+                          </a:solidFill>
+                          <a:latin typeface="Calibri" pitchFamily="34" charset="0"/>
+                          <a:ea typeface="Calibri" pitchFamily="34" charset="-122"/>
+                          <a:cs typeface="Calibri" pitchFamily="34" charset="-120"/>
+                        </a:rPr>
+                        <a:t>29 / 5</a:t>
+                      </a:r>
+                      <a:endParaRPr lang="en-US" sz="850" dirty="0">
+                        <a:latin typeface="Calibri" charset="0"/>
+                        <a:ea typeface="Calibri" charset="0"/>
+                        <a:cs typeface="Calibri" charset="0"/>
+                      </a:endParaRPr>
+                    </a:p>
+                  </a:txBody>
+                  <a:tcPr marL="91440" marR="91440" marT="45720" marB="45720" anchor="ctr">
+                    <a:lnL w="6350" cap="flat" cmpd="sng" algn="ctr">
+                      <a:solidFill>
+                        <a:srgbClr val="E5E7EB"/>
+                      </a:solidFill>
+                      <a:prstDash val="solid"/>
+                      <a:round/>
+                      <a:headEnd type="none" w="med" len="med"/>
+                      <a:tailEnd type="none" w="med" len="med"/>
+                    </a:lnL>
+                    <a:lnR w="6350" cap="flat" cmpd="sng" algn="ctr">
+                      <a:solidFill>
+                        <a:srgbClr val="E5E7EB"/>
+                      </a:solidFill>
+                      <a:prstDash val="solid"/>
+                      <a:round/>
+                      <a:headEnd type="none" w="med" len="med"/>
+                      <a:tailEnd type="none" w="med" len="med"/>
+                    </a:lnR>
+                    <a:lnT w="6350" cap="flat" cmpd="sng" algn="ctr">
+                      <a:solidFill>
+                        <a:srgbClr val="E5E7EB"/>
+                      </a:solidFill>
+                      <a:prstDash val="solid"/>
+                      <a:round/>
+                      <a:headEnd type="none" w="med" len="med"/>
+                      <a:tailEnd type="none" w="med" len="med"/>
+                    </a:lnT>
+                    <a:lnB w="6350" cap="flat" cmpd="sng" algn="ctr">
+                      <a:solidFill>
+                        <a:srgbClr val="E5E7EB"/>
+                      </a:solidFill>
+                      <a:prstDash val="solid"/>
+                      <a:round/>
+                      <a:headEnd type="none" w="med" len="med"/>
+                      <a:tailEnd type="none" w="med" len="med"/>
+                    </a:lnB>
+                  </a:tcPr>
+                </a:tc>
+                <a:tc>
+                  <a:txBody>
+                    <a:bodyPr/>
+                    <a:lstStyle/>
+                    <a:p>
+                      <a:pPr algn="ctr" indent="0" marL="0">
+                        <a:buNone/>
+                      </a:pPr>
+                      <a:r>
+                        <a:rPr lang="en-US" sz="850" b="1" dirty="0">
+                          <a:solidFill>
+                            <a:srgbClr val="B45309"/>
+                          </a:solidFill>
+                          <a:latin typeface="Calibri" pitchFamily="34" charset="0"/>
+                          <a:ea typeface="Calibri" pitchFamily="34" charset="-122"/>
+                          <a:cs typeface="Calibri" pitchFamily="34" charset="-120"/>
+                        </a:rPr>
+                        <a:t>17.2%</a:t>
+                      </a:r>
+                      <a:endParaRPr lang="en-US" sz="850" dirty="0">
+                        <a:latin typeface="Calibri" charset="0"/>
+                        <a:ea typeface="Calibri" charset="0"/>
+                        <a:cs typeface="Calibri" charset="0"/>
+                      </a:endParaRPr>
+                    </a:p>
+                  </a:txBody>
+                  <a:tcPr marL="91440" marR="91440" marT="45720" marB="45720" anchor="ctr">
+                    <a:lnL w="6350" cap="flat" cmpd="sng" algn="ctr">
+                      <a:solidFill>
+                        <a:srgbClr val="E5E7EB"/>
+                      </a:solidFill>
+                      <a:prstDash val="solid"/>
+                      <a:round/>
+                      <a:headEnd type="none" w="med" len="med"/>
+                      <a:tailEnd type="none" w="med" len="med"/>
+                    </a:lnL>
+                    <a:lnR w="6350" cap="flat" cmpd="sng" algn="ctr">
+                      <a:solidFill>
+                        <a:srgbClr val="E5E7EB"/>
+                      </a:solidFill>
+                      <a:prstDash val="solid"/>
+                      <a:round/>
+                      <a:headEnd type="none" w="med" len="med"/>
+                      <a:tailEnd type="none" w="med" len="med"/>
+                    </a:lnR>
+                    <a:lnT w="6350" cap="flat" cmpd="sng" algn="ctr">
+                      <a:solidFill>
+                        <a:srgbClr val="E5E7EB"/>
+                      </a:solidFill>
+                      <a:prstDash val="solid"/>
+                      <a:round/>
+                      <a:headEnd type="none" w="med" len="med"/>
+                      <a:tailEnd type="none" w="med" len="med"/>
+                    </a:lnT>
+                    <a:lnB w="6350" cap="flat" cmpd="sng" algn="ctr">
+                      <a:solidFill>
+                        <a:srgbClr val="E5E7EB"/>
+                      </a:solidFill>
+                      <a:prstDash val="solid"/>
+                      <a:round/>
+                      <a:headEnd type="none" w="med" len="med"/>
+                      <a:tailEnd type="none" w="med" len="med"/>
+                    </a:lnB>
+                  </a:tcPr>
+                </a:tc>
+              </a:tr>
+              <a:tr h="237744">
+                <a:tc>
+                  <a:txBody>
+                    <a:bodyPr/>
+                    <a:lstStyle/>
+                    <a:p>
+                      <a:pPr indent="0" marL="0">
+                        <a:buNone/>
+                      </a:pPr>
+                      <a:r>
+                        <a:rPr lang="en-US" sz="850" dirty="0">
+                          <a:solidFill>
+                            <a:srgbClr val="000000"/>
+                          </a:solidFill>
+                          <a:latin typeface="Calibri" pitchFamily="34" charset="0"/>
+                          <a:ea typeface="Calibri" pitchFamily="34" charset="-122"/>
+                          <a:cs typeface="Calibri" pitchFamily="34" charset="-120"/>
+                        </a:rPr>
+                        <a:t>5502539375</a:t>
+                      </a:r>
+                      <a:endParaRPr lang="en-US" sz="850" dirty="0">
+                        <a:latin typeface="Calibri" charset="0"/>
+                        <a:ea typeface="Calibri" charset="0"/>
+                        <a:cs typeface="Calibri" charset="0"/>
+                      </a:endParaRPr>
+                    </a:p>
+                  </a:txBody>
+                  <a:tcPr marL="91440" marR="91440" marT="45720" marB="45720" anchor="ctr">
+                    <a:lnL w="6350" cap="flat" cmpd="sng" algn="ctr">
+                      <a:solidFill>
+                        <a:srgbClr val="E5E7EB"/>
+                      </a:solidFill>
+                      <a:prstDash val="solid"/>
+                      <a:round/>
+                      <a:headEnd type="none" w="med" len="med"/>
+                      <a:tailEnd type="none" w="med" len="med"/>
+                    </a:lnL>
+                    <a:lnR w="6350" cap="flat" cmpd="sng" algn="ctr">
+                      <a:solidFill>
+                        <a:srgbClr val="E5E7EB"/>
+                      </a:solidFill>
+                      <a:prstDash val="solid"/>
+                      <a:round/>
+                      <a:headEnd type="none" w="med" len="med"/>
+                      <a:tailEnd type="none" w="med" len="med"/>
+                    </a:lnR>
+                    <a:lnT w="6350" cap="flat" cmpd="sng" algn="ctr">
+                      <a:solidFill>
+                        <a:srgbClr val="E5E7EB"/>
+                      </a:solidFill>
+                      <a:prstDash val="solid"/>
+                      <a:round/>
+                      <a:headEnd type="none" w="med" len="med"/>
+                      <a:tailEnd type="none" w="med" len="med"/>
+                    </a:lnT>
+                    <a:lnB w="6350" cap="flat" cmpd="sng" algn="ctr">
+                      <a:solidFill>
+                        <a:srgbClr val="E5E7EB"/>
+                      </a:solidFill>
+                      <a:prstDash val="solid"/>
+                      <a:round/>
+                      <a:headEnd type="none" w="med" len="med"/>
+                      <a:tailEnd type="none" w="med" len="med"/>
+                    </a:lnB>
+                  </a:tcPr>
+                </a:tc>
+                <a:tc>
+                  <a:txBody>
+                    <a:bodyPr/>
+                    <a:lstStyle/>
+                    <a:p>
+                      <a:pPr indent="0" marL="0">
+                        <a:buNone/>
+                      </a:pPr>
+                      <a:r>
+                        <a:rPr lang="en-US" sz="850" dirty="0">
+                          <a:solidFill>
+                            <a:srgbClr val="6B7280"/>
+                          </a:solidFill>
+                          <a:latin typeface="Calibri" pitchFamily="34" charset="0"/>
+                          <a:ea typeface="Calibri" pitchFamily="34" charset="-122"/>
+                          <a:cs typeface="Calibri" pitchFamily="34" charset="-120"/>
+                        </a:rPr>
+                        <a:t>8/26</a:t>
+                      </a:r>
+                      <a:endParaRPr lang="en-US" sz="850" dirty="0">
+                        <a:latin typeface="Calibri" charset="0"/>
+                        <a:ea typeface="Calibri" charset="0"/>
+                        <a:cs typeface="Calibri" charset="0"/>
+                      </a:endParaRPr>
+                    </a:p>
+                  </a:txBody>
+                  <a:tcPr marL="91440" marR="91440" marT="45720" marB="45720" anchor="ctr">
+                    <a:lnL w="6350" cap="flat" cmpd="sng" algn="ctr">
+                      <a:solidFill>
+                        <a:srgbClr val="E5E7EB"/>
+                      </a:solidFill>
+                      <a:prstDash val="solid"/>
+                      <a:round/>
+                      <a:headEnd type="none" w="med" len="med"/>
+                      <a:tailEnd type="none" w="med" len="med"/>
+                    </a:lnL>
+                    <a:lnR w="6350" cap="flat" cmpd="sng" algn="ctr">
+                      <a:solidFill>
+                        <a:srgbClr val="E5E7EB"/>
+                      </a:solidFill>
+                      <a:prstDash val="solid"/>
+                      <a:round/>
+                      <a:headEnd type="none" w="med" len="med"/>
+                      <a:tailEnd type="none" w="med" len="med"/>
+                    </a:lnR>
+                    <a:lnT w="6350" cap="flat" cmpd="sng" algn="ctr">
+                      <a:solidFill>
+                        <a:srgbClr val="E5E7EB"/>
+                      </a:solidFill>
+                      <a:prstDash val="solid"/>
+                      <a:round/>
+                      <a:headEnd type="none" w="med" len="med"/>
+                      <a:tailEnd type="none" w="med" len="med"/>
+                    </a:lnT>
+                    <a:lnB w="6350" cap="flat" cmpd="sng" algn="ctr">
+                      <a:solidFill>
+                        <a:srgbClr val="E5E7EB"/>
+                      </a:solidFill>
+                      <a:prstDash val="solid"/>
+                      <a:round/>
+                      <a:headEnd type="none" w="med" len="med"/>
+                      <a:tailEnd type="none" w="med" len="med"/>
+                    </a:lnB>
+                  </a:tcPr>
+                </a:tc>
+                <a:tc>
+                  <a:txBody>
+                    <a:bodyPr/>
+                    <a:lstStyle/>
+                    <a:p>
+                      <a:pPr algn="ctr" indent="0" marL="0">
+                        <a:buNone/>
+                      </a:pPr>
+                      <a:r>
+                        <a:rPr lang="en-US" sz="850" dirty="0">
+                          <a:solidFill>
+                            <a:srgbClr val="000000"/>
+                          </a:solidFill>
+                          <a:latin typeface="Calibri" pitchFamily="34" charset="0"/>
+                          <a:ea typeface="Calibri" pitchFamily="34" charset="-122"/>
+                          <a:cs typeface="Calibri" pitchFamily="34" charset="-120"/>
+                        </a:rPr>
+                        <a:t>24 / 9</a:t>
+                      </a:r>
+                      <a:endParaRPr lang="en-US" sz="850" dirty="0">
+                        <a:latin typeface="Calibri" charset="0"/>
+                        <a:ea typeface="Calibri" charset="0"/>
+                        <a:cs typeface="Calibri" charset="0"/>
+                      </a:endParaRPr>
+                    </a:p>
+                  </a:txBody>
+                  <a:tcPr marL="91440" marR="91440" marT="45720" marB="45720" anchor="ctr">
+                    <a:lnL w="6350" cap="flat" cmpd="sng" algn="ctr">
+                      <a:solidFill>
+                        <a:srgbClr val="E5E7EB"/>
+                      </a:solidFill>
+                      <a:prstDash val="solid"/>
+                      <a:round/>
+                      <a:headEnd type="none" w="med" len="med"/>
+                      <a:tailEnd type="none" w="med" len="med"/>
+                    </a:lnL>
+                    <a:lnR w="6350" cap="flat" cmpd="sng" algn="ctr">
+                      <a:solidFill>
+                        <a:srgbClr val="E5E7EB"/>
+                      </a:solidFill>
+                      <a:prstDash val="solid"/>
+                      <a:round/>
+                      <a:headEnd type="none" w="med" len="med"/>
+                      <a:tailEnd type="none" w="med" len="med"/>
+                    </a:lnR>
+                    <a:lnT w="6350" cap="flat" cmpd="sng" algn="ctr">
+                      <a:solidFill>
+                        <a:srgbClr val="E5E7EB"/>
+                      </a:solidFill>
+                      <a:prstDash val="solid"/>
+                      <a:round/>
+                      <a:headEnd type="none" w="med" len="med"/>
+                      <a:tailEnd type="none" w="med" len="med"/>
+                    </a:lnT>
+                    <a:lnB w="6350" cap="flat" cmpd="sng" algn="ctr">
+                      <a:solidFill>
+                        <a:srgbClr val="E5E7EB"/>
+                      </a:solidFill>
+                      <a:prstDash val="solid"/>
+                      <a:round/>
+                      <a:headEnd type="none" w="med" len="med"/>
+                      <a:tailEnd type="none" w="med" len="med"/>
+                    </a:lnB>
+                  </a:tcPr>
+                </a:tc>
+                <a:tc>
+                  <a:txBody>
+                    <a:bodyPr/>
+                    <a:lstStyle/>
+                    <a:p>
+                      <a:pPr algn="ctr" indent="0" marL="0">
+                        <a:buNone/>
+                      </a:pPr>
+                      <a:r>
+                        <a:rPr lang="en-US" sz="850" b="1" dirty="0">
+                          <a:solidFill>
+                            <a:srgbClr val="DC2626"/>
+                          </a:solidFill>
+                          <a:latin typeface="Calibri" pitchFamily="34" charset="0"/>
+                          <a:ea typeface="Calibri" pitchFamily="34" charset="-122"/>
+                          <a:cs typeface="Calibri" pitchFamily="34" charset="-120"/>
+                        </a:rPr>
+                        <a:t>37.5%</a:t>
+                      </a:r>
+                      <a:endParaRPr lang="en-US" sz="850" dirty="0">
+                        <a:latin typeface="Calibri" charset="0"/>
+                        <a:ea typeface="Calibri" charset="0"/>
+                        <a:cs typeface="Calibri" charset="0"/>
+                      </a:endParaRPr>
+                    </a:p>
+                  </a:txBody>
+                  <a:tcPr marL="91440" marR="91440" marT="45720" marB="45720" anchor="ctr">
+                    <a:lnL w="6350" cap="flat" cmpd="sng" algn="ctr">
+                      <a:solidFill>
+                        <a:srgbClr val="E5E7EB"/>
+                      </a:solidFill>
+                      <a:prstDash val="solid"/>
+                      <a:round/>
+                      <a:headEnd type="none" w="med" len="med"/>
+                      <a:tailEnd type="none" w="med" len="med"/>
+                    </a:lnL>
+                    <a:lnR w="6350" cap="flat" cmpd="sng" algn="ctr">
+                      <a:solidFill>
+                        <a:srgbClr val="E5E7EB"/>
+                      </a:solidFill>
+                      <a:prstDash val="solid"/>
+                      <a:round/>
+                      <a:headEnd type="none" w="med" len="med"/>
+                      <a:tailEnd type="none" w="med" len="med"/>
+                    </a:lnR>
+                    <a:lnT w="6350" cap="flat" cmpd="sng" algn="ctr">
+                      <a:solidFill>
+                        <a:srgbClr val="E5E7EB"/>
+                      </a:solidFill>
+                      <a:prstDash val="solid"/>
+                      <a:round/>
+                      <a:headEnd type="none" w="med" len="med"/>
+                      <a:tailEnd type="none" w="med" len="med"/>
+                    </a:lnT>
+                    <a:lnB w="6350" cap="flat" cmpd="sng" algn="ctr">
+                      <a:solidFill>
+                        <a:srgbClr val="E5E7EB"/>
+                      </a:solidFill>
+                      <a:prstDash val="solid"/>
+                      <a:round/>
+                      <a:headEnd type="none" w="med" len="med"/>
+                      <a:tailEnd type="none" w="med" len="med"/>
+                    </a:lnB>
+                  </a:tcPr>
+                </a:tc>
+              </a:tr>
+              <a:tr h="237744">
+                <a:tc>
+                  <a:txBody>
+                    <a:bodyPr/>
+                    <a:lstStyle/>
+                    <a:p>
+                      <a:pPr indent="0" marL="0">
+                        <a:buNone/>
+                      </a:pPr>
+                      <a:r>
+                        <a:rPr lang="en-US" sz="850" dirty="0">
+                          <a:solidFill>
+                            <a:srgbClr val="000000"/>
+                          </a:solidFill>
+                          <a:latin typeface="Calibri" pitchFamily="34" charset="0"/>
+                          <a:ea typeface="Calibri" pitchFamily="34" charset="-122"/>
+                          <a:cs typeface="Calibri" pitchFamily="34" charset="-120"/>
+                        </a:rPr>
+                        <a:t>5502550281</a:t>
+                      </a:r>
+                      <a:endParaRPr lang="en-US" sz="850" dirty="0">
+                        <a:latin typeface="Calibri" charset="0"/>
+                        <a:ea typeface="Calibri" charset="0"/>
+                        <a:cs typeface="Calibri" charset="0"/>
+                      </a:endParaRPr>
+                    </a:p>
+                  </a:txBody>
+                  <a:tcPr marL="91440" marR="91440" marT="45720" marB="45720" anchor="ctr">
+                    <a:lnL w="6350" cap="flat" cmpd="sng" algn="ctr">
+                      <a:solidFill>
+                        <a:srgbClr val="E5E7EB"/>
+                      </a:solidFill>
+                      <a:prstDash val="solid"/>
+                      <a:round/>
+                      <a:headEnd type="none" w="med" len="med"/>
+                      <a:tailEnd type="none" w="med" len="med"/>
+                    </a:lnL>
+                    <a:lnR w="6350" cap="flat" cmpd="sng" algn="ctr">
+                      <a:solidFill>
+                        <a:srgbClr val="E5E7EB"/>
+                      </a:solidFill>
+                      <a:prstDash val="solid"/>
+                      <a:round/>
+                      <a:headEnd type="none" w="med" len="med"/>
+                      <a:tailEnd type="none" w="med" len="med"/>
+                    </a:lnR>
+                    <a:lnT w="6350" cap="flat" cmpd="sng" algn="ctr">
+                      <a:solidFill>
+                        <a:srgbClr val="E5E7EB"/>
+                      </a:solidFill>
+                      <a:prstDash val="solid"/>
+                      <a:round/>
+                      <a:headEnd type="none" w="med" len="med"/>
+                      <a:tailEnd type="none" w="med" len="med"/>
+                    </a:lnT>
+                    <a:lnB w="6350" cap="flat" cmpd="sng" algn="ctr">
+                      <a:solidFill>
+                        <a:srgbClr val="E5E7EB"/>
+                      </a:solidFill>
+                      <a:prstDash val="solid"/>
+                      <a:round/>
+                      <a:headEnd type="none" w="med" len="med"/>
+                      <a:tailEnd type="none" w="med" len="med"/>
+                    </a:lnB>
+                  </a:tcPr>
+                </a:tc>
+                <a:tc>
+                  <a:txBody>
+                    <a:bodyPr/>
+                    <a:lstStyle/>
+                    <a:p>
+                      <a:pPr indent="0" marL="0">
+                        <a:buNone/>
+                      </a:pPr>
+                      <a:r>
+                        <a:rPr lang="en-US" sz="850" dirty="0">
+                          <a:solidFill>
+                            <a:srgbClr val="6B7280"/>
+                          </a:solidFill>
+                          <a:latin typeface="Calibri" pitchFamily="34" charset="0"/>
+                          <a:ea typeface="Calibri" pitchFamily="34" charset="-122"/>
+                          <a:cs typeface="Calibri" pitchFamily="34" charset="-120"/>
+                        </a:rPr>
+                        <a:t>9/9</a:t>
+                      </a:r>
+                      <a:endParaRPr lang="en-US" sz="850" dirty="0">
+                        <a:latin typeface="Calibri" charset="0"/>
+                        <a:ea typeface="Calibri" charset="0"/>
+                        <a:cs typeface="Calibri" charset="0"/>
+                      </a:endParaRPr>
+                    </a:p>
+                  </a:txBody>
+                  <a:tcPr marL="91440" marR="91440" marT="45720" marB="45720" anchor="ctr">
+                    <a:lnL w="6350" cap="flat" cmpd="sng" algn="ctr">
+                      <a:solidFill>
+                        <a:srgbClr val="E5E7EB"/>
+                      </a:solidFill>
+                      <a:prstDash val="solid"/>
+                      <a:round/>
+                      <a:headEnd type="none" w="med" len="med"/>
+                      <a:tailEnd type="none" w="med" len="med"/>
+                    </a:lnL>
+                    <a:lnR w="6350" cap="flat" cmpd="sng" algn="ctr">
+                      <a:solidFill>
+                        <a:srgbClr val="E5E7EB"/>
+                      </a:solidFill>
+                      <a:prstDash val="solid"/>
+                      <a:round/>
+                      <a:headEnd type="none" w="med" len="med"/>
+                      <a:tailEnd type="none" w="med" len="med"/>
+                    </a:lnR>
+                    <a:lnT w="6350" cap="flat" cmpd="sng" algn="ctr">
+                      <a:solidFill>
+                        <a:srgbClr val="E5E7EB"/>
+                      </a:solidFill>
+                      <a:prstDash val="solid"/>
+                      <a:round/>
+                      <a:headEnd type="none" w="med" len="med"/>
+                      <a:tailEnd type="none" w="med" len="med"/>
+                    </a:lnT>
+                    <a:lnB w="6350" cap="flat" cmpd="sng" algn="ctr">
+                      <a:solidFill>
+                        <a:srgbClr val="E5E7EB"/>
+                      </a:solidFill>
+                      <a:prstDash val="solid"/>
+                      <a:round/>
+                      <a:headEnd type="none" w="med" len="med"/>
+                      <a:tailEnd type="none" w="med" len="med"/>
+                    </a:lnB>
+                  </a:tcPr>
+                </a:tc>
+                <a:tc>
+                  <a:txBody>
+                    <a:bodyPr/>
+                    <a:lstStyle/>
+                    <a:p>
+                      <a:pPr algn="ctr" indent="0" marL="0">
+                        <a:buNone/>
+                      </a:pPr>
+                      <a:r>
+                        <a:rPr lang="en-US" sz="850" dirty="0">
+                          <a:solidFill>
+                            <a:srgbClr val="000000"/>
+                          </a:solidFill>
+                          <a:latin typeface="Calibri" pitchFamily="34" charset="0"/>
+                          <a:ea typeface="Calibri" pitchFamily="34" charset="-122"/>
+                          <a:cs typeface="Calibri" pitchFamily="34" charset="-120"/>
+                        </a:rPr>
+                        <a:t>50 / 0</a:t>
+                      </a:r>
+                      <a:endParaRPr lang="en-US" sz="850" dirty="0">
+                        <a:latin typeface="Calibri" charset="0"/>
+                        <a:ea typeface="Calibri" charset="0"/>
+                        <a:cs typeface="Calibri" charset="0"/>
+                      </a:endParaRPr>
+                    </a:p>
+                  </a:txBody>
+                  <a:tcPr marL="91440" marR="91440" marT="45720" marB="45720" anchor="ctr">
+                    <a:lnL w="6350" cap="flat" cmpd="sng" algn="ctr">
+                      <a:solidFill>
+                        <a:srgbClr val="E5E7EB"/>
+                      </a:solidFill>
+                      <a:prstDash val="solid"/>
+                      <a:round/>
+                      <a:headEnd type="none" w="med" len="med"/>
+                      <a:tailEnd type="none" w="med" len="med"/>
+                    </a:lnL>
+                    <a:lnR w="6350" cap="flat" cmpd="sng" algn="ctr">
+                      <a:solidFill>
+                        <a:srgbClr val="E5E7EB"/>
+                      </a:solidFill>
+                      <a:prstDash val="solid"/>
+                      <a:round/>
+                      <a:headEnd type="none" w="med" len="med"/>
+                      <a:tailEnd type="none" w="med" len="med"/>
+                    </a:lnR>
+                    <a:lnT w="6350" cap="flat" cmpd="sng" algn="ctr">
+                      <a:solidFill>
+                        <a:srgbClr val="E5E7EB"/>
+                      </a:solidFill>
+                      <a:prstDash val="solid"/>
+                      <a:round/>
+                      <a:headEnd type="none" w="med" len="med"/>
+                      <a:tailEnd type="none" w="med" len="med"/>
+                    </a:lnT>
+                    <a:lnB w="6350" cap="flat" cmpd="sng" algn="ctr">
+                      <a:solidFill>
+                        <a:srgbClr val="E5E7EB"/>
+                      </a:solidFill>
+                      <a:prstDash val="solid"/>
+                      <a:round/>
+                      <a:headEnd type="none" w="med" len="med"/>
+                      <a:tailEnd type="none" w="med" len="med"/>
+                    </a:lnB>
+                  </a:tcPr>
+                </a:tc>
+                <a:tc>
+                  <a:txBody>
+                    <a:bodyPr/>
+                    <a:lstStyle/>
+                    <a:p>
+                      <a:pPr algn="ctr" indent="0" marL="0">
+                        <a:buNone/>
+                      </a:pPr>
+                      <a:r>
+                        <a:rPr lang="en-US" sz="850" b="1" dirty="0">
+                          <a:solidFill>
+                            <a:srgbClr val="6B7280"/>
+                          </a:solidFill>
+                          <a:latin typeface="Calibri" pitchFamily="34" charset="0"/>
+                          <a:ea typeface="Calibri" pitchFamily="34" charset="-122"/>
+                          <a:cs typeface="Calibri" pitchFamily="34" charset="-120"/>
+                        </a:rPr>
+                        <a:t>not yet reviewed</a:t>
+                      </a:r>
+                      <a:endParaRPr lang="en-US" sz="850" dirty="0">
+                        <a:latin typeface="Calibri" charset="0"/>
+                        <a:ea typeface="Calibri" charset="0"/>
+                        <a:cs typeface="Calibri" charset="0"/>
+                      </a:endParaRPr>
+                    </a:p>
+                  </a:txBody>
+                  <a:tcPr marL="91440" marR="91440" marT="45720" marB="45720" anchor="ctr">
+                    <a:lnL w="6350" cap="flat" cmpd="sng" algn="ctr">
+                      <a:solidFill>
+                        <a:srgbClr val="E5E7EB"/>
+                      </a:solidFill>
+                      <a:prstDash val="solid"/>
+                      <a:round/>
+                      <a:headEnd type="none" w="med" len="med"/>
+                      <a:tailEnd type="none" w="med" len="med"/>
+                    </a:lnL>
+                    <a:lnR w="6350" cap="flat" cmpd="sng" algn="ctr">
+                      <a:solidFill>
+                        <a:srgbClr val="E5E7EB"/>
+                      </a:solidFill>
+                      <a:prstDash val="solid"/>
+                      <a:round/>
+                      <a:headEnd type="none" w="med" len="med"/>
+                      <a:tailEnd type="none" w="med" len="med"/>
+                    </a:lnR>
+                    <a:lnT w="6350" cap="flat" cmpd="sng" algn="ctr">
+                      <a:solidFill>
+                        <a:srgbClr val="E5E7EB"/>
+                      </a:solidFill>
+                      <a:prstDash val="solid"/>
+                      <a:round/>
+                      <a:headEnd type="none" w="med" len="med"/>
+                      <a:tailEnd type="none" w="med" len="med"/>
+                    </a:lnT>
+                    <a:lnB w="6350" cap="flat" cmpd="sng" algn="ctr">
+                      <a:solidFill>
+                        <a:srgbClr val="E5E7EB"/>
+                      </a:solidFill>
+                      <a:prstDash val="solid"/>
+                      <a:round/>
+                      <a:headEnd type="none" w="med" len="med"/>
+                      <a:tailEnd type="none" w="med" len="med"/>
+                    </a:lnB>
+                  </a:tcPr>
+                </a:tc>
+              </a:tr>
+            </a:tbl>
+          </a:graphicData>
+        </a:graphic>
+      </p:graphicFrame>
+      <p:sp>
+        <p:nvSpPr>
+          <p:cNvPr id="12" name="Shape 6"/>
+          <p:cNvSpPr/>
+          <p:nvPr/>
+        </p:nvSpPr>
+        <p:spPr>
+          <a:xfrm>
+            <a:off x="411480" y="5166360"/>
+            <a:ext cx="5806440" cy="1463040"/>
+          </a:xfrm>
+          <a:prstGeom prst="roundRect">
+            <a:avLst>
+              <a:gd name="adj" fmla="val 3125"/>
+            </a:avLst>
+          </a:prstGeom>
+          <a:solidFill>
+            <a:srgbClr val="E0F2F7"/>
+          </a:solidFill>
+          <a:ln/>
+        </p:spPr>
+      </p:sp>
+      <p:sp>
+        <p:nvSpPr>
+          <p:cNvPr id="13" name="Text 7"/>
+          <p:cNvSpPr/>
+          <p:nvPr/>
+        </p:nvSpPr>
+        <p:spPr>
+          <a:xfrm>
+            <a:off x="576072" y="5248656"/>
+            <a:ext cx="2743200" cy="201168"/>
+          </a:xfrm>
+          <a:prstGeom prst="rect">
+            <a:avLst/>
+          </a:prstGeom>
+          <a:noFill/>
+          <a:ln/>
+        </p:spPr>
+        <p:txBody>
+          <a:bodyPr wrap="square" lIns="0" tIns="0" rIns="0" bIns="0" rtlCol="0" anchor="ctr"/>
+          <a:lstStyle/>
+          <a:p>
+            <a:pPr indent="0" marL="0">
+              <a:buNone/>
+            </a:pPr>
+            <a:r>
+              <a:rPr lang="en-US" sz="1000" b="1" dirty="0">
+                <a:solidFill>
+                  <a:srgbClr val="0E7490"/>
+                </a:solidFill>
+                <a:latin typeface="Calibri" pitchFamily="34" charset="0"/>
+                <a:ea typeface="Calibri" pitchFamily="34" charset="-122"/>
+                <a:cs typeface="Calibri" pitchFamily="34" charset="-120"/>
+              </a:rPr>
+              <a:t>The read</a:t>
+            </a:r>
+            <a:endParaRPr lang="en-US" sz="1000" dirty="0"/>
+          </a:p>
+        </p:txBody>
+      </p:sp>
+      <p:sp>
+        <p:nvSpPr>
+          <p:cNvPr id="14" name="Text 8"/>
+          <p:cNvSpPr/>
+          <p:nvPr/>
+        </p:nvSpPr>
+        <p:spPr>
+          <a:xfrm>
+            <a:off x="603504" y="5468112"/>
+            <a:ext cx="5486400" cy="1097280"/>
+          </a:xfrm>
+          <a:prstGeom prst="rect">
+            <a:avLst/>
+          </a:prstGeom>
+          <a:noFill/>
+          <a:ln/>
+        </p:spPr>
+        <p:txBody>
+          <a:bodyPr wrap="square" lIns="0" tIns="0" rIns="0" bIns="0" rtlCol="0" anchor="ctr"/>
+          <a:lstStyle/>
+          <a:p>
+            <a:pPr marL="342900" indent="-342900">
+              <a:spcAft>
+                <a:spcPts val="300"/>
+              </a:spcAft>
+              <a:buSzPct val="100000"/>
+              <a:buChar char="➢"/>
+            </a:pPr>
+            <a:r>
+              <a:rPr lang="en-US" sz="840" dirty="0">
+                <a:solidFill>
+                  <a:srgbClr val="1F2937"/>
+                </a:solidFill>
+                <a:latin typeface="Calibri" pitchFamily="34" charset="0"/>
+                <a:ea typeface="Calibri" pitchFamily="34" charset="-122"/>
+                <a:cs typeface="Calibri" pitchFamily="34" charset="-120"/>
+              </a:rPr>
+              <a:t>24 usable thoracics from 113 received (89 scrapped, 78.8%) — a harvesting problem, not a screening one: our QC accepted 88.9–100% of what Jordan passed.</a:t>
+            </a:r>
+            <a:endParaRPr lang="en-US" sz="840" dirty="0"/>
+          </a:p>
+          <a:p>
+            <a:pPr marL="342900" indent="-342900">
+              <a:spcAft>
+                <a:spcPts val="300"/>
+              </a:spcAft>
+              <a:buSzPct val="100000"/>
+              <a:buChar char="➢"/>
+            </a:pPr>
+            <a:r>
+              <a:rPr lang="en-US" sz="840" dirty="0">
+                <a:solidFill>
+                  <a:srgbClr val="1F2937"/>
+                </a:solidFill>
+                <a:latin typeface="Calibri" pitchFamily="34" charset="0"/>
+                <a:ea typeface="Calibri" pitchFamily="34" charset="-122"/>
+                <a:cs typeface="Calibri" pitchFamily="34" charset="-120"/>
+              </a:rPr>
+              <a:t>Two levers proved real: Francisco's team engagement preceded the 8/26 rebound to 44.4%, and Jordan's harvest screen aligns with our spec.</a:t>
+            </a:r>
+            <a:endParaRPr lang="en-US" sz="840" dirty="0"/>
+          </a:p>
+          <a:p>
+            <a:pPr marL="342900" indent="-342900">
+              <a:spcAft>
+                <a:spcPts val="300"/>
+              </a:spcAft>
+              <a:buSzPct val="100000"/>
+              <a:buChar char="➢"/>
+            </a:pPr>
+            <a:r>
+              <a:rPr lang="en-US" sz="840" dirty="0">
+                <a:solidFill>
+                  <a:srgbClr val="1F2937"/>
+                </a:solidFill>
+                <a:latin typeface="Calibri" pitchFamily="34" charset="0"/>
+                <a:ea typeface="Calibri" pitchFamily="34" charset="-122"/>
+                <a:cs typeface="Calibri" pitchFamily="34" charset="-120"/>
+              </a:rPr>
+              <a:t>9/9 collapse (10.5%) is mostly commercial, not technique: 9 of 17 rejects were missing trachea — tracheas go to another buyer.</a:t>
+            </a:r>
+            <a:endParaRPr lang="en-US" sz="840" dirty="0"/>
+          </a:p>
+        </p:txBody>
+      </p:sp>
+      <p:sp>
+        <p:nvSpPr>
+          <p:cNvPr id="15" name="Shape 9"/>
+          <p:cNvSpPr/>
+          <p:nvPr/>
+        </p:nvSpPr>
+        <p:spPr>
+          <a:xfrm>
+            <a:off x="6382512" y="5166360"/>
+            <a:ext cx="5394960" cy="1463040"/>
+          </a:xfrm>
+          <a:prstGeom prst="roundRect">
+            <a:avLst>
+              <a:gd name="adj" fmla="val 3125"/>
+            </a:avLst>
+          </a:prstGeom>
+          <a:solidFill>
+            <a:srgbClr val="F3F4F6"/>
+          </a:solidFill>
+          <a:ln w="9525">
+            <a:solidFill>
+              <a:srgbClr val="E5E7EB"/>
+            </a:solidFill>
+            <a:prstDash val="solid"/>
+          </a:ln>
+        </p:spPr>
+      </p:sp>
+      <p:sp>
+        <p:nvSpPr>
+          <p:cNvPr id="16" name="Text 10"/>
+          <p:cNvSpPr/>
+          <p:nvPr/>
+        </p:nvSpPr>
+        <p:spPr>
+          <a:xfrm>
+            <a:off x="6547104" y="5248656"/>
+            <a:ext cx="2743200" cy="201168"/>
+          </a:xfrm>
+          <a:prstGeom prst="rect">
+            <a:avLst/>
+          </a:prstGeom>
+          <a:noFill/>
+          <a:ln/>
+        </p:spPr>
+        <p:txBody>
+          <a:bodyPr wrap="square" lIns="0" tIns="0" rIns="0" bIns="0" rtlCol="0" anchor="ctr"/>
+          <a:lstStyle/>
+          <a:p>
+            <a:pPr indent="0" marL="0">
+              <a:buNone/>
+            </a:pPr>
+            <a:r>
+              <a:rPr lang="en-US" sz="1000" b="1" dirty="0">
+                <a:solidFill>
+                  <a:srgbClr val="1F2937"/>
+                </a:solidFill>
+                <a:latin typeface="Calibri" pitchFamily="34" charset="0"/>
+                <a:ea typeface="Calibri" pitchFamily="34" charset="-122"/>
+                <a:cs typeface="Calibri" pitchFamily="34" charset="-120"/>
+              </a:rPr>
+              <a:t>Asks / watch</a:t>
+            </a:r>
+            <a:endParaRPr lang="en-US" sz="1000" dirty="0"/>
+          </a:p>
+        </p:txBody>
+      </p:sp>
+      <p:sp>
+        <p:nvSpPr>
+          <p:cNvPr id="17" name="Text 11"/>
+          <p:cNvSpPr/>
+          <p:nvPr/>
+        </p:nvSpPr>
+        <p:spPr>
+          <a:xfrm>
+            <a:off x="6574536" y="5468112"/>
+            <a:ext cx="5074920" cy="1097280"/>
+          </a:xfrm>
+          <a:prstGeom prst="rect">
+            <a:avLst/>
+          </a:prstGeom>
+          <a:noFill/>
+          <a:ln/>
+        </p:spPr>
+        <p:txBody>
+          <a:bodyPr wrap="square" lIns="0" tIns="0" rIns="0" bIns="0" rtlCol="0" anchor="ctr"/>
+          <a:lstStyle/>
+          <a:p>
+            <a:pPr marL="342900" indent="-342900">
+              <a:spcAft>
+                <a:spcPts val="300"/>
+              </a:spcAft>
+              <a:buSzPct val="100000"/>
+              <a:buChar char="➢"/>
+            </a:pPr>
+            <a:r>
+              <a:rPr lang="en-US" sz="840" dirty="0">
+                <a:solidFill>
+                  <a:srgbClr val="1F2937"/>
+                </a:solidFill>
+                <a:latin typeface="Calibri" pitchFamily="34" charset="0"/>
+                <a:ea typeface="Calibri" pitchFamily="34" charset="-122"/>
+                <a:cs typeface="Calibri" pitchFamily="34" charset="-120"/>
+              </a:rPr>
+              <a:t>Settle the trachea arrangement — it decides thoracic viability at Nahunta.</a:t>
+            </a:r>
+            <a:endParaRPr lang="en-US" sz="840" dirty="0"/>
+          </a:p>
+          <a:p>
+            <a:pPr marL="342900" indent="-342900">
+              <a:spcAft>
+                <a:spcPts val="300"/>
+              </a:spcAft>
+              <a:buSzPct val="100000"/>
+              <a:buChar char="➢"/>
+            </a:pPr>
+            <a:r>
+              <a:rPr lang="en-US" sz="840" dirty="0">
+                <a:solidFill>
+                  <a:srgbClr val="1F2937"/>
+                </a:solidFill>
+                <a:latin typeface="Calibri" pitchFamily="34" charset="0"/>
+                <a:ea typeface="Calibri" pitchFamily="34" charset="-122"/>
+                <a:cs typeface="Calibri" pitchFamily="34" charset="-120"/>
+              </a:rPr>
+              <a:t>Harvest-technique corrective with Francisco's team on lung-perimeter cuts; track Jordan's reject rate as the leading indicator.</a:t>
+            </a:r>
+            <a:endParaRPr lang="en-US" sz="840" dirty="0"/>
+          </a:p>
+          <a:p>
+            <a:pPr marL="342900" indent="-342900">
+              <a:spcAft>
+                <a:spcPts val="300"/>
+              </a:spcAft>
+              <a:buSzPct val="100000"/>
+              <a:buChar char="➢"/>
+            </a:pPr>
+            <a:r>
+              <a:rPr lang="en-US" sz="840" dirty="0">
+                <a:solidFill>
+                  <a:srgbClr val="1F2937"/>
+                </a:solidFill>
+                <a:latin typeface="Calibri" pitchFamily="34" charset="0"/>
+                <a:ea typeface="Calibri" pitchFamily="34" charset="-122"/>
+                <a:cs typeface="Calibri" pitchFamily="34" charset="-120"/>
+              </a:rPr>
+              <a:t>Standard five-number tally every visit; ATM review of 5502550281 pending (50 received).</a:t>
+            </a:r>
+            <a:endParaRPr lang="en-US" sz="840" dirty="0"/>
           </a:p>
         </p:txBody>
       </p:sp>
